--- a/docs/content/getting_started/getting_started_lecture.pptx
+++ b/docs/content/getting_started/getting_started_lecture.pptx
@@ -31,16 +31,6 @@
     <p:sldId id="279" r:id="rId25"/>
     <p:sldId id="280" r:id="rId26"/>
     <p:sldId id="281" r:id="rId27"/>
-    <p:sldId id="282" r:id="rId28"/>
-    <p:sldId id="283" r:id="rId29"/>
-    <p:sldId id="284" r:id="rId30"/>
-    <p:sldId id="285" r:id="rId31"/>
-    <p:sldId id="286" r:id="rId32"/>
-    <p:sldId id="287" r:id="rId33"/>
-    <p:sldId id="288" r:id="rId34"/>
-    <p:sldId id="289" r:id="rId35"/>
-    <p:sldId id="290" r:id="rId36"/>
-    <p:sldId id="291" r:id="rId37"/>
   </p:sldIdLst>
   <p:sldSz cx="9144000" cy="5143500" type="screen16x9"/>
   <p:notesSz cx="6858000" cy="9144000"/>
@@ -3404,8 +3394,11 @@
         <p:spPr>
           <a:xfrm>
             <a:off x="0" y="0"/>
-            <a:ext cx="9144000" cy="582780"/>
+            <a:ext cx="9144000" cy="602780"/>
           </a:xfrm>
+          <a:solidFill>
+            <a:srgbClr val="70121D"/>
+          </a:solidFill>
         </p:spPr>
         <p:txBody>
           <a:bodyPr/>
@@ -3416,7 +3409,7 @@
             </a:pPr>
             <a:r>
               <a:rPr/>
-              <a:t>Part 2 · Organizing Your Project</a:t>
+              <a:t>Data is the raw material — treat it that way</a:t>
             </a:r>
           </a:p>
         </p:txBody>
@@ -3428,7 +3421,7 @@
             <a:spLocks noGrp="1"/>
           </p:cNvSpPr>
           <p:nvPr>
-            <p:ph idx="1"/>
+            <p:ph idx="1" sz="half"/>
           </p:nvPr>
         </p:nvSpPr>
         <p:spPr/>
@@ -3436,15 +3429,117 @@
           <a:bodyPr/>
           <a:lstStyle/>
           <a:p>
-            <a:pPr lvl="0" indent="0" marL="0">
-              <a:spcBef>
-                <a:spcPts val="3000"/>
-              </a:spcBef>
-              <a:buNone/>
-            </a:pPr>
+            <a:pPr lvl="0"/>
+            <a:r>
+              <a:rPr/>
+              <a:t>Decide your </a:t>
+            </a:r>
             <a:r>
               <a:rPr b="1"/>
-              <a:t>Data is the raw material — treat it that way</a:t>
+              <a:t>variable names and units before you collect anything</a:t>
+            </a:r>
+            <a:r>
+              <a:rPr/>
+              <a:t> — this is a </a:t>
+            </a:r>
+            <a:r>
+              <a:rPr b="1"/>
+              <a:t>controlled vocabulary</a:t>
+            </a:r>
+          </a:p>
+          <a:p>
+            <a:pPr lvl="0"/>
+            <a:r>
+              <a:rPr/>
+              <a:t>Example: </a:t>
+            </a:r>
+            <a:r>
+              <a:rPr>
+                <a:latin typeface="Courier"/>
+              </a:rPr>
+              <a:t>length_mm</a:t>
+            </a:r>
+            <a:r>
+              <a:rPr/>
+              <a:t>, not </a:t>
+            </a:r>
+            <a:r>
+              <a:rPr>
+                <a:latin typeface="Courier"/>
+              </a:rPr>
+              <a:t>Length (mm)</a:t>
+            </a:r>
+            <a:r>
+              <a:rPr/>
+              <a:t> — no spaces, no units hidden in the header text, all lowercase</a:t>
+            </a:r>
+          </a:p>
+          <a:p>
+            <a:pPr lvl="0"/>
+            <a:r>
+              <a:rPr/>
+              <a:t>Plan where data goes the moment you collect it — do not let it pile up in email or texts</a:t>
+            </a:r>
+          </a:p>
+          <a:p>
+            <a:pPr lvl="0" indent="0" marL="1270000">
+              <a:buNone/>
+            </a:pPr>
+            <a:r>
+              <a:rPr sz="2000" b="1"/>
+              <a:t>Note</a:t>
+            </a:r>
+          </a:p>
+          <a:p>
+            <a:pPr lvl="0" indent="0" marL="1270000">
+              <a:buNone/>
+            </a:pPr>
+            <a:r>
+              <a:rPr sz="2000" b="1"/>
+              <a:t>✅ Key idea</a:t>
+            </a:r>
+          </a:p>
+          <a:p>
+            <a:pPr lvl="0" indent="0" marL="1270000">
+              <a:buNone/>
+            </a:pPr>
+            <a:r>
+              <a:rPr sz="2000"/>
+              <a:t>A few minutes of naming discipline today saves hours of confusion in Module 2, when we clean messy data.</a:t>
+            </a:r>
+          </a:p>
+        </p:txBody>
+      </p:sp>
+      <p:sp>
+        <p:nvSpPr>
+          <p:cNvPr id="4" name="Content Placeholder 3"/>
+          <p:cNvSpPr>
+            <a:spLocks noGrp="1"/>
+          </p:cNvSpPr>
+          <p:nvPr>
+            <p:ph idx="2" sz="half"/>
+          </p:nvPr>
+        </p:nvSpPr>
+        <p:spPr/>
+        <p:txBody>
+          <a:bodyPr/>
+          <a:lstStyle/>
+          <a:p>
+            <a:pPr lvl="0" indent="0" marL="1270000">
+              <a:buNone/>
+            </a:pPr>
+            <a:r>
+              <a:rPr sz="2000" b="1"/>
+              <a:t>Tip</a:t>
+            </a:r>
+          </a:p>
+          <a:p>
+            <a:pPr lvl="0" indent="0" marL="1270000">
+              <a:buNone/>
+            </a:pPr>
+            <a:r>
+              <a:rPr sz="2000" b="1"/>
+              <a:t>Controlled vocabulary example</a:t>
             </a:r>
           </a:p>
         </p:txBody>
@@ -3473,69 +3568,99 @@
       </p:grpSpPr>
       <p:sp>
         <p:nvSpPr>
-          <p:cNvPr id="3" name="Content Placeholder 2"/>
-          <p:cNvSpPr>
-            <a:spLocks noGrp="1"/>
-          </p:cNvSpPr>
-          <p:nvPr>
-            <p:ph idx="1" sz="half"/>
-          </p:nvPr>
-        </p:nvSpPr>
-        <p:spPr/>
+          <p:cNvPr id="2" name="Title 1"/>
+          <p:cNvSpPr>
+            <a:spLocks noGrp="1"/>
+          </p:cNvSpPr>
+          <p:nvPr>
+            <p:ph type="title"/>
+          </p:nvPr>
+        </p:nvSpPr>
+        <p:spPr>
+          <a:xfrm>
+            <a:off x="0" y="0"/>
+            <a:ext cx="9144000" cy="602780"/>
+          </a:xfrm>
+          <a:solidFill>
+            <a:srgbClr val="70121D"/>
+          </a:solidFill>
+        </p:spPr>
         <p:txBody>
           <a:bodyPr/>
           <a:lstStyle/>
           <a:p>
+            <a:pPr lvl="0" indent="0" marL="0">
+              <a:buNone/>
+            </a:pPr>
+            <a:r>
+              <a:rPr/>
+              <a:t>One folder per project</a:t>
+            </a:r>
+          </a:p>
+        </p:txBody>
+      </p:sp>
+      <p:sp>
+        <p:nvSpPr>
+          <p:cNvPr id="3" name="Content Placeholder 2"/>
+          <p:cNvSpPr>
+            <a:spLocks noGrp="1"/>
+          </p:cNvSpPr>
+          <p:nvPr>
+            <p:ph idx="1" sz="half"/>
+          </p:nvPr>
+        </p:nvSpPr>
+        <p:spPr/>
+        <p:txBody>
+          <a:bodyPr/>
+          <a:lstStyle/>
+          <a:p>
+            <a:pPr lvl="0" indent="0">
+              <a:buNone/>
+            </a:pPr>
+            <a:r>
+              <a:rPr>
+                <a:latin typeface="Courier"/>
+              </a:rPr>
+              <a:t>pine_project/
+├── data/       ← raw files, never overwritten
+├── scripts/    ← your .R code
+└── figures/    ← plots you save</a:t>
+            </a:r>
+          </a:p>
+          <a:p>
             <a:pPr lvl="0"/>
             <a:r>
               <a:rPr/>
-              <a:t>Decide your </a:t>
+              <a:t>Open this folder as your workspace in Positron (</a:t>
             </a:r>
             <a:r>
               <a:rPr b="1"/>
-              <a:t>variable names and units before you collect anything</a:t>
-            </a:r>
-            <a:r>
-              <a:rPr/>
-              <a:t> — this is a </a:t>
+              <a:t>File → Open Folder…</a:t>
+            </a:r>
+            <a:r>
+              <a:rPr/>
+              <a:t>)</a:t>
+            </a:r>
+          </a:p>
+          <a:p>
+            <a:pPr lvl="0"/>
+            <a:r>
+              <a:rPr/>
+              <a:t>Every file path then becomes </a:t>
             </a:r>
             <a:r>
               <a:rPr b="1"/>
-              <a:t>controlled vocabulary</a:t>
-            </a:r>
-          </a:p>
-          <a:p>
-            <a:pPr lvl="0"/>
-            <a:r>
-              <a:rPr/>
-              <a:t>Example: </a:t>
-            </a:r>
-            <a:r>
-              <a:rPr>
-                <a:latin typeface="Courier"/>
-              </a:rPr>
-              <a:t>length_mm</a:t>
-            </a:r>
-            <a:r>
-              <a:rPr/>
-              <a:t>, not </a:t>
-            </a:r>
-            <a:r>
-              <a:rPr>
-                <a:latin typeface="Courier"/>
-              </a:rPr>
-              <a:t>Length (mm)</a:t>
-            </a:r>
-            <a:r>
-              <a:rPr/>
-              <a:t> — no spaces, no units hidden in the header text, all lowercase</a:t>
-            </a:r>
-          </a:p>
-          <a:p>
-            <a:pPr lvl="0"/>
-            <a:r>
-              <a:rPr/>
-              <a:t>Plan where data goes the moment you collect it — do not let it pile up in email or texts</a:t>
+              <a:t>relative</a:t>
+            </a:r>
+            <a:r>
+              <a:rPr/>
+              <a:t> — no more </a:t>
+            </a:r>
+            <a:r>
+              <a:rPr>
+                <a:latin typeface="Courier"/>
+              </a:rPr>
+              <a:t>C:/Users/.../Desktop/final_FINAL2.xlsx</a:t>
             </a:r>
           </a:p>
           <a:p>
@@ -3562,7 +3687,15 @@
             </a:pPr>
             <a:r>
               <a:rPr sz="2000"/>
-              <a:t>A few minutes of naming discipline today saves hours of confusion in Module 2, when we clean messy data.</a:t>
+              <a:t>Keep </a:t>
+            </a:r>
+            <a:r>
+              <a:rPr sz="2000" b="1"/>
+              <a:t>raw data untouched</a:t>
+            </a:r>
+            <a:r>
+              <a:rPr sz="2000"/>
+              <a:t>. R writes new, processed files — so you can always trace your steps back to the original numbers.</a:t>
             </a:r>
           </a:p>
         </p:txBody>
@@ -3587,7 +3720,7 @@
             </a:pPr>
             <a:r>
               <a:rPr sz="2000" b="1"/>
-              <a:t>Tip</a:t>
+              <a:t>Note</a:t>
             </a:r>
           </a:p>
           <a:p>
@@ -3596,7 +3729,28 @@
             </a:pPr>
             <a:r>
               <a:rPr sz="2000" b="1"/>
-              <a:t>Controlled vocabulary example</a:t>
+              <a:t>📖 New word</a:t>
+            </a:r>
+          </a:p>
+          <a:p>
+            <a:pPr lvl="0" indent="0" marL="1270000">
+              <a:buNone/>
+            </a:pPr>
+            <a:r>
+              <a:rPr sz="2000" b="1"/>
+              <a:t>Metadata</a:t>
+            </a:r>
+            <a:r>
+              <a:rPr sz="2000"/>
+              <a:t> = data </a:t>
+            </a:r>
+            <a:r>
+              <a:rPr sz="2000" i="1"/>
+              <a:t>about</a:t>
+            </a:r>
+            <a:r>
+              <a:rPr sz="2000"/>
+              <a:t> your data: who collected it, when, how, with what instrument. Without it, data are nearly useless — even to future-you.</a:t>
             </a:r>
           </a:p>
         </p:txBody>
@@ -3638,15 +3792,30 @@
           <a:bodyPr/>
           <a:lstStyle/>
           <a:p>
-            <a:pPr lvl="0" indent="0" marL="0">
-              <a:spcBef>
-                <a:spcPts val="3000"/>
-              </a:spcBef>
-              <a:buNone/>
-            </a:pPr>
-            <a:r>
-              <a:rPr b="1"/>
-              <a:t>One folder per project</a:t>
+            <a:pPr lvl="0" indent="0" marL="1270000">
+              <a:buNone/>
+            </a:pPr>
+            <a:r>
+              <a:rPr sz="2000" b="1"/>
+              <a:t>Tip</a:t>
+            </a:r>
+          </a:p>
+          <a:p>
+            <a:pPr lvl="0" indent="0" marL="1270000">
+              <a:buNone/>
+            </a:pPr>
+            <a:r>
+              <a:rPr sz="2000" b="1"/>
+              <a:t>🖐 Preview</a:t>
+            </a:r>
+          </a:p>
+          <a:p>
+            <a:pPr lvl="0" indent="0" marL="1270000">
+              <a:buNone/>
+            </a:pPr>
+            <a:r>
+              <a:rPr sz="2000"/>
+              <a:t>Tidy data — one row per observation, one column per variable — is the target we’re organizing toward. We’ll formalize this in Module 2.</a:t>
             </a:r>
           </a:p>
         </p:txBody>
@@ -3675,156 +3844,30 @@
       </p:grpSpPr>
       <p:sp>
         <p:nvSpPr>
-          <p:cNvPr id="3" name="Content Placeholder 2"/>
-          <p:cNvSpPr>
-            <a:spLocks noGrp="1"/>
-          </p:cNvSpPr>
-          <p:nvPr>
-            <p:ph idx="1" sz="half"/>
-          </p:nvPr>
-        </p:nvSpPr>
-        <p:spPr/>
+          <p:cNvPr id="2" name="Title 1"/>
+          <p:cNvSpPr>
+            <a:spLocks noGrp="1"/>
+          </p:cNvSpPr>
+          <p:nvPr>
+            <p:ph type="title"/>
+          </p:nvPr>
+        </p:nvSpPr>
+        <p:spPr>
+          <a:xfrm>
+            <a:off x="0" y="0"/>
+            <a:ext cx="9144000" cy="582780"/>
+          </a:xfrm>
+        </p:spPr>
         <p:txBody>
           <a:bodyPr/>
           <a:lstStyle/>
           <a:p>
-            <a:pPr lvl="0" indent="0">
-              <a:buNone/>
-            </a:pPr>
-            <a:r>
-              <a:rPr>
-                <a:latin typeface="Courier"/>
-              </a:rPr>
-              <a:t>pine_project/
-├── data/       ← raw files, never overwritten
-├── scripts/    ← your .R code
-└── figures/    ← plots you save</a:t>
-            </a:r>
-          </a:p>
-          <a:p>
-            <a:pPr lvl="0"/>
-            <a:r>
-              <a:rPr/>
-              <a:t>Open this folder as your workspace in Positron (</a:t>
-            </a:r>
-            <a:r>
-              <a:rPr b="1"/>
-              <a:t>File → Open Folder…</a:t>
-            </a:r>
-            <a:r>
-              <a:rPr/>
-              <a:t>)</a:t>
-            </a:r>
-          </a:p>
-          <a:p>
-            <a:pPr lvl="0"/>
-            <a:r>
-              <a:rPr/>
-              <a:t>Every file path then becomes </a:t>
-            </a:r>
-            <a:r>
-              <a:rPr b="1"/>
-              <a:t>relative</a:t>
-            </a:r>
-            <a:r>
-              <a:rPr/>
-              <a:t> — no more </a:t>
-            </a:r>
-            <a:r>
-              <a:rPr>
-                <a:latin typeface="Courier"/>
-              </a:rPr>
-              <a:t>C:/Users/.../Desktop/final_FINAL2.xlsx</a:t>
-            </a:r>
-          </a:p>
-          <a:p>
-            <a:pPr lvl="0" indent="0" marL="1270000">
-              <a:buNone/>
-            </a:pPr>
-            <a:r>
-              <a:rPr sz="2000" b="1"/>
-              <a:t>Note</a:t>
-            </a:r>
-          </a:p>
-          <a:p>
-            <a:pPr lvl="0" indent="0" marL="1270000">
-              <a:buNone/>
-            </a:pPr>
-            <a:r>
-              <a:rPr sz="2000" b="1"/>
-              <a:t>✅ Key idea</a:t>
-            </a:r>
-          </a:p>
-          <a:p>
-            <a:pPr lvl="0" indent="0" marL="1270000">
-              <a:buNone/>
-            </a:pPr>
-            <a:r>
-              <a:rPr sz="2000"/>
-              <a:t>Keep </a:t>
-            </a:r>
-            <a:r>
-              <a:rPr sz="2000" b="1"/>
-              <a:t>raw data untouched</a:t>
-            </a:r>
-            <a:r>
-              <a:rPr sz="2000"/>
-              <a:t>. R writes new, processed files — so you can always trace your steps back to the original numbers.</a:t>
-            </a:r>
-          </a:p>
-        </p:txBody>
-      </p:sp>
-      <p:sp>
-        <p:nvSpPr>
-          <p:cNvPr id="4" name="Content Placeholder 3"/>
-          <p:cNvSpPr>
-            <a:spLocks noGrp="1"/>
-          </p:cNvSpPr>
-          <p:nvPr>
-            <p:ph idx="2" sz="half"/>
-          </p:nvPr>
-        </p:nvSpPr>
-        <p:spPr/>
-        <p:txBody>
-          <a:bodyPr/>
-          <a:lstStyle/>
-          <a:p>
-            <a:pPr lvl="0" indent="0" marL="1270000">
-              <a:buNone/>
-            </a:pPr>
-            <a:r>
-              <a:rPr sz="2000" b="1"/>
-              <a:t>Note</a:t>
-            </a:r>
-          </a:p>
-          <a:p>
-            <a:pPr lvl="0" indent="0" marL="1270000">
-              <a:buNone/>
-            </a:pPr>
-            <a:r>
-              <a:rPr sz="2000" b="1"/>
-              <a:t>📖 New word</a:t>
-            </a:r>
-          </a:p>
-          <a:p>
-            <a:pPr lvl="0" indent="0" marL="1270000">
-              <a:buNone/>
-            </a:pPr>
-            <a:r>
-              <a:rPr sz="2000" b="1"/>
-              <a:t>Metadata</a:t>
-            </a:r>
-            <a:r>
-              <a:rPr sz="2000"/>
-              <a:t> = data </a:t>
-            </a:r>
-            <a:r>
-              <a:rPr sz="2000" i="1"/>
-              <a:t>about</a:t>
-            </a:r>
-            <a:r>
-              <a:rPr sz="2000"/>
-              <a:t> your data: who collected it, when, how, with what instrument. Without it, data are nearly useless — even to future-you.</a:t>
+            <a:pPr lvl="0" indent="0" marL="0">
+              <a:buNone/>
+            </a:pPr>
+            <a:r>
+              <a:rPr/>
+              <a:t>Part 3 · Meet R and Positron</a:t>
             </a:r>
           </a:p>
         </p:txBody>
@@ -3853,149 +3896,34 @@
       </p:grpSpPr>
       <p:sp>
         <p:nvSpPr>
-          <p:cNvPr id="3" name="Content Placeholder 2"/>
-          <p:cNvSpPr>
-            <a:spLocks noGrp="1"/>
-          </p:cNvSpPr>
-          <p:nvPr>
-            <p:ph idx="1"/>
-          </p:nvPr>
-        </p:nvSpPr>
-        <p:spPr/>
+          <p:cNvPr id="2" name="Title 1"/>
+          <p:cNvSpPr>
+            <a:spLocks noGrp="1"/>
+          </p:cNvSpPr>
+          <p:nvPr>
+            <p:ph type="title"/>
+          </p:nvPr>
+        </p:nvSpPr>
+        <p:spPr>
+          <a:xfrm>
+            <a:off x="139485" y="78119"/>
+            <a:ext cx="8229600" cy="607682"/>
+          </a:xfrm>
+        </p:spPr>
         <p:txBody>
           <a:bodyPr/>
           <a:lstStyle/>
           <a:p>
-            <a:pPr lvl="0" indent="0" marL="1270000">
-              <a:buNone/>
-            </a:pPr>
-            <a:r>
-              <a:rPr sz="2000" b="1"/>
-              <a:t>Tip</a:t>
-            </a:r>
-          </a:p>
-          <a:p>
-            <a:pPr lvl="0" indent="0" marL="1270000">
-              <a:buNone/>
-            </a:pPr>
-            <a:r>
-              <a:rPr sz="2000" b="1"/>
-              <a:t>🖐 Preview</a:t>
-            </a:r>
-          </a:p>
-          <a:p>
-            <a:pPr lvl="0" indent="0" marL="1270000">
-              <a:buNone/>
-            </a:pPr>
-            <a:r>
-              <a:rPr sz="2000"/>
-              <a:t>Tidy data — one row per observation, one column per variable — is the target we’re organizing toward. We’ll formalize this in Module 2.</a:t>
-            </a:r>
-          </a:p>
-        </p:txBody>
-      </p:sp>
-    </p:spTree>
-  </p:cSld>
-</p:sld>
-</file>
-
-<file path=ppt/slides/slide15.xml><?xml version="1.0" encoding="utf-8"?>
-<p:sld xmlns:a="http://schemas.openxmlformats.org/drawingml/2006/main" xmlns:r="http://schemas.openxmlformats.org/officeDocument/2006/relationships" xmlns:p="http://schemas.openxmlformats.org/presentationml/2006/main">
-  <p:cSld>
-    <p:spTree>
-      <p:nvGrpSpPr>
-        <p:cNvPr id="1" name=""/>
-        <p:cNvGrpSpPr/>
-        <p:nvPr/>
-      </p:nvGrpSpPr>
-      <p:grpSpPr>
-        <a:xfrm>
-          <a:off x="0" y="0"/>
-          <a:ext cx="0" cy="0"/>
-          <a:chOff x="0" y="0"/>
-          <a:chExt cx="0" cy="0"/>
-        </a:xfrm>
-      </p:grpSpPr>
-      <p:sp>
-        <p:nvSpPr>
-          <p:cNvPr id="2" name="Title 1"/>
-          <p:cNvSpPr>
-            <a:spLocks noGrp="1"/>
-          </p:cNvSpPr>
-          <p:nvPr>
-            <p:ph type="title"/>
-          </p:nvPr>
-        </p:nvSpPr>
-        <p:spPr>
-          <a:xfrm>
-            <a:off x="0" y="0"/>
-            <a:ext cx="9144000" cy="582780"/>
-          </a:xfrm>
-        </p:spPr>
-        <p:txBody>
-          <a:bodyPr/>
-          <a:lstStyle/>
-          <a:p>
             <a:pPr lvl="0" indent="0" marL="0">
               <a:buNone/>
             </a:pPr>
             <a:r>
               <a:rPr/>
-              <a:t>Part 3 · Meet R and Positron</a:t>
-            </a:r>
-          </a:p>
-        </p:txBody>
-      </p:sp>
-      <p:sp>
-        <p:nvSpPr>
-          <p:cNvPr id="3" name="Content Placeholder 2"/>
-          <p:cNvSpPr>
-            <a:spLocks noGrp="1"/>
-          </p:cNvSpPr>
-          <p:nvPr>
-            <p:ph idx="1"/>
-          </p:nvPr>
-        </p:nvSpPr>
-        <p:spPr/>
-        <p:txBody>
-          <a:bodyPr/>
-          <a:lstStyle/>
-          <a:p>
-            <a:pPr lvl="0" indent="0" marL="0">
-              <a:spcBef>
-                <a:spcPts val="3000"/>
-              </a:spcBef>
-              <a:buNone/>
-            </a:pPr>
-            <a:r>
-              <a:rPr b="1"/>
               <a:t>R is the engine, Positron is the dashboard</a:t>
             </a:r>
           </a:p>
         </p:txBody>
       </p:sp>
-    </p:spTree>
-  </p:cSld>
-</p:sld>
-</file>
-
-<file path=ppt/slides/slide16.xml><?xml version="1.0" encoding="utf-8"?>
-<p:sld xmlns:a="http://schemas.openxmlformats.org/drawingml/2006/main" xmlns:r="http://schemas.openxmlformats.org/officeDocument/2006/relationships" xmlns:p="http://schemas.openxmlformats.org/presentationml/2006/main">
-  <p:cSld>
-    <p:spTree>
-      <p:nvGrpSpPr>
-        <p:cNvPr id="1" name=""/>
-        <p:cNvGrpSpPr/>
-        <p:nvPr/>
-      </p:nvGrpSpPr>
-      <p:grpSpPr>
-        <a:xfrm>
-          <a:off x="0" y="0"/>
-          <a:ext cx="0" cy="0"/>
-          <a:chOff x="0" y="0"/>
-          <a:chExt cx="0" cy="0"/>
-        </a:xfrm>
-      </p:grpSpPr>
       <p:sp>
         <p:nvSpPr>
           <p:cNvPr id="3" name="Text Placeholder 2"/>
@@ -4360,6 +4288,953 @@
 </p:sld>
 </file>
 
+<file path=ppt/slides/slide15.xml><?xml version="1.0" encoding="utf-8"?>
+<p:sld xmlns:a="http://schemas.openxmlformats.org/drawingml/2006/main" xmlns:r="http://schemas.openxmlformats.org/officeDocument/2006/relationships" xmlns:p="http://schemas.openxmlformats.org/presentationml/2006/main">
+  <p:cSld>
+    <p:spTree>
+      <p:nvGrpSpPr>
+        <p:cNvPr id="1" name=""/>
+        <p:cNvGrpSpPr/>
+        <p:nvPr/>
+      </p:nvGrpSpPr>
+      <p:grpSpPr>
+        <a:xfrm>
+          <a:off x="0" y="0"/>
+          <a:ext cx="0" cy="0"/>
+          <a:chOff x="0" y="0"/>
+          <a:chExt cx="0" cy="0"/>
+        </a:xfrm>
+      </p:grpSpPr>
+      <p:sp>
+        <p:nvSpPr>
+          <p:cNvPr id="2" name="Title 1"/>
+          <p:cNvSpPr>
+            <a:spLocks noGrp="1"/>
+          </p:cNvSpPr>
+          <p:nvPr>
+            <p:ph type="title"/>
+          </p:nvPr>
+        </p:nvSpPr>
+        <p:spPr>
+          <a:xfrm>
+            <a:off x="0" y="0"/>
+            <a:ext cx="9144000" cy="602780"/>
+          </a:xfrm>
+          <a:solidFill>
+            <a:srgbClr val="70121D"/>
+          </a:solidFill>
+        </p:spPr>
+        <p:txBody>
+          <a:bodyPr/>
+          <a:lstStyle/>
+          <a:p>
+            <a:pPr lvl="0" indent="0" marL="0">
+              <a:buNone/>
+            </a:pPr>
+            <a:r>
+              <a:rPr/>
+              <a:t>R as a calculator, and storing values</a:t>
+            </a:r>
+          </a:p>
+        </p:txBody>
+      </p:sp>
+      <p:sp>
+        <p:nvSpPr>
+          <p:cNvPr id="3" name="Content Placeholder 2"/>
+          <p:cNvSpPr>
+            <a:spLocks noGrp="1"/>
+          </p:cNvSpPr>
+          <p:nvPr>
+            <p:ph idx="1" sz="half"/>
+          </p:nvPr>
+        </p:nvSpPr>
+        <p:spPr/>
+        <p:txBody>
+          <a:bodyPr/>
+          <a:lstStyle/>
+          <a:p>
+            <a:pPr lvl="0" indent="0" marL="0">
+              <a:buNone/>
+            </a:pPr>
+            <a:r>
+              <a:rPr/>
+              <a:t>Type math into the </a:t>
+            </a:r>
+            <a:r>
+              <a:rPr b="1"/>
+              <a:t>console</a:t>
+            </a:r>
+            <a:r>
+              <a:rPr/>
+              <a:t> and press Enter:</a:t>
+            </a:r>
+          </a:p>
+          <a:p>
+            <a:pPr lvl="0" indent="0">
+              <a:buNone/>
+            </a:pPr>
+            <a:r>
+              <a:rPr>
+                <a:solidFill>
+                  <a:srgbClr val="AD0000"/>
+                </a:solidFill>
+                <a:latin typeface="Courier"/>
+              </a:rPr>
+              <a:t>3</a:t>
+            </a:r>
+            <a:r>
+              <a:rPr>
+                <a:solidFill>
+                  <a:srgbClr val="003B4F"/>
+                </a:solidFill>
+                <a:latin typeface="Courier"/>
+              </a:rPr>
+              <a:t> </a:t>
+            </a:r>
+            <a:r>
+              <a:rPr>
+                <a:solidFill>
+                  <a:srgbClr val="5E5E5E"/>
+                </a:solidFill>
+                <a:latin typeface="Courier"/>
+              </a:rPr>
+              <a:t>+</a:t>
+            </a:r>
+            <a:r>
+              <a:rPr>
+                <a:solidFill>
+                  <a:srgbClr val="003B4F"/>
+                </a:solidFill>
+                <a:latin typeface="Courier"/>
+              </a:rPr>
+              <a:t> </a:t>
+            </a:r>
+            <a:r>
+              <a:rPr>
+                <a:solidFill>
+                  <a:srgbClr val="AD0000"/>
+                </a:solidFill>
+                <a:latin typeface="Courier"/>
+              </a:rPr>
+              <a:t>5</a:t>
+            </a:r>
+            <a:br/>
+            <a:r>
+              <a:rPr>
+                <a:solidFill>
+                  <a:srgbClr val="AD0000"/>
+                </a:solidFill>
+                <a:latin typeface="Courier"/>
+              </a:rPr>
+              <a:t>12</a:t>
+            </a:r>
+            <a:r>
+              <a:rPr>
+                <a:solidFill>
+                  <a:srgbClr val="003B4F"/>
+                </a:solidFill>
+                <a:latin typeface="Courier"/>
+              </a:rPr>
+              <a:t> </a:t>
+            </a:r>
+            <a:r>
+              <a:rPr>
+                <a:solidFill>
+                  <a:srgbClr val="5E5E5E"/>
+                </a:solidFill>
+                <a:latin typeface="Courier"/>
+              </a:rPr>
+              <a:t>/</a:t>
+            </a:r>
+            <a:r>
+              <a:rPr>
+                <a:solidFill>
+                  <a:srgbClr val="003B4F"/>
+                </a:solidFill>
+                <a:latin typeface="Courier"/>
+              </a:rPr>
+              <a:t> </a:t>
+            </a:r>
+            <a:r>
+              <a:rPr>
+                <a:solidFill>
+                  <a:srgbClr val="AD0000"/>
+                </a:solidFill>
+                <a:latin typeface="Courier"/>
+              </a:rPr>
+              <a:t>7</a:t>
+            </a:r>
+            <a:br/>
+            <a:r>
+              <a:rPr>
+                <a:solidFill>
+                  <a:srgbClr val="AD0000"/>
+                </a:solidFill>
+                <a:latin typeface="Courier"/>
+              </a:rPr>
+              <a:t>2</a:t>
+            </a:r>
+            <a:r>
+              <a:rPr>
+                <a:solidFill>
+                  <a:srgbClr val="003B4F"/>
+                </a:solidFill>
+                <a:latin typeface="Courier"/>
+              </a:rPr>
+              <a:t> </a:t>
+            </a:r>
+            <a:r>
+              <a:rPr>
+                <a:solidFill>
+                  <a:srgbClr val="5E5E5E"/>
+                </a:solidFill>
+                <a:latin typeface="Courier"/>
+              </a:rPr>
+              <a:t>^</a:t>
+            </a:r>
+            <a:r>
+              <a:rPr>
+                <a:solidFill>
+                  <a:srgbClr val="003B4F"/>
+                </a:solidFill>
+                <a:latin typeface="Courier"/>
+              </a:rPr>
+              <a:t> </a:t>
+            </a:r>
+            <a:r>
+              <a:rPr>
+                <a:solidFill>
+                  <a:srgbClr val="AD0000"/>
+                </a:solidFill>
+                <a:latin typeface="Courier"/>
+              </a:rPr>
+              <a:t>10</a:t>
+            </a:r>
+          </a:p>
+          <a:p>
+            <a:pPr lvl="0" indent="0" marL="0">
+              <a:buNone/>
+            </a:pPr>
+            <a:r>
+              <a:rPr/>
+              <a:t>To keep a value, give it a name with the </a:t>
+            </a:r>
+            <a:r>
+              <a:rPr b="1"/>
+              <a:t>assignment operator</a:t>
+            </a:r>
+            <a:r>
+              <a:rPr/>
+              <a:t> </a:t>
+            </a:r>
+            <a:r>
+              <a:rPr>
+                <a:latin typeface="Courier"/>
+              </a:rPr>
+              <a:t>&lt;-</a:t>
+            </a:r>
+            <a:r>
+              <a:rPr/>
+              <a:t>:</a:t>
+            </a:r>
+          </a:p>
+          <a:p>
+            <a:pPr lvl="0" indent="0">
+              <a:buNone/>
+            </a:pPr>
+            <a:r>
+              <a:rPr>
+                <a:solidFill>
+                  <a:srgbClr val="003B4F"/>
+                </a:solidFill>
+                <a:latin typeface="Courier"/>
+              </a:rPr>
+              <a:t>x &lt;- </a:t>
+            </a:r>
+            <a:r>
+              <a:rPr>
+                <a:solidFill>
+                  <a:srgbClr val="AD0000"/>
+                </a:solidFill>
+                <a:latin typeface="Courier"/>
+              </a:rPr>
+              <a:t>7</a:t>
+            </a:r>
+            <a:r>
+              <a:rPr>
+                <a:solidFill>
+                  <a:srgbClr val="003B4F"/>
+                </a:solidFill>
+                <a:latin typeface="Courier"/>
+              </a:rPr>
+              <a:t>      </a:t>
+            </a:r>
+            <a:r>
+              <a:rPr>
+                <a:solidFill>
+                  <a:srgbClr val="5E5E5E"/>
+                </a:solidFill>
+                <a:latin typeface="Courier"/>
+              </a:rPr>
+              <a:t># store 7 under the name x</a:t>
+            </a:r>
+            <a:br/>
+            <a:r>
+              <a:rPr>
+                <a:solidFill>
+                  <a:srgbClr val="003B4F"/>
+                </a:solidFill>
+                <a:latin typeface="Courier"/>
+              </a:rPr>
+              <a:t>x           </a:t>
+            </a:r>
+            <a:r>
+              <a:rPr>
+                <a:solidFill>
+                  <a:srgbClr val="5E5E5E"/>
+                </a:solidFill>
+                <a:latin typeface="Courier"/>
+              </a:rPr>
+              <a:t># read it back</a:t>
+            </a:r>
+            <a:br/>
+            <a:r>
+              <a:rPr>
+                <a:solidFill>
+                  <a:srgbClr val="003B4F"/>
+                </a:solidFill>
+                <a:latin typeface="Courier"/>
+              </a:rPr>
+              <a:t>x </a:t>
+            </a:r>
+            <a:r>
+              <a:rPr>
+                <a:solidFill>
+                  <a:srgbClr val="5E5E5E"/>
+                </a:solidFill>
+                <a:latin typeface="Courier"/>
+              </a:rPr>
+              <a:t>*</a:t>
+            </a:r>
+            <a:r>
+              <a:rPr>
+                <a:solidFill>
+                  <a:srgbClr val="003B4F"/>
+                </a:solidFill>
+                <a:latin typeface="Courier"/>
+              </a:rPr>
+              <a:t> </a:t>
+            </a:r>
+            <a:r>
+              <a:rPr>
+                <a:solidFill>
+                  <a:srgbClr val="AD0000"/>
+                </a:solidFill>
+                <a:latin typeface="Courier"/>
+              </a:rPr>
+              <a:t>2</a:t>
+            </a:r>
+            <a:r>
+              <a:rPr>
+                <a:solidFill>
+                  <a:srgbClr val="003B4F"/>
+                </a:solidFill>
+                <a:latin typeface="Courier"/>
+              </a:rPr>
+              <a:t>       </a:t>
+            </a:r>
+            <a:r>
+              <a:rPr>
+                <a:solidFill>
+                  <a:srgbClr val="5E5E5E"/>
+                </a:solidFill>
+                <a:latin typeface="Courier"/>
+              </a:rPr>
+              <a:t># use it in math</a:t>
+            </a:r>
+          </a:p>
+          <a:p>
+            <a:pPr lvl="0" indent="0" marL="1270000">
+              <a:buNone/>
+            </a:pPr>
+            <a:r>
+              <a:rPr sz="2000" b="1"/>
+              <a:t>Warning</a:t>
+            </a:r>
+          </a:p>
+          <a:p>
+            <a:pPr lvl="0" indent="0" marL="1270000">
+              <a:buNone/>
+            </a:pPr>
+            <a:r>
+              <a:rPr sz="2000" b="1"/>
+              <a:t>⚠️ Watch out!</a:t>
+            </a:r>
+          </a:p>
+          <a:p>
+            <a:pPr lvl="0" indent="0" marL="1270000">
+              <a:buNone/>
+            </a:pPr>
+            <a:r>
+              <a:rPr sz="2000"/>
+              <a:t>R is case-sensitive: </a:t>
+            </a:r>
+            <a:r>
+              <a:rPr sz="2000">
+                <a:latin typeface="Courier"/>
+              </a:rPr>
+              <a:t>x</a:t>
+            </a:r>
+            <a:r>
+              <a:rPr sz="2000"/>
+              <a:t> and </a:t>
+            </a:r>
+            <a:r>
+              <a:rPr sz="2000">
+                <a:latin typeface="Courier"/>
+              </a:rPr>
+              <a:t>X</a:t>
+            </a:r>
+            <a:r>
+              <a:rPr sz="2000"/>
+              <a:t> are different objects. Use </a:t>
+            </a:r>
+            <a:r>
+              <a:rPr sz="2000">
+                <a:latin typeface="Courier"/>
+              </a:rPr>
+              <a:t>&lt;-</a:t>
+            </a:r>
+            <a:r>
+              <a:rPr sz="2000"/>
+              <a:t>, not </a:t>
+            </a:r>
+            <a:r>
+              <a:rPr sz="2000">
+                <a:latin typeface="Courier"/>
+              </a:rPr>
+              <a:t>=</a:t>
+            </a:r>
+            <a:r>
+              <a:rPr sz="2000"/>
+              <a:t>, to assign.</a:t>
+            </a:r>
+          </a:p>
+        </p:txBody>
+      </p:sp>
+      <p:sp>
+        <p:nvSpPr>
+          <p:cNvPr id="4" name="Content Placeholder 3"/>
+          <p:cNvSpPr>
+            <a:spLocks noGrp="1"/>
+          </p:cNvSpPr>
+          <p:nvPr>
+            <p:ph idx="2" sz="half"/>
+          </p:nvPr>
+        </p:nvSpPr>
+        <p:spPr/>
+        <p:txBody>
+          <a:bodyPr/>
+          <a:lstStyle/>
+          <a:p>
+            <a:pPr lvl="0" indent="0" marL="1270000">
+              <a:buNone/>
+            </a:pPr>
+            <a:r>
+              <a:rPr sz="2000" b="1"/>
+              <a:t>Note</a:t>
+            </a:r>
+          </a:p>
+          <a:p>
+            <a:pPr lvl="0" indent="0" marL="1270000">
+              <a:buNone/>
+            </a:pPr>
+            <a:r>
+              <a:rPr sz="2000" b="1"/>
+              <a:t>📖 New word</a:t>
+            </a:r>
+          </a:p>
+          <a:p>
+            <a:pPr lvl="0" indent="0" marL="1270000">
+              <a:buNone/>
+            </a:pPr>
+            <a:r>
+              <a:rPr sz="2000" b="1"/>
+              <a:t>Object</a:t>
+            </a:r>
+            <a:r>
+              <a:rPr sz="2000"/>
+              <a:t> = a named container holding a value. Look for it appear in the </a:t>
+            </a:r>
+            <a:r>
+              <a:rPr sz="2000" b="1"/>
+              <a:t>Environment</a:t>
+            </a:r>
+            <a:r>
+              <a:rPr sz="2000"/>
+              <a:t> pane the moment you create it.</a:t>
+            </a:r>
+          </a:p>
+        </p:txBody>
+      </p:sp>
+    </p:spTree>
+  </p:cSld>
+</p:sld>
+</file>
+
+<file path=ppt/slides/slide16.xml><?xml version="1.0" encoding="utf-8"?>
+<p:sld xmlns:a="http://schemas.openxmlformats.org/drawingml/2006/main" xmlns:r="http://schemas.openxmlformats.org/officeDocument/2006/relationships" xmlns:p="http://schemas.openxmlformats.org/presentationml/2006/main">
+  <p:cSld>
+    <p:spTree>
+      <p:nvGrpSpPr>
+        <p:cNvPr id="1" name=""/>
+        <p:cNvGrpSpPr/>
+        <p:nvPr/>
+      </p:nvGrpSpPr>
+      <p:grpSpPr>
+        <a:xfrm>
+          <a:off x="0" y="0"/>
+          <a:ext cx="0" cy="0"/>
+          <a:chOff x="0" y="0"/>
+          <a:chExt cx="0" cy="0"/>
+        </a:xfrm>
+      </p:grpSpPr>
+      <p:sp>
+        <p:nvSpPr>
+          <p:cNvPr id="2" name="Title 1"/>
+          <p:cNvSpPr>
+            <a:spLocks noGrp="1"/>
+          </p:cNvSpPr>
+          <p:nvPr>
+            <p:ph type="title"/>
+          </p:nvPr>
+        </p:nvSpPr>
+        <p:spPr>
+          <a:xfrm>
+            <a:off x="0" y="0"/>
+            <a:ext cx="9144000" cy="602780"/>
+          </a:xfrm>
+          <a:solidFill>
+            <a:srgbClr val="70121D"/>
+          </a:solidFill>
+        </p:spPr>
+        <p:txBody>
+          <a:bodyPr/>
+          <a:lstStyle/>
+          <a:p>
+            <a:pPr lvl="0" indent="0" marL="0">
+              <a:buNone/>
+            </a:pPr>
+            <a:r>
+              <a:rPr/>
+              <a:t>Names, comments, and functions</a:t>
+            </a:r>
+          </a:p>
+        </p:txBody>
+      </p:sp>
+      <p:sp>
+        <p:nvSpPr>
+          <p:cNvPr id="3" name="Content Placeholder 2"/>
+          <p:cNvSpPr>
+            <a:spLocks noGrp="1"/>
+          </p:cNvSpPr>
+          <p:nvPr>
+            <p:ph idx="1" sz="half"/>
+          </p:nvPr>
+        </p:nvSpPr>
+        <p:spPr/>
+        <p:txBody>
+          <a:bodyPr/>
+          <a:lstStyle/>
+          <a:p>
+            <a:pPr lvl="0"/>
+            <a:r>
+              <a:rPr/>
+              <a:t>Use </a:t>
+            </a:r>
+            <a:r>
+              <a:rPr b="1">
+                <a:latin typeface="Courier"/>
+              </a:rPr>
+              <a:t>lower_snake_case</a:t>
+            </a:r>
+            <a:r>
+              <a:rPr/>
+              <a:t>: </a:t>
+            </a:r>
+            <a:r>
+              <a:rPr>
+                <a:latin typeface="Courier"/>
+              </a:rPr>
+              <a:t>needle_length</a:t>
+            </a:r>
+            <a:r>
+              <a:rPr/>
+              <a:t>, not </a:t>
+            </a:r>
+            <a:r>
+              <a:rPr>
+                <a:latin typeface="Courier"/>
+              </a:rPr>
+              <a:t>x2</a:t>
+            </a:r>
+            <a:r>
+              <a:rPr/>
+              <a:t> or </a:t>
+            </a:r>
+            <a:r>
+              <a:rPr>
+                <a:latin typeface="Courier"/>
+              </a:rPr>
+              <a:t>NeedleLength</a:t>
+            </a:r>
+          </a:p>
+          <a:p>
+            <a:pPr lvl="0"/>
+            <a:r>
+              <a:rPr/>
+              <a:t>Anything after </a:t>
+            </a:r>
+            <a:r>
+              <a:rPr>
+                <a:latin typeface="Courier"/>
+              </a:rPr>
+              <a:t>#</a:t>
+            </a:r>
+            <a:r>
+              <a:rPr/>
+              <a:t> is a </a:t>
+            </a:r>
+            <a:r>
+              <a:rPr b="1"/>
+              <a:t>comment</a:t>
+            </a:r>
+            <a:r>
+              <a:rPr/>
+              <a:t> — a note for humans, ignored by R</a:t>
+            </a:r>
+          </a:p>
+          <a:p>
+            <a:pPr lvl="0" indent="0">
+              <a:buNone/>
+            </a:pPr>
+            <a:r>
+              <a:rPr>
+                <a:solidFill>
+                  <a:srgbClr val="5E5E5E"/>
+                </a:solidFill>
+                <a:latin typeface="Courier"/>
+              </a:rPr>
+              <a:t># average of four needle lengths, in mm</a:t>
+            </a:r>
+            <a:br/>
+            <a:r>
+              <a:rPr>
+                <a:solidFill>
+                  <a:srgbClr val="003B4F"/>
+                </a:solidFill>
+                <a:latin typeface="Courier"/>
+              </a:rPr>
+              <a:t>needle_length &lt;- </a:t>
+            </a:r>
+            <a:r>
+              <a:rPr>
+                <a:solidFill>
+                  <a:srgbClr val="4758AB"/>
+                </a:solidFill>
+                <a:latin typeface="Courier"/>
+              </a:rPr>
+              <a:t>c</a:t>
+            </a:r>
+            <a:r>
+              <a:rPr>
+                <a:solidFill>
+                  <a:srgbClr val="003B4F"/>
+                </a:solidFill>
+                <a:latin typeface="Courier"/>
+              </a:rPr>
+              <a:t>(</a:t>
+            </a:r>
+            <a:r>
+              <a:rPr>
+                <a:solidFill>
+                  <a:srgbClr val="AD0000"/>
+                </a:solidFill>
+                <a:latin typeface="Courier"/>
+              </a:rPr>
+              <a:t>20</a:t>
+            </a:r>
+            <a:r>
+              <a:rPr>
+                <a:solidFill>
+                  <a:srgbClr val="003B4F"/>
+                </a:solidFill>
+                <a:latin typeface="Courier"/>
+              </a:rPr>
+              <a:t>, </a:t>
+            </a:r>
+            <a:r>
+              <a:rPr>
+                <a:solidFill>
+                  <a:srgbClr val="AD0000"/>
+                </a:solidFill>
+                <a:latin typeface="Courier"/>
+              </a:rPr>
+              <a:t>21</a:t>
+            </a:r>
+            <a:r>
+              <a:rPr>
+                <a:solidFill>
+                  <a:srgbClr val="003B4F"/>
+                </a:solidFill>
+                <a:latin typeface="Courier"/>
+              </a:rPr>
+              <a:t>, </a:t>
+            </a:r>
+            <a:r>
+              <a:rPr>
+                <a:solidFill>
+                  <a:srgbClr val="AD0000"/>
+                </a:solidFill>
+                <a:latin typeface="Courier"/>
+              </a:rPr>
+              <a:t>23</a:t>
+            </a:r>
+            <a:r>
+              <a:rPr>
+                <a:solidFill>
+                  <a:srgbClr val="003B4F"/>
+                </a:solidFill>
+                <a:latin typeface="Courier"/>
+              </a:rPr>
+              <a:t>, </a:t>
+            </a:r>
+            <a:r>
+              <a:rPr>
+                <a:solidFill>
+                  <a:srgbClr val="AD0000"/>
+                </a:solidFill>
+                <a:latin typeface="Courier"/>
+              </a:rPr>
+              <a:t>25</a:t>
+            </a:r>
+            <a:r>
+              <a:rPr>
+                <a:solidFill>
+                  <a:srgbClr val="003B4F"/>
+                </a:solidFill>
+                <a:latin typeface="Courier"/>
+              </a:rPr>
+              <a:t>)</a:t>
+            </a:r>
+            <a:br/>
+            <a:r>
+              <a:rPr>
+                <a:solidFill>
+                  <a:srgbClr val="4758AB"/>
+                </a:solidFill>
+                <a:latin typeface="Courier"/>
+              </a:rPr>
+              <a:t>mean</a:t>
+            </a:r>
+            <a:r>
+              <a:rPr>
+                <a:solidFill>
+                  <a:srgbClr val="003B4F"/>
+                </a:solidFill>
+                <a:latin typeface="Courier"/>
+              </a:rPr>
+              <a:t>(needle_length)     </a:t>
+            </a:r>
+            <a:r>
+              <a:rPr>
+                <a:solidFill>
+                  <a:srgbClr val="5E5E5E"/>
+                </a:solidFill>
+                <a:latin typeface="Courier"/>
+              </a:rPr>
+              <a:t># a function call</a:t>
+            </a:r>
+          </a:p>
+          <a:p>
+            <a:pPr lvl="0" indent="0" marL="0">
+              <a:buNone/>
+            </a:pPr>
+            <a:r>
+              <a:rPr/>
+              <a:t>A </a:t>
+            </a:r>
+            <a:r>
+              <a:rPr b="1"/>
+              <a:t>function</a:t>
+            </a:r>
+            <a:r>
+              <a:rPr/>
+              <a:t> takes </a:t>
+            </a:r>
+            <a:r>
+              <a:rPr b="1"/>
+              <a:t>arguments</a:t>
+            </a:r>
+            <a:r>
+              <a:rPr/>
+              <a:t> in </a:t>
+            </a:r>
+            <a:r>
+              <a:rPr>
+                <a:latin typeface="Courier"/>
+              </a:rPr>
+              <a:t>()</a:t>
+            </a:r>
+            <a:r>
+              <a:rPr/>
+              <a:t> and returns a result. Stuck? Ask for help:</a:t>
+            </a:r>
+          </a:p>
+          <a:p>
+            <a:pPr lvl="0" indent="0">
+              <a:buNone/>
+            </a:pPr>
+            <a:r>
+              <a:rPr>
+                <a:solidFill>
+                  <a:srgbClr val="003B4F"/>
+                </a:solidFill>
+                <a:latin typeface="Courier"/>
+              </a:rPr>
+              <a:t>?mean</a:t>
+            </a:r>
+            <a:br/>
+            <a:r>
+              <a:rPr>
+                <a:solidFill>
+                  <a:srgbClr val="4758AB"/>
+                </a:solidFill>
+                <a:latin typeface="Courier"/>
+              </a:rPr>
+              <a:t>args</a:t>
+            </a:r>
+            <a:r>
+              <a:rPr>
+                <a:solidFill>
+                  <a:srgbClr val="003B4F"/>
+                </a:solidFill>
+                <a:latin typeface="Courier"/>
+              </a:rPr>
+              <a:t>(mean)</a:t>
+            </a:r>
+          </a:p>
+          <a:p>
+            <a:pPr lvl="0" indent="0" marL="1270000">
+              <a:buNone/>
+            </a:pPr>
+            <a:r>
+              <a:rPr sz="2000" b="1"/>
+              <a:t>Tip</a:t>
+            </a:r>
+          </a:p>
+          <a:p>
+            <a:pPr lvl="0" indent="0" marL="1270000">
+              <a:buNone/>
+            </a:pPr>
+            <a:r>
+              <a:rPr sz="2000" b="1"/>
+              <a:t>🖐 Try it yourself</a:t>
+            </a:r>
+          </a:p>
+          <a:p>
+            <a:pPr lvl="0" indent="0" marL="1270000">
+              <a:buNone/>
+            </a:pPr>
+            <a:r>
+              <a:rPr sz="2000"/>
+              <a:t>Predict what </a:t>
+            </a:r>
+            <a:r>
+              <a:rPr sz="2000">
+                <a:latin typeface="Courier"/>
+              </a:rPr>
+              <a:t>round(3.14159, 2)</a:t>
+            </a:r>
+            <a:r>
+              <a:rPr sz="2000"/>
+              <a:t> returns before you run it.</a:t>
+            </a:r>
+          </a:p>
+        </p:txBody>
+      </p:sp>
+      <p:sp>
+        <p:nvSpPr>
+          <p:cNvPr id="4" name="Content Placeholder 3"/>
+          <p:cNvSpPr>
+            <a:spLocks noGrp="1"/>
+          </p:cNvSpPr>
+          <p:nvPr>
+            <p:ph idx="2" sz="half"/>
+          </p:nvPr>
+        </p:nvSpPr>
+        <p:spPr/>
+        <p:txBody>
+          <a:bodyPr/>
+          <a:lstStyle/>
+          <a:p>
+            <a:pPr lvl="0" indent="0" marL="1270000">
+              <a:buNone/>
+            </a:pPr>
+            <a:r>
+              <a:rPr sz="2000" b="1"/>
+              <a:t>Note</a:t>
+            </a:r>
+          </a:p>
+          <a:p>
+            <a:pPr lvl="0" indent="0" marL="1270000">
+              <a:buNone/>
+            </a:pPr>
+            <a:r>
+              <a:rPr sz="2000" b="1"/>
+              <a:t>📖 New words</a:t>
+            </a:r>
+          </a:p>
+          <a:p>
+            <a:pPr lvl="0"/>
+            <a:r>
+              <a:rPr sz="2000" b="1"/>
+              <a:t>Comment</a:t>
+            </a:r>
+            <a:r>
+              <a:rPr sz="2000"/>
+              <a:t> — ignored by R, read by humans</a:t>
+            </a:r>
+          </a:p>
+          <a:p>
+            <a:pPr lvl="0"/>
+            <a:r>
+              <a:rPr sz="2000" b="1"/>
+              <a:t>Argument</a:t>
+            </a:r>
+            <a:r>
+              <a:rPr sz="2000"/>
+              <a:t> — an input handed to a function</a:t>
+            </a:r>
+          </a:p>
+          <a:p>
+            <a:pPr lvl="0"/>
+            <a:r>
+              <a:rPr sz="2000" b="1"/>
+              <a:t>Function</a:t>
+            </a:r>
+            <a:r>
+              <a:rPr sz="2000"/>
+              <a:t> — a named, reusable operation</a:t>
+            </a:r>
+          </a:p>
+        </p:txBody>
+      </p:sp>
+    </p:spTree>
+  </p:cSld>
+</p:sld>
+</file>
+
 <file path=ppt/slides/slide17.xml><?xml version="1.0" encoding="utf-8"?>
 <p:sld xmlns:a="http://schemas.openxmlformats.org/drawingml/2006/main" xmlns:r="http://schemas.openxmlformats.org/officeDocument/2006/relationships" xmlns:p="http://schemas.openxmlformats.org/presentationml/2006/main">
   <p:cSld>
@@ -4379,28 +5254,388 @@
       </p:grpSpPr>
       <p:sp>
         <p:nvSpPr>
-          <p:cNvPr id="3" name="Content Placeholder 2"/>
-          <p:cNvSpPr>
-            <a:spLocks noGrp="1"/>
-          </p:cNvSpPr>
-          <p:nvPr>
-            <p:ph idx="1"/>
-          </p:nvPr>
-        </p:nvSpPr>
-        <p:spPr/>
+          <p:cNvPr id="2" name="Title 1"/>
+          <p:cNvSpPr>
+            <a:spLocks noGrp="1"/>
+          </p:cNvSpPr>
+          <p:nvPr>
+            <p:ph type="title"/>
+          </p:nvPr>
+        </p:nvSpPr>
+        <p:spPr>
+          <a:xfrm>
+            <a:off x="0" y="0"/>
+            <a:ext cx="9144000" cy="602780"/>
+          </a:xfrm>
+          <a:solidFill>
+            <a:srgbClr val="70121D"/>
+          </a:solidFill>
+        </p:spPr>
         <p:txBody>
           <a:bodyPr/>
           <a:lstStyle/>
           <a:p>
             <a:pPr lvl="0" indent="0" marL="0">
-              <a:spcBef>
-                <a:spcPts val="3000"/>
-              </a:spcBef>
-              <a:buNone/>
-            </a:pPr>
+              <a:buNone/>
+            </a:pPr>
+            <a:r>
+              <a:rPr/>
+              <a:t>Vectors, data types, and scripts</a:t>
+            </a:r>
+          </a:p>
+        </p:txBody>
+      </p:sp>
+      <p:sp>
+        <p:nvSpPr>
+          <p:cNvPr id="3" name="Content Placeholder 2"/>
+          <p:cNvSpPr>
+            <a:spLocks noGrp="1"/>
+          </p:cNvSpPr>
+          <p:nvPr>
+            <p:ph idx="1" sz="half"/>
+          </p:nvPr>
+        </p:nvSpPr>
+        <p:spPr/>
+        <p:txBody>
+          <a:bodyPr/>
+          <a:lstStyle/>
+          <a:p>
+            <a:pPr lvl="0" indent="0" marL="0">
+              <a:buNone/>
+            </a:pPr>
+            <a:r>
+              <a:rPr/>
+              <a:t>A </a:t>
+            </a:r>
             <a:r>
               <a:rPr b="1"/>
-              <a:t>R as a calculator, and storing values</a:t>
+              <a:t>vector</a:t>
+            </a:r>
+            <a:r>
+              <a:rPr/>
+              <a:t> is a row of values made with </a:t>
+            </a:r>
+            <a:r>
+              <a:rPr>
+                <a:latin typeface="Courier"/>
+              </a:rPr>
+              <a:t>c()</a:t>
+            </a:r>
+            <a:r>
+              <a:rPr/>
+              <a:t> — a spreadsheet column is really just a vector:</a:t>
+            </a:r>
+          </a:p>
+          <a:p>
+            <a:pPr lvl="0" indent="0">
+              <a:buNone/>
+            </a:pPr>
+            <a:r>
+              <a:rPr>
+                <a:solidFill>
+                  <a:srgbClr val="003B4F"/>
+                </a:solidFill>
+                <a:latin typeface="Courier"/>
+              </a:rPr>
+              <a:t>length_mm &lt;- </a:t>
+            </a:r>
+            <a:r>
+              <a:rPr>
+                <a:solidFill>
+                  <a:srgbClr val="4758AB"/>
+                </a:solidFill>
+                <a:latin typeface="Courier"/>
+              </a:rPr>
+              <a:t>c</a:t>
+            </a:r>
+            <a:r>
+              <a:rPr>
+                <a:solidFill>
+                  <a:srgbClr val="003B4F"/>
+                </a:solidFill>
+                <a:latin typeface="Courier"/>
+              </a:rPr>
+              <a:t>(</a:t>
+            </a:r>
+            <a:r>
+              <a:rPr>
+                <a:solidFill>
+                  <a:srgbClr val="AD0000"/>
+                </a:solidFill>
+                <a:latin typeface="Courier"/>
+              </a:rPr>
+              <a:t>20</a:t>
+            </a:r>
+            <a:r>
+              <a:rPr>
+                <a:solidFill>
+                  <a:srgbClr val="003B4F"/>
+                </a:solidFill>
+                <a:latin typeface="Courier"/>
+              </a:rPr>
+              <a:t>, </a:t>
+            </a:r>
+            <a:r>
+              <a:rPr>
+                <a:solidFill>
+                  <a:srgbClr val="AD0000"/>
+                </a:solidFill>
+                <a:latin typeface="Courier"/>
+              </a:rPr>
+              <a:t>21</a:t>
+            </a:r>
+            <a:r>
+              <a:rPr>
+                <a:solidFill>
+                  <a:srgbClr val="003B4F"/>
+                </a:solidFill>
+                <a:latin typeface="Courier"/>
+              </a:rPr>
+              <a:t>, </a:t>
+            </a:r>
+            <a:r>
+              <a:rPr>
+                <a:solidFill>
+                  <a:srgbClr val="AD0000"/>
+                </a:solidFill>
+                <a:latin typeface="Courier"/>
+              </a:rPr>
+              <a:t>23</a:t>
+            </a:r>
+            <a:r>
+              <a:rPr>
+                <a:solidFill>
+                  <a:srgbClr val="003B4F"/>
+                </a:solidFill>
+                <a:latin typeface="Courier"/>
+              </a:rPr>
+              <a:t>, </a:t>
+            </a:r>
+            <a:r>
+              <a:rPr>
+                <a:solidFill>
+                  <a:srgbClr val="AD0000"/>
+                </a:solidFill>
+                <a:latin typeface="Courier"/>
+              </a:rPr>
+              <a:t>25</a:t>
+            </a:r>
+            <a:r>
+              <a:rPr>
+                <a:solidFill>
+                  <a:srgbClr val="003B4F"/>
+                </a:solidFill>
+                <a:latin typeface="Courier"/>
+              </a:rPr>
+              <a:t>)      </a:t>
+            </a:r>
+            <a:r>
+              <a:rPr>
+                <a:solidFill>
+                  <a:srgbClr val="5E5E5E"/>
+                </a:solidFill>
+                <a:latin typeface="Courier"/>
+              </a:rPr>
+              <a:t># numeric</a:t>
+            </a:r>
+            <a:br/>
+            <a:r>
+              <a:rPr>
+                <a:solidFill>
+                  <a:srgbClr val="003B4F"/>
+                </a:solidFill>
+                <a:latin typeface="Courier"/>
+              </a:rPr>
+              <a:t>side      &lt;- </a:t>
+            </a:r>
+            <a:r>
+              <a:rPr>
+                <a:solidFill>
+                  <a:srgbClr val="4758AB"/>
+                </a:solidFill>
+                <a:latin typeface="Courier"/>
+              </a:rPr>
+              <a:t>c</a:t>
+            </a:r>
+            <a:r>
+              <a:rPr>
+                <a:solidFill>
+                  <a:srgbClr val="003B4F"/>
+                </a:solidFill>
+                <a:latin typeface="Courier"/>
+              </a:rPr>
+              <a:t>(</a:t>
+            </a:r>
+            <a:r>
+              <a:rPr>
+                <a:solidFill>
+                  <a:srgbClr val="20794D"/>
+                </a:solidFill>
+                <a:latin typeface="Courier"/>
+              </a:rPr>
+              <a:t>"n"</a:t>
+            </a:r>
+            <a:r>
+              <a:rPr>
+                <a:solidFill>
+                  <a:srgbClr val="003B4F"/>
+                </a:solidFill>
+                <a:latin typeface="Courier"/>
+              </a:rPr>
+              <a:t>, </a:t>
+            </a:r>
+            <a:r>
+              <a:rPr>
+                <a:solidFill>
+                  <a:srgbClr val="20794D"/>
+                </a:solidFill>
+                <a:latin typeface="Courier"/>
+              </a:rPr>
+              <a:t>"s"</a:t>
+            </a:r>
+            <a:r>
+              <a:rPr>
+                <a:solidFill>
+                  <a:srgbClr val="003B4F"/>
+                </a:solidFill>
+                <a:latin typeface="Courier"/>
+              </a:rPr>
+              <a:t>)            </a:t>
+            </a:r>
+            <a:r>
+              <a:rPr>
+                <a:solidFill>
+                  <a:srgbClr val="5E5E5E"/>
+                </a:solidFill>
+                <a:latin typeface="Courier"/>
+              </a:rPr>
+              <a:t># character — needs quotes</a:t>
+            </a:r>
+          </a:p>
+          <a:p>
+            <a:pPr lvl="0" indent="0" marL="0">
+              <a:buNone/>
+            </a:pPr>
+            <a:r>
+              <a:rPr/>
+              <a:t>The </a:t>
+            </a:r>
+            <a:r>
+              <a:rPr b="1"/>
+              <a:t>console forgets</a:t>
+            </a:r>
+            <a:r>
+              <a:rPr/>
+              <a:t>. A </a:t>
+            </a:r>
+            <a:r>
+              <a:rPr b="1"/>
+              <a:t>script</a:t>
+            </a:r>
+            <a:r>
+              <a:rPr/>
+              <a:t> (</a:t>
+            </a:r>
+            <a:r>
+              <a:rPr>
+                <a:latin typeface="Courier"/>
+              </a:rPr>
+              <a:t>.R</a:t>
+            </a:r>
+            <a:r>
+              <a:rPr/>
+              <a:t> file) remembers:</a:t>
+            </a:r>
+          </a:p>
+          <a:p>
+            <a:pPr lvl="0"/>
+            <a:r>
+              <a:rPr b="1"/>
+              <a:t>File → New File → R File</a:t>
+            </a:r>
+            <a:r>
+              <a:rPr/>
+              <a:t>, save it, run lines with Ctrl/Cmd+Enter</a:t>
+            </a:r>
+          </a:p>
+          <a:p>
+            <a:pPr lvl="0" indent="0" marL="1270000">
+              <a:buNone/>
+            </a:pPr>
+            <a:r>
+              <a:rPr sz="2000" b="1"/>
+              <a:t>Warning</a:t>
+            </a:r>
+          </a:p>
+          <a:p>
+            <a:pPr lvl="0" indent="0" marL="1270000">
+              <a:buNone/>
+            </a:pPr>
+            <a:r>
+              <a:rPr sz="2000" b="1"/>
+              <a:t>⚠️ Watch out!</a:t>
+            </a:r>
+          </a:p>
+          <a:p>
+            <a:pPr lvl="0" indent="0" marL="1270000">
+              <a:buNone/>
+            </a:pPr>
+            <a:r>
+              <a:rPr sz="2000"/>
+              <a:t>Without quotes, </a:t>
+            </a:r>
+            <a:r>
+              <a:rPr sz="2000">
+                <a:latin typeface="Courier"/>
+              </a:rPr>
+              <a:t>s</a:t>
+            </a:r>
+            <a:r>
+              <a:rPr sz="2000"/>
+              <a:t> means “find an object called s,” not the text “s.” R will error if no such object exists.</a:t>
+            </a:r>
+          </a:p>
+        </p:txBody>
+      </p:sp>
+      <p:sp>
+        <p:nvSpPr>
+          <p:cNvPr id="4" name="Content Placeholder 3"/>
+          <p:cNvSpPr>
+            <a:spLocks noGrp="1"/>
+          </p:cNvSpPr>
+          <p:nvPr>
+            <p:ph idx="2" sz="half"/>
+          </p:nvPr>
+        </p:nvSpPr>
+        <p:spPr/>
+        <p:txBody>
+          <a:bodyPr/>
+          <a:lstStyle/>
+          <a:p>
+            <a:pPr lvl="0" indent="0" marL="1270000">
+              <a:buNone/>
+            </a:pPr>
+            <a:r>
+              <a:rPr sz="2000" b="1"/>
+              <a:t>Note</a:t>
+            </a:r>
+          </a:p>
+          <a:p>
+            <a:pPr lvl="0" indent="0" marL="1270000">
+              <a:buNone/>
+            </a:pPr>
+            <a:r>
+              <a:rPr sz="2000" b="1"/>
+              <a:t>✅ Key idea</a:t>
+            </a:r>
+          </a:p>
+          <a:p>
+            <a:pPr lvl="0" indent="0" marL="1270000">
+              <a:buNone/>
+            </a:pPr>
+            <a:r>
+              <a:rPr sz="2000"/>
+              <a:t>Console = scratch paper. Script = the lab notebook you keep and rerun.</a:t>
             </a:r>
           </a:p>
         </p:txBody>
@@ -4429,15 +5664,23 @@
       </p:grpSpPr>
       <p:sp>
         <p:nvSpPr>
-          <p:cNvPr id="3" name="Content Placeholder 2"/>
-          <p:cNvSpPr>
-            <a:spLocks noGrp="1"/>
-          </p:cNvSpPr>
-          <p:nvPr>
-            <p:ph idx="1" sz="half"/>
-          </p:nvPr>
-        </p:nvSpPr>
-        <p:spPr/>
+          <p:cNvPr id="2" name="Title 1"/>
+          <p:cNvSpPr>
+            <a:spLocks noGrp="1"/>
+          </p:cNvSpPr>
+          <p:nvPr>
+            <p:ph type="title"/>
+          </p:nvPr>
+        </p:nvSpPr>
+        <p:spPr>
+          <a:xfrm>
+            <a:off x="0" y="0"/>
+            <a:ext cx="9144000" cy="602780"/>
+          </a:xfrm>
+          <a:solidFill>
+            <a:srgbClr val="70121D"/>
+          </a:solidFill>
+        </p:spPr>
         <p:txBody>
           <a:bodyPr/>
           <a:lstStyle/>
@@ -4447,15 +5690,36 @@
             </a:pPr>
             <a:r>
               <a:rPr/>
-              <a:t>Type math into the </a:t>
-            </a:r>
+              <a:t>Packages — extending what R can do</a:t>
+            </a:r>
+          </a:p>
+        </p:txBody>
+      </p:sp>
+      <p:sp>
+        <p:nvSpPr>
+          <p:cNvPr id="3" name="Content Placeholder 2"/>
+          <p:cNvSpPr>
+            <a:spLocks noGrp="1"/>
+          </p:cNvSpPr>
+          <p:nvPr>
+            <p:ph idx="1" sz="half"/>
+          </p:nvPr>
+        </p:nvSpPr>
+        <p:spPr/>
+        <p:txBody>
+          <a:bodyPr/>
+          <a:lstStyle/>
+          <a:p>
+            <a:pPr lvl="0" indent="0" marL="0">
+              <a:buNone/>
+            </a:pPr>
             <a:r>
               <a:rPr b="1"/>
-              <a:t>console</a:t>
-            </a:r>
-            <a:r>
-              <a:rPr/>
-              <a:t> and press Enter:</a:t>
+              <a:t>Install once</a:t>
+            </a:r>
+            <a:r>
+              <a:rPr/>
+              <a:t>, in the console:</a:t>
             </a:r>
           </a:p>
           <a:p>
@@ -4465,11 +5729,11 @@
             <a:r>
               <a:rPr>
                 <a:solidFill>
-                  <a:srgbClr val="AD0000"/>
-                </a:solidFill>
-                <a:latin typeface="Courier"/>
-              </a:rPr>
-              <a:t>3</a:t>
+                  <a:srgbClr val="4758AB"/>
+                </a:solidFill>
+                <a:latin typeface="Courier"/>
+              </a:rPr>
+              <a:t>install.packages</a:t>
             </a:r>
             <a:r>
               <a:rPr>
@@ -4478,7 +5742,61 @@
                 </a:solidFill>
                 <a:latin typeface="Courier"/>
               </a:rPr>
-              <a:t> </a:t>
+              <a:t>(</a:t>
+            </a:r>
+            <a:r>
+              <a:rPr>
+                <a:solidFill>
+                  <a:srgbClr val="20794D"/>
+                </a:solidFill>
+                <a:latin typeface="Courier"/>
+              </a:rPr>
+              <a:t>"tidyverse"</a:t>
+            </a:r>
+            <a:r>
+              <a:rPr>
+                <a:solidFill>
+                  <a:srgbClr val="003B4F"/>
+                </a:solidFill>
+                <a:latin typeface="Courier"/>
+              </a:rPr>
+              <a:t>)</a:t>
+            </a:r>
+          </a:p>
+          <a:p>
+            <a:pPr lvl="0" indent="0" marL="0">
+              <a:buNone/>
+            </a:pPr>
+            <a:r>
+              <a:rPr b="1"/>
+              <a:t>Load every session</a:t>
+            </a:r>
+            <a:r>
+              <a:rPr/>
+              <a:t>, at the top of every script:</a:t>
+            </a:r>
+          </a:p>
+          <a:p>
+            <a:pPr lvl="0" indent="0">
+              <a:buNone/>
+            </a:pPr>
+            <a:r>
+              <a:rPr>
+                <a:solidFill>
+                  <a:srgbClr val="4758AB"/>
+                </a:solidFill>
+                <a:latin typeface="Courier"/>
+              </a:rPr>
+              <a:t>library</a:t>
+            </a:r>
+            <a:r>
+              <a:rPr>
+                <a:solidFill>
+                  <a:srgbClr val="003B4F"/>
+                </a:solidFill>
+                <a:latin typeface="Courier"/>
+              </a:rPr>
+              <a:t>(tidyverse)   </a:t>
             </a:r>
             <a:r>
               <a:rPr>
@@ -4487,259 +5805,7 @@
                 </a:solidFill>
                 <a:latin typeface="Courier"/>
               </a:rPr>
-              <a:t>+</a:t>
-            </a:r>
-            <a:r>
-              <a:rPr>
-                <a:solidFill>
-                  <a:srgbClr val="003B4F"/>
-                </a:solidFill>
-                <a:latin typeface="Courier"/>
-              </a:rPr>
-              <a:t> </a:t>
-            </a:r>
-            <a:r>
-              <a:rPr>
-                <a:solidFill>
-                  <a:srgbClr val="AD0000"/>
-                </a:solidFill>
-                <a:latin typeface="Courier"/>
-              </a:rPr>
-              <a:t>5</a:t>
-            </a:r>
-            <a:br/>
-            <a:r>
-              <a:rPr>
-                <a:solidFill>
-                  <a:srgbClr val="AD0000"/>
-                </a:solidFill>
-                <a:latin typeface="Courier"/>
-              </a:rPr>
-              <a:t>12</a:t>
-            </a:r>
-            <a:r>
-              <a:rPr>
-                <a:solidFill>
-                  <a:srgbClr val="003B4F"/>
-                </a:solidFill>
-                <a:latin typeface="Courier"/>
-              </a:rPr>
-              <a:t> </a:t>
-            </a:r>
-            <a:r>
-              <a:rPr>
-                <a:solidFill>
-                  <a:srgbClr val="5E5E5E"/>
-                </a:solidFill>
-                <a:latin typeface="Courier"/>
-              </a:rPr>
-              <a:t>/</a:t>
-            </a:r>
-            <a:r>
-              <a:rPr>
-                <a:solidFill>
-                  <a:srgbClr val="003B4F"/>
-                </a:solidFill>
-                <a:latin typeface="Courier"/>
-              </a:rPr>
-              <a:t> </a:t>
-            </a:r>
-            <a:r>
-              <a:rPr>
-                <a:solidFill>
-                  <a:srgbClr val="AD0000"/>
-                </a:solidFill>
-                <a:latin typeface="Courier"/>
-              </a:rPr>
-              <a:t>7</a:t>
-            </a:r>
-            <a:br/>
-            <a:r>
-              <a:rPr>
-                <a:solidFill>
-                  <a:srgbClr val="AD0000"/>
-                </a:solidFill>
-                <a:latin typeface="Courier"/>
-              </a:rPr>
-              <a:t>2</a:t>
-            </a:r>
-            <a:r>
-              <a:rPr>
-                <a:solidFill>
-                  <a:srgbClr val="003B4F"/>
-                </a:solidFill>
-                <a:latin typeface="Courier"/>
-              </a:rPr>
-              <a:t> </a:t>
-            </a:r>
-            <a:r>
-              <a:rPr>
-                <a:solidFill>
-                  <a:srgbClr val="5E5E5E"/>
-                </a:solidFill>
-                <a:latin typeface="Courier"/>
-              </a:rPr>
-              <a:t>^</a:t>
-            </a:r>
-            <a:r>
-              <a:rPr>
-                <a:solidFill>
-                  <a:srgbClr val="003B4F"/>
-                </a:solidFill>
-                <a:latin typeface="Courier"/>
-              </a:rPr>
-              <a:t> </a:t>
-            </a:r>
-            <a:r>
-              <a:rPr>
-                <a:solidFill>
-                  <a:srgbClr val="AD0000"/>
-                </a:solidFill>
-                <a:latin typeface="Courier"/>
-              </a:rPr>
-              <a:t>10</a:t>
-            </a:r>
-          </a:p>
-          <a:p>
-            <a:pPr lvl="0" indent="0" marL="0">
-              <a:buNone/>
-            </a:pPr>
-            <a:r>
-              <a:rPr/>
-              <a:t>To keep a value, give it a name with the </a:t>
-            </a:r>
-            <a:r>
-              <a:rPr b="1"/>
-              <a:t>assignment operator</a:t>
-            </a:r>
-            <a:r>
-              <a:rPr/>
-              <a:t> </a:t>
-            </a:r>
-            <a:r>
-              <a:rPr>
-                <a:latin typeface="Courier"/>
-              </a:rPr>
-              <a:t>&lt;-</a:t>
-            </a:r>
-            <a:r>
-              <a:rPr/>
-              <a:t>:</a:t>
-            </a:r>
-          </a:p>
-          <a:p>
-            <a:pPr lvl="0" indent="0">
-              <a:buNone/>
-            </a:pPr>
-            <a:r>
-              <a:rPr>
-                <a:solidFill>
-                  <a:srgbClr val="003B4F"/>
-                </a:solidFill>
-                <a:latin typeface="Courier"/>
-              </a:rPr>
-              <a:t>x &lt;- </a:t>
-            </a:r>
-            <a:r>
-              <a:rPr>
-                <a:solidFill>
-                  <a:srgbClr val="AD0000"/>
-                </a:solidFill>
-                <a:latin typeface="Courier"/>
-              </a:rPr>
-              <a:t>7</a:t>
-            </a:r>
-            <a:r>
-              <a:rPr>
-                <a:solidFill>
-                  <a:srgbClr val="003B4F"/>
-                </a:solidFill>
-                <a:latin typeface="Courier"/>
-              </a:rPr>
-              <a:t>      </a:t>
-            </a:r>
-            <a:r>
-              <a:rPr>
-                <a:solidFill>
-                  <a:srgbClr val="5E5E5E"/>
-                </a:solidFill>
-                <a:latin typeface="Courier"/>
-              </a:rPr>
-              <a:t># store 7 under the name x</a:t>
-            </a:r>
-            <a:br/>
-            <a:r>
-              <a:rPr>
-                <a:solidFill>
-                  <a:srgbClr val="003B4F"/>
-                </a:solidFill>
-                <a:latin typeface="Courier"/>
-              </a:rPr>
-              <a:t>x           </a:t>
-            </a:r>
-            <a:r>
-              <a:rPr>
-                <a:solidFill>
-                  <a:srgbClr val="5E5E5E"/>
-                </a:solidFill>
-                <a:latin typeface="Courier"/>
-              </a:rPr>
-              <a:t># read it back</a:t>
-            </a:r>
-            <a:br/>
-            <a:r>
-              <a:rPr>
-                <a:solidFill>
-                  <a:srgbClr val="003B4F"/>
-                </a:solidFill>
-                <a:latin typeface="Courier"/>
-              </a:rPr>
-              <a:t>x </a:t>
-            </a:r>
-            <a:r>
-              <a:rPr>
-                <a:solidFill>
-                  <a:srgbClr val="5E5E5E"/>
-                </a:solidFill>
-                <a:latin typeface="Courier"/>
-              </a:rPr>
-              <a:t>*</a:t>
-            </a:r>
-            <a:r>
-              <a:rPr>
-                <a:solidFill>
-                  <a:srgbClr val="003B4F"/>
-                </a:solidFill>
-                <a:latin typeface="Courier"/>
-              </a:rPr>
-              <a:t> </a:t>
-            </a:r>
-            <a:r>
-              <a:rPr>
-                <a:solidFill>
-                  <a:srgbClr val="AD0000"/>
-                </a:solidFill>
-                <a:latin typeface="Courier"/>
-              </a:rPr>
-              <a:t>2</a:t>
-            </a:r>
-            <a:r>
-              <a:rPr>
-                <a:solidFill>
-                  <a:srgbClr val="003B4F"/>
-                </a:solidFill>
-                <a:latin typeface="Courier"/>
-              </a:rPr>
-              <a:t>       </a:t>
-            </a:r>
-            <a:r>
-              <a:rPr>
-                <a:solidFill>
-                  <a:srgbClr val="5E5E5E"/>
-                </a:solidFill>
-                <a:latin typeface="Courier"/>
-              </a:rPr>
-              <a:t># use it in math</a:t>
+              <a:t># wrangling + ggplot2</a:t>
             </a:r>
           </a:p>
           <a:p>
@@ -4765,48 +5831,22 @@
               <a:buNone/>
             </a:pPr>
             <a:r>
+              <a:rPr sz="2000" i="1"/>
+              <a:t>“could not find function…”</a:t>
+            </a:r>
+            <a:r>
               <a:rPr sz="2000"/>
-              <a:t>R is case-sensitive: </a:t>
+              <a:t> almost always means you forgot the </a:t>
             </a:r>
             <a:r>
               <a:rPr sz="2000">
                 <a:latin typeface="Courier"/>
               </a:rPr>
-              <a:t>x</a:t>
+              <a:t>library()</a:t>
             </a:r>
             <a:r>
               <a:rPr sz="2000"/>
-              <a:t> and </a:t>
-            </a:r>
-            <a:r>
-              <a:rPr sz="2000">
-                <a:latin typeface="Courier"/>
-              </a:rPr>
-              <a:t>X</a:t>
-            </a:r>
-            <a:r>
-              <a:rPr sz="2000"/>
-              <a:t> are different objects. Use </a:t>
-            </a:r>
-            <a:r>
-              <a:rPr sz="2000">
-                <a:latin typeface="Courier"/>
-              </a:rPr>
-              <a:t>&lt;-</a:t>
-            </a:r>
-            <a:r>
-              <a:rPr sz="2000"/>
-              <a:t>, not </a:t>
-            </a:r>
-            <a:r>
-              <a:rPr sz="2000">
-                <a:latin typeface="Courier"/>
-              </a:rPr>
-              <a:t>=</a:t>
-            </a:r>
-            <a:r>
-              <a:rPr sz="2000"/>
-              <a:t>, to assign.</a:t>
+              <a:t> line for that session.</a:t>
             </a:r>
           </a:p>
         </p:txBody>
@@ -4840,28 +5880,29 @@
             </a:pPr>
             <a:r>
               <a:rPr sz="2000" b="1"/>
-              <a:t>📖 New word</a:t>
-            </a:r>
-          </a:p>
-          <a:p>
-            <a:pPr lvl="0" indent="0" marL="1270000">
-              <a:buNone/>
-            </a:pPr>
+              <a:t>📖 New words</a:t>
+            </a:r>
+          </a:p>
+          <a:p>
+            <a:pPr lvl="0"/>
             <a:r>
               <a:rPr sz="2000" b="1"/>
-              <a:t>Object</a:t>
+              <a:t>Package</a:t>
             </a:r>
             <a:r>
               <a:rPr sz="2000"/>
-              <a:t> = a named container holding a value. Look for it appear in the </a:t>
-            </a:r>
+              <a:t> — the installed toolbox (once)</a:t>
+            </a:r>
+          </a:p>
+          <a:p>
+            <a:pPr lvl="0"/>
             <a:r>
               <a:rPr sz="2000" b="1"/>
-              <a:t>Environment</a:t>
+              <a:t>Library</a:t>
             </a:r>
             <a:r>
               <a:rPr sz="2000"/>
-              <a:t> pane the moment you create it.</a:t>
+              <a:t> — loading it for today’s session (every time)</a:t>
             </a:r>
           </a:p>
         </p:txBody>
@@ -4890,28 +5931,30 @@
       </p:grpSpPr>
       <p:sp>
         <p:nvSpPr>
-          <p:cNvPr id="3" name="Content Placeholder 2"/>
-          <p:cNvSpPr>
-            <a:spLocks noGrp="1"/>
-          </p:cNvSpPr>
-          <p:nvPr>
-            <p:ph idx="1"/>
-          </p:nvPr>
-        </p:nvSpPr>
-        <p:spPr/>
+          <p:cNvPr id="2" name="Title 1"/>
+          <p:cNvSpPr>
+            <a:spLocks noGrp="1"/>
+          </p:cNvSpPr>
+          <p:nvPr>
+            <p:ph type="title"/>
+          </p:nvPr>
+        </p:nvSpPr>
+        <p:spPr>
+          <a:xfrm>
+            <a:off x="0" y="0"/>
+            <a:ext cx="9144000" cy="582780"/>
+          </a:xfrm>
+        </p:spPr>
         <p:txBody>
           <a:bodyPr/>
           <a:lstStyle/>
           <a:p>
             <a:pPr lvl="0" indent="0" marL="0">
-              <a:spcBef>
-                <a:spcPts val="3000"/>
-              </a:spcBef>
-              <a:buNone/>
-            </a:pPr>
-            <a:r>
-              <a:rPr b="1"/>
-              <a:t>Names, comments, and functions</a:t>
+              <a:buNone/>
+            </a:pPr>
+            <a:r>
+              <a:rPr/>
+              <a:t>Part 4 · Load Data and Make Your First Plot</a:t>
             </a:r>
           </a:p>
         </p:txBody>
@@ -5144,343 +6187,45 @@
       </p:grpSpPr>
       <p:sp>
         <p:nvSpPr>
-          <p:cNvPr id="3" name="Content Placeholder 2"/>
-          <p:cNvSpPr>
-            <a:spLocks noGrp="1"/>
-          </p:cNvSpPr>
-          <p:nvPr>
-            <p:ph idx="1" sz="half"/>
-          </p:nvPr>
-        </p:nvSpPr>
-        <p:spPr/>
+          <p:cNvPr id="2" name="Title 1"/>
+          <p:cNvSpPr>
+            <a:spLocks noGrp="1"/>
+          </p:cNvSpPr>
+          <p:nvPr>
+            <p:ph type="title"/>
+          </p:nvPr>
+        </p:nvSpPr>
+        <p:spPr>
+          <a:xfrm>
+            <a:off x="0" y="0"/>
+            <a:ext cx="9144000" cy="602780"/>
+          </a:xfrm>
+          <a:solidFill>
+            <a:srgbClr val="70121D"/>
+          </a:solidFill>
+        </p:spPr>
         <p:txBody>
           <a:bodyPr/>
           <a:lstStyle/>
           <a:p>
-            <a:pPr lvl="0"/>
-            <a:r>
-              <a:rPr/>
-              <a:t>Use </a:t>
-            </a:r>
-            <a:r>
-              <a:rPr b="1">
-                <a:latin typeface="Courier"/>
-              </a:rPr>
-              <a:t>lower_snake_case</a:t>
-            </a:r>
-            <a:r>
-              <a:rPr/>
-              <a:t>: </a:t>
-            </a:r>
-            <a:r>
-              <a:rPr>
-                <a:latin typeface="Courier"/>
-              </a:rPr>
-              <a:t>needle_length</a:t>
-            </a:r>
-            <a:r>
-              <a:rPr/>
-              <a:t>, not </a:t>
-            </a:r>
-            <a:r>
-              <a:rPr>
-                <a:latin typeface="Courier"/>
-              </a:rPr>
-              <a:t>x2</a:t>
-            </a:r>
-            <a:r>
-              <a:rPr/>
-              <a:t> or </a:t>
-            </a:r>
-            <a:r>
-              <a:rPr>
-                <a:latin typeface="Courier"/>
-              </a:rPr>
-              <a:t>NeedleLength</a:t>
-            </a:r>
-          </a:p>
-          <a:p>
-            <a:pPr lvl="0"/>
-            <a:r>
-              <a:rPr/>
-              <a:t>Anything after </a:t>
-            </a:r>
-            <a:r>
-              <a:rPr>
-                <a:latin typeface="Courier"/>
-              </a:rPr>
-              <a:t>#</a:t>
-            </a:r>
-            <a:r>
-              <a:rPr/>
-              <a:t> is a </a:t>
-            </a:r>
-            <a:r>
-              <a:rPr b="1"/>
-              <a:t>comment</a:t>
-            </a:r>
-            <a:r>
-              <a:rPr/>
-              <a:t> — a note for humans, ignored by R</a:t>
-            </a:r>
-          </a:p>
-          <a:p>
-            <a:pPr lvl="0" indent="0">
-              <a:buNone/>
-            </a:pPr>
-            <a:r>
-              <a:rPr>
-                <a:solidFill>
-                  <a:srgbClr val="5E5E5E"/>
-                </a:solidFill>
-                <a:latin typeface="Courier"/>
-              </a:rPr>
-              <a:t># average of four needle lengths, in mm</a:t>
-            </a:r>
-            <a:br/>
-            <a:r>
-              <a:rPr>
-                <a:solidFill>
-                  <a:srgbClr val="003B4F"/>
-                </a:solidFill>
-                <a:latin typeface="Courier"/>
-              </a:rPr>
-              <a:t>needle_length &lt;- </a:t>
-            </a:r>
-            <a:r>
-              <a:rPr>
-                <a:solidFill>
-                  <a:srgbClr val="4758AB"/>
-                </a:solidFill>
-                <a:latin typeface="Courier"/>
-              </a:rPr>
-              <a:t>c</a:t>
-            </a:r>
-            <a:r>
-              <a:rPr>
-                <a:solidFill>
-                  <a:srgbClr val="003B4F"/>
-                </a:solidFill>
-                <a:latin typeface="Courier"/>
-              </a:rPr>
-              <a:t>(</a:t>
-            </a:r>
-            <a:r>
-              <a:rPr>
-                <a:solidFill>
-                  <a:srgbClr val="AD0000"/>
-                </a:solidFill>
-                <a:latin typeface="Courier"/>
-              </a:rPr>
-              <a:t>20</a:t>
-            </a:r>
-            <a:r>
-              <a:rPr>
-                <a:solidFill>
-                  <a:srgbClr val="003B4F"/>
-                </a:solidFill>
-                <a:latin typeface="Courier"/>
-              </a:rPr>
-              <a:t>, </a:t>
-            </a:r>
-            <a:r>
-              <a:rPr>
-                <a:solidFill>
-                  <a:srgbClr val="AD0000"/>
-                </a:solidFill>
-                <a:latin typeface="Courier"/>
-              </a:rPr>
-              <a:t>21</a:t>
-            </a:r>
-            <a:r>
-              <a:rPr>
-                <a:solidFill>
-                  <a:srgbClr val="003B4F"/>
-                </a:solidFill>
-                <a:latin typeface="Courier"/>
-              </a:rPr>
-              <a:t>, </a:t>
-            </a:r>
-            <a:r>
-              <a:rPr>
-                <a:solidFill>
-                  <a:srgbClr val="AD0000"/>
-                </a:solidFill>
-                <a:latin typeface="Courier"/>
-              </a:rPr>
-              <a:t>23</a:t>
-            </a:r>
-            <a:r>
-              <a:rPr>
-                <a:solidFill>
-                  <a:srgbClr val="003B4F"/>
-                </a:solidFill>
-                <a:latin typeface="Courier"/>
-              </a:rPr>
-              <a:t>, </a:t>
-            </a:r>
-            <a:r>
-              <a:rPr>
-                <a:solidFill>
-                  <a:srgbClr val="AD0000"/>
-                </a:solidFill>
-                <a:latin typeface="Courier"/>
-              </a:rPr>
-              <a:t>25</a:t>
-            </a:r>
-            <a:r>
-              <a:rPr>
-                <a:solidFill>
-                  <a:srgbClr val="003B4F"/>
-                </a:solidFill>
-                <a:latin typeface="Courier"/>
-              </a:rPr>
-              <a:t>)</a:t>
-            </a:r>
-            <a:br/>
-            <a:r>
-              <a:rPr>
-                <a:solidFill>
-                  <a:srgbClr val="4758AB"/>
-                </a:solidFill>
-                <a:latin typeface="Courier"/>
-              </a:rPr>
-              <a:t>mean</a:t>
-            </a:r>
-            <a:r>
-              <a:rPr>
-                <a:solidFill>
-                  <a:srgbClr val="003B4F"/>
-                </a:solidFill>
-                <a:latin typeface="Courier"/>
-              </a:rPr>
-              <a:t>(needle_length)     </a:t>
-            </a:r>
-            <a:r>
-              <a:rPr>
-                <a:solidFill>
-                  <a:srgbClr val="5E5E5E"/>
-                </a:solidFill>
-                <a:latin typeface="Courier"/>
-              </a:rPr>
-              <a:t># a function call</a:t>
-            </a:r>
-          </a:p>
-          <a:p>
             <a:pPr lvl="0" indent="0" marL="0">
               <a:buNone/>
             </a:pPr>
             <a:r>
               <a:rPr/>
-              <a:t>A </a:t>
-            </a:r>
-            <a:r>
-              <a:rPr b="1"/>
-              <a:t>function</a:t>
-            </a:r>
-            <a:r>
-              <a:rPr/>
-              <a:t> takes </a:t>
-            </a:r>
-            <a:r>
-              <a:rPr b="1"/>
-              <a:t>arguments</a:t>
-            </a:r>
-            <a:r>
-              <a:rPr/>
-              <a:t> in </a:t>
-            </a:r>
-            <a:r>
-              <a:rPr>
-                <a:latin typeface="Courier"/>
-              </a:rPr>
-              <a:t>()</a:t>
-            </a:r>
-            <a:r>
-              <a:rPr/>
-              <a:t> and returns a result. Stuck? Ask for help:</a:t>
-            </a:r>
-          </a:p>
-          <a:p>
-            <a:pPr lvl="0" indent="0">
-              <a:buNone/>
-            </a:pPr>
-            <a:r>
-              <a:rPr>
-                <a:solidFill>
-                  <a:srgbClr val="003B4F"/>
-                </a:solidFill>
-                <a:latin typeface="Courier"/>
-              </a:rPr>
-              <a:t>?mean</a:t>
-            </a:r>
-            <a:br/>
-            <a:r>
-              <a:rPr>
-                <a:solidFill>
-                  <a:srgbClr val="4758AB"/>
-                </a:solidFill>
-                <a:latin typeface="Courier"/>
-              </a:rPr>
-              <a:t>args</a:t>
-            </a:r>
-            <a:r>
-              <a:rPr>
-                <a:solidFill>
-                  <a:srgbClr val="003B4F"/>
-                </a:solidFill>
-                <a:latin typeface="Courier"/>
-              </a:rPr>
-              <a:t>(mean)</a:t>
-            </a:r>
-          </a:p>
-          <a:p>
-            <a:pPr lvl="0" indent="0" marL="1270000">
-              <a:buNone/>
-            </a:pPr>
-            <a:r>
-              <a:rPr sz="2000" b="1"/>
-              <a:t>Tip</a:t>
-            </a:r>
-          </a:p>
-          <a:p>
-            <a:pPr lvl="0" indent="0" marL="1270000">
-              <a:buNone/>
-            </a:pPr>
-            <a:r>
-              <a:rPr sz="2000" b="1"/>
-              <a:t>🖐 Try it yourself</a:t>
-            </a:r>
-          </a:p>
-          <a:p>
-            <a:pPr lvl="0" indent="0" marL="1270000">
-              <a:buNone/>
-            </a:pPr>
-            <a:r>
-              <a:rPr sz="2000"/>
-              <a:t>Predict what </a:t>
-            </a:r>
-            <a:r>
-              <a:rPr sz="2000">
-                <a:latin typeface="Courier"/>
-              </a:rPr>
-              <a:t>round(3.14159, 2)</a:t>
-            </a:r>
-            <a:r>
-              <a:rPr sz="2000"/>
-              <a:t> returns before you run it.</a:t>
-            </a:r>
-          </a:p>
-        </p:txBody>
-      </p:sp>
-      <p:sp>
-        <p:nvSpPr>
-          <p:cNvPr id="4" name="Content Placeholder 3"/>
-          <p:cNvSpPr>
-            <a:spLocks noGrp="1"/>
-          </p:cNvSpPr>
-          <p:nvPr>
-            <p:ph idx="2" sz="half"/>
+              <a:t>Bring the data in</a:t>
+            </a:r>
+          </a:p>
+        </p:txBody>
+      </p:sp>
+      <p:sp>
+        <p:nvSpPr>
+          <p:cNvPr id="3" name="Content Placeholder 2"/>
+          <p:cNvSpPr>
+            <a:spLocks noGrp="1"/>
+          </p:cNvSpPr>
+          <p:nvPr>
+            <p:ph idx="1" sz="half"/>
           </p:nvPr>
         </p:nvSpPr>
         <p:spPr/>
@@ -5488,6 +6233,95 @@
           <a:bodyPr/>
           <a:lstStyle/>
           <a:p>
+            <a:pPr lvl="0" indent="0" marL="0">
+              <a:buNone/>
+            </a:pPr>
+            <a:r>
+              <a:rPr/>
+              <a:t>Put the file in </a:t>
+            </a:r>
+            <a:r>
+              <a:rPr>
+                <a:latin typeface="Courier"/>
+              </a:rPr>
+              <a:t>data/</a:t>
+            </a:r>
+            <a:r>
+              <a:rPr/>
+              <a:t>, then:</a:t>
+            </a:r>
+          </a:p>
+          <a:p>
+            <a:pPr lvl="0" indent="0">
+              <a:buNone/>
+            </a:pPr>
+            <a:r>
+              <a:rPr>
+                <a:solidFill>
+                  <a:srgbClr val="4758AB"/>
+                </a:solidFill>
+                <a:latin typeface="Courier"/>
+              </a:rPr>
+              <a:t>library</a:t>
+            </a:r>
+            <a:r>
+              <a:rPr>
+                <a:solidFill>
+                  <a:srgbClr val="003B4F"/>
+                </a:solidFill>
+                <a:latin typeface="Courier"/>
+              </a:rPr>
+              <a:t>(tidyverse)</a:t>
+            </a:r>
+            <a:br/>
+            <a:br/>
+            <a:r>
+              <a:rPr>
+                <a:solidFill>
+                  <a:srgbClr val="003B4F"/>
+                </a:solidFill>
+                <a:latin typeface="Courier"/>
+              </a:rPr>
+              <a:t>pine_df &lt;- </a:t>
+            </a:r>
+            <a:r>
+              <a:rPr>
+                <a:solidFill>
+                  <a:srgbClr val="4758AB"/>
+                </a:solidFill>
+                <a:latin typeface="Courier"/>
+              </a:rPr>
+              <a:t>read_csv</a:t>
+            </a:r>
+            <a:r>
+              <a:rPr>
+                <a:solidFill>
+                  <a:srgbClr val="003B4F"/>
+                </a:solidFill>
+                <a:latin typeface="Courier"/>
+              </a:rPr>
+              <a:t>(</a:t>
+            </a:r>
+            <a:r>
+              <a:rPr>
+                <a:solidFill>
+                  <a:srgbClr val="20794D"/>
+                </a:solidFill>
+                <a:latin typeface="Courier"/>
+              </a:rPr>
+              <a:t>"data/pine_needles.csv"</a:t>
+            </a:r>
+            <a:r>
+              <a:rPr>
+                <a:solidFill>
+                  <a:srgbClr val="003B4F"/>
+                </a:solidFill>
+                <a:latin typeface="Courier"/>
+              </a:rPr>
+              <a:t>)</a:t>
+            </a:r>
+          </a:p>
+          <a:p>
             <a:pPr lvl="0" indent="0" marL="1270000">
               <a:buNone/>
             </a:pPr>
@@ -5502,40 +6336,153 @@
             </a:pPr>
             <a:r>
               <a:rPr sz="2000" b="1"/>
-              <a:t>📖 New words</a:t>
+              <a:t>✅ Key idea</a:t>
+            </a:r>
+          </a:p>
+          <a:p>
+            <a:pPr lvl="0" indent="0" marL="1270000">
+              <a:buNone/>
+            </a:pPr>
+            <a:r>
+              <a:rPr sz="2000">
+                <a:latin typeface="Courier"/>
+              </a:rPr>
+              <a:t>read_csv()</a:t>
+            </a:r>
+            <a:r>
+              <a:rPr sz="2000"/>
+              <a:t> comes free with </a:t>
+            </a:r>
+            <a:r>
+              <a:rPr sz="2000">
+                <a:latin typeface="Courier"/>
+              </a:rPr>
+              <a:t>library(tidyverse)</a:t>
+            </a:r>
+            <a:r>
+              <a:rPr sz="2000"/>
+              <a:t>. Your file’s first row becomes the </a:t>
+            </a:r>
+            <a:r>
+              <a:rPr sz="2000" b="1"/>
+              <a:t>column names</a:t>
+            </a:r>
+            <a:r>
+              <a:rPr sz="2000"/>
+              <a:t> in R.</a:t>
+            </a:r>
+          </a:p>
+        </p:txBody>
+      </p:sp>
+      <p:sp>
+        <p:nvSpPr>
+          <p:cNvPr id="4" name="Content Placeholder 3"/>
+          <p:cNvSpPr>
+            <a:spLocks noGrp="1"/>
+          </p:cNvSpPr>
+          <p:nvPr>
+            <p:ph idx="2" sz="half"/>
+          </p:nvPr>
+        </p:nvSpPr>
+        <p:spPr/>
+        <p:txBody>
+          <a:bodyPr/>
+          <a:lstStyle/>
+          <a:p>
+            <a:pPr lvl="0" indent="0" marL="1270000">
+              <a:buNone/>
+            </a:pPr>
+            <a:r>
+              <a:rPr sz="2000" b="1"/>
+              <a:t>Note</a:t>
+            </a:r>
+          </a:p>
+          <a:p>
+            <a:pPr lvl="0" indent="0" marL="1270000">
+              <a:buNone/>
+            </a:pPr>
+            <a:r>
+              <a:rPr sz="2000" b="1"/>
+              <a:t>Our columns</a:t>
             </a:r>
           </a:p>
           <a:p>
             <a:pPr lvl="0"/>
             <a:r>
-              <a:rPr sz="2000" b="1"/>
-              <a:t>Comment</a:t>
+              <a:rPr sz="2000">
+                <a:latin typeface="Courier"/>
+              </a:rPr>
+              <a:t>n_s</a:t>
             </a:r>
             <a:r>
               <a:rPr sz="2000"/>
-              <a:t> — ignored by R, read by humans</a:t>
+              <a:t> — </a:t>
+            </a:r>
+            <a:r>
+              <a:rPr sz="2000">
+                <a:latin typeface="Courier"/>
+              </a:rPr>
+              <a:t>"n"</a:t>
+            </a:r>
+            <a:r>
+              <a:rPr sz="2000"/>
+              <a:t> (sheltered/lee) or </a:t>
+            </a:r>
+            <a:r>
+              <a:rPr sz="2000">
+                <a:latin typeface="Courier"/>
+              </a:rPr>
+              <a:t>"s"</a:t>
+            </a:r>
+            <a:r>
+              <a:rPr sz="2000"/>
+              <a:t> (exposed/windward)</a:t>
             </a:r>
           </a:p>
           <a:p>
             <a:pPr lvl="0"/>
             <a:r>
-              <a:rPr sz="2000" b="1"/>
-              <a:t>Argument</a:t>
+              <a:rPr sz="2000">
+                <a:latin typeface="Courier"/>
+              </a:rPr>
+              <a:t>wind</a:t>
             </a:r>
             <a:r>
               <a:rPr sz="2000"/>
-              <a:t> — an input handed to a function</a:t>
+              <a:t> — </a:t>
+            </a:r>
+            <a:r>
+              <a:rPr sz="2000">
+                <a:latin typeface="Courier"/>
+              </a:rPr>
+              <a:t>"lee"</a:t>
+            </a:r>
+            <a:r>
+              <a:rPr sz="2000"/>
+              <a:t> or </a:t>
+            </a:r>
+            <a:r>
+              <a:rPr sz="2000">
+                <a:latin typeface="Courier"/>
+              </a:rPr>
+              <a:t>"wind"</a:t>
+            </a:r>
+            <a:r>
+              <a:rPr sz="2000"/>
+              <a:t>, same grouping said a different way</a:t>
             </a:r>
           </a:p>
           <a:p>
             <a:pPr lvl="0"/>
             <a:r>
-              <a:rPr sz="2000" b="1"/>
-              <a:t>Function</a:t>
+              <a:rPr sz="2000">
+                <a:latin typeface="Courier"/>
+              </a:rPr>
+              <a:t>length_mm</a:t>
             </a:r>
             <a:r>
               <a:rPr sz="2000"/>
-              <a:t> — a named, reusable operation</a:t>
+              <a:t> — needle length in millimeters</a:t>
             </a:r>
           </a:p>
         </p:txBody>
@@ -5564,28 +6511,270 @@
       </p:grpSpPr>
       <p:sp>
         <p:nvSpPr>
-          <p:cNvPr id="3" name="Content Placeholder 2"/>
-          <p:cNvSpPr>
-            <a:spLocks noGrp="1"/>
-          </p:cNvSpPr>
-          <p:nvPr>
-            <p:ph idx="1"/>
-          </p:nvPr>
-        </p:nvSpPr>
-        <p:spPr/>
+          <p:cNvPr id="2" name="Title 1"/>
+          <p:cNvSpPr>
+            <a:spLocks noGrp="1"/>
+          </p:cNvSpPr>
+          <p:nvPr>
+            <p:ph type="title"/>
+          </p:nvPr>
+        </p:nvSpPr>
+        <p:spPr>
+          <a:xfrm>
+            <a:off x="0" y="0"/>
+            <a:ext cx="9144000" cy="602780"/>
+          </a:xfrm>
+          <a:solidFill>
+            <a:srgbClr val="70121D"/>
+          </a:solidFill>
+        </p:spPr>
         <p:txBody>
           <a:bodyPr/>
           <a:lstStyle/>
           <a:p>
             <a:pPr lvl="0" indent="0" marL="0">
-              <a:spcBef>
-                <a:spcPts val="3000"/>
-              </a:spcBef>
-              <a:buNone/>
-            </a:pPr>
-            <a:r>
-              <a:rPr b="1"/>
-              <a:t>Vectors, data types, and scripts</a:t>
+              <a:buNone/>
+            </a:pPr>
+            <a:r>
+              <a:rPr/>
+              <a:t>Look before you trust it</a:t>
+            </a:r>
+          </a:p>
+        </p:txBody>
+      </p:sp>
+      <p:sp>
+        <p:nvSpPr>
+          <p:cNvPr id="3" name="Content Placeholder 2"/>
+          <p:cNvSpPr>
+            <a:spLocks noGrp="1"/>
+          </p:cNvSpPr>
+          <p:nvPr>
+            <p:ph idx="1" sz="half"/>
+          </p:nvPr>
+        </p:nvSpPr>
+        <p:spPr/>
+        <p:txBody>
+          <a:bodyPr/>
+          <a:lstStyle/>
+          <a:p>
+            <a:pPr lvl="0" indent="0">
+              <a:buNone/>
+            </a:pPr>
+            <a:r>
+              <a:rPr>
+                <a:solidFill>
+                  <a:srgbClr val="4758AB"/>
+                </a:solidFill>
+                <a:latin typeface="Courier"/>
+              </a:rPr>
+              <a:t>glimpse</a:t>
+            </a:r>
+            <a:r>
+              <a:rPr>
+                <a:solidFill>
+                  <a:srgbClr val="003B4F"/>
+                </a:solidFill>
+                <a:latin typeface="Courier"/>
+              </a:rPr>
+              <a:t>(pine_df)</a:t>
+            </a:r>
+          </a:p>
+          <a:p>
+            <a:pPr lvl="0" indent="0">
+              <a:buNone/>
+            </a:pPr>
+            <a:r>
+              <a:rPr>
+                <a:latin typeface="Courier"/>
+              </a:rPr>
+              <a:t>Rows: 48
+Columns: 6
+$ date      &lt;chr&gt; "3/20/25", "3/20/25", "3/20/25", "3/20/25", "3/20/25", "3/20…
+$ group     &lt;chr&gt; "cephalopods", "cephalopods", "cephalopods", "cephalopods", …
+$ n_s       &lt;chr&gt; "n", "n", "n", "n", "n", "n", "s", "s", "s", "s", "s", "s", …
+$ wind      &lt;chr&gt; "lee", "lee", "lee", "lee", "lee", "lee", "wind", "wind", "w…
+$ tree_no   &lt;dbl&gt; 1, 1, 1, 1, 1, 1, 1, 1, 1, 1, 1, 1, 2, 2, 2, 2, 2, 2, 2, 2, …
+$ length_mm &lt;dbl&gt; 20, 21, 23, 25, 21, 16, 15, 16, 14, 17, 13, 15, 19, 18, 20, …</a:t>
+            </a:r>
+          </a:p>
+          <a:p>
+            <a:pPr lvl="0" indent="0">
+              <a:buNone/>
+            </a:pPr>
+            <a:r>
+              <a:rPr>
+                <a:solidFill>
+                  <a:srgbClr val="4758AB"/>
+                </a:solidFill>
+                <a:latin typeface="Courier"/>
+              </a:rPr>
+              <a:t>dim</a:t>
+            </a:r>
+            <a:r>
+              <a:rPr>
+                <a:solidFill>
+                  <a:srgbClr val="003B4F"/>
+                </a:solidFill>
+                <a:latin typeface="Courier"/>
+              </a:rPr>
+              <a:t>(pine_df)</a:t>
+            </a:r>
+          </a:p>
+          <a:p>
+            <a:pPr lvl="0" indent="0">
+              <a:buNone/>
+            </a:pPr>
+            <a:r>
+              <a:rPr>
+                <a:latin typeface="Courier"/>
+              </a:rPr>
+              <a:t>[1] 48  6</a:t>
+            </a:r>
+          </a:p>
+          <a:p>
+            <a:pPr lvl="0" indent="0" marL="1270000">
+              <a:buNone/>
+            </a:pPr>
+            <a:r>
+              <a:rPr sz="2000" b="1"/>
+              <a:t>Tip</a:t>
+            </a:r>
+          </a:p>
+          <a:p>
+            <a:pPr lvl="0" indent="0" marL="1270000">
+              <a:buNone/>
+            </a:pPr>
+            <a:r>
+              <a:rPr sz="2000" b="1"/>
+              <a:t>🖐 Notice</a:t>
+            </a:r>
+          </a:p>
+          <a:p>
+            <a:pPr lvl="0" indent="0" marL="1270000">
+              <a:buNone/>
+            </a:pPr>
+            <a:r>
+              <a:rPr sz="2000">
+                <a:latin typeface="Courier"/>
+              </a:rPr>
+              <a:t>n_s</a:t>
+            </a:r>
+            <a:r>
+              <a:rPr sz="2000"/>
+              <a:t> and </a:t>
+            </a:r>
+            <a:r>
+              <a:rPr sz="2000">
+                <a:latin typeface="Courier"/>
+              </a:rPr>
+              <a:t>wind</a:t>
+            </a:r>
+            <a:r>
+              <a:rPr sz="2000"/>
+              <a:t> always travel together — </a:t>
+            </a:r>
+            <a:r>
+              <a:rPr sz="2000">
+                <a:latin typeface="Courier"/>
+              </a:rPr>
+              <a:t>n</a:t>
+            </a:r>
+            <a:r>
+              <a:rPr sz="2000"/>
+              <a:t> with </a:t>
+            </a:r>
+            <a:r>
+              <a:rPr sz="2000">
+                <a:latin typeface="Courier"/>
+              </a:rPr>
+              <a:t>lee</a:t>
+            </a:r>
+            <a:r>
+              <a:rPr sz="2000"/>
+              <a:t>, </a:t>
+            </a:r>
+            <a:r>
+              <a:rPr sz="2000">
+                <a:latin typeface="Courier"/>
+              </a:rPr>
+              <a:t>s</a:t>
+            </a:r>
+            <a:r>
+              <a:rPr sz="2000"/>
+              <a:t> with </a:t>
+            </a:r>
+            <a:r>
+              <a:rPr sz="2000">
+                <a:latin typeface="Courier"/>
+              </a:rPr>
+              <a:t>wind</a:t>
+            </a:r>
+            <a:r>
+              <a:rPr sz="2000"/>
+              <a:t>. Two columns encoding the same grouping. Useful redundancy, or something to simplify? We’ll revisit this in Module 2.</a:t>
+            </a:r>
+          </a:p>
+        </p:txBody>
+      </p:sp>
+      <p:sp>
+        <p:nvSpPr>
+          <p:cNvPr id="4" name="Content Placeholder 3"/>
+          <p:cNvSpPr>
+            <a:spLocks noGrp="1"/>
+          </p:cNvSpPr>
+          <p:nvPr>
+            <p:ph idx="2" sz="half"/>
+          </p:nvPr>
+        </p:nvSpPr>
+        <p:spPr/>
+        <p:txBody>
+          <a:bodyPr/>
+          <a:lstStyle/>
+          <a:p>
+            <a:pPr lvl="0" indent="0" marL="1270000">
+              <a:buNone/>
+            </a:pPr>
+            <a:r>
+              <a:rPr sz="2000" b="1"/>
+              <a:t>Warning</a:t>
+            </a:r>
+          </a:p>
+          <a:p>
+            <a:pPr lvl="0" indent="0" marL="1270000">
+              <a:buNone/>
+            </a:pPr>
+            <a:r>
+              <a:rPr sz="2000" b="1"/>
+              <a:t>⚠️ Watch out!</a:t>
+            </a:r>
+          </a:p>
+          <a:p>
+            <a:pPr lvl="0" indent="0" marL="1270000">
+              <a:buNone/>
+            </a:pPr>
+            <a:r>
+              <a:rPr sz="2000"/>
+              <a:t>If a number column shows as </a:t>
+            </a:r>
+            <a:r>
+              <a:rPr sz="2000">
+                <a:latin typeface="Courier"/>
+              </a:rPr>
+              <a:t>&lt;chr&gt;</a:t>
+            </a:r>
+            <a:r>
+              <a:rPr sz="2000"/>
+              <a:t> in </a:t>
+            </a:r>
+            <a:r>
+              <a:rPr sz="2000">
+                <a:latin typeface="Courier"/>
+              </a:rPr>
+              <a:t>glimpse()</a:t>
+            </a:r>
+            <a:r>
+              <a:rPr sz="2000"/>
+              <a:t>, a stray letter or comma is hiding in that column.</a:t>
             </a:r>
           </a:p>
         </p:txBody>
@@ -5614,15 +6803,20 @@
       </p:grpSpPr>
       <p:sp>
         <p:nvSpPr>
-          <p:cNvPr id="3" name="Content Placeholder 2"/>
-          <p:cNvSpPr>
-            <a:spLocks noGrp="1"/>
-          </p:cNvSpPr>
-          <p:nvPr>
-            <p:ph idx="1" sz="half"/>
-          </p:nvPr>
-        </p:nvSpPr>
-        <p:spPr/>
+          <p:cNvPr id="2" name="Title 1"/>
+          <p:cNvSpPr>
+            <a:spLocks noGrp="1"/>
+          </p:cNvSpPr>
+          <p:nvPr>
+            <p:ph type="title"/>
+          </p:nvPr>
+        </p:nvSpPr>
+        <p:spPr>
+          <a:xfrm>
+            <a:off x="139485" y="78119"/>
+            <a:ext cx="8229600" cy="607682"/>
+          </a:xfrm>
+        </p:spPr>
         <p:txBody>
           <a:bodyPr/>
           <a:lstStyle/>
@@ -5632,25 +6826,101 @@
             </a:pPr>
             <a:r>
               <a:rPr/>
-              <a:t>A </a:t>
-            </a:r>
+              <a:t>Your first plot: </a:t>
+            </a:r>
+            <a:r>
+              <a:rPr>
+                <a:latin typeface="Courier"/>
+              </a:rPr>
+              <a:t>ggplot</a:t>
+            </a:r>
+            <a:r>
+              <a:rPr/>
+              <a:t>, built in layers</a:t>
+            </a:r>
+          </a:p>
+        </p:txBody>
+      </p:sp>
+      <p:sp>
+        <p:nvSpPr>
+          <p:cNvPr id="3" name="Text Placeholder 2"/>
+          <p:cNvSpPr>
+            <a:spLocks noGrp="1"/>
+          </p:cNvSpPr>
+          <p:nvPr>
+            <p:ph idx="1" type="body"/>
+          </p:nvPr>
+        </p:nvSpPr>
+        <p:spPr/>
+        <p:txBody>
+          <a:bodyPr/>
+          <a:lstStyle/>
+          <a:p>
+            <a:pPr lvl="0" indent="0" marL="0">
+              <a:buNone/>
+            </a:pPr>
+            <a:r>
+              <a:rPr/>
+              <a:t>Every </a:t>
+            </a:r>
+            <a:r>
+              <a:rPr>
+                <a:latin typeface="Courier"/>
+              </a:rPr>
+              <a:t>ggplot</a:t>
+            </a:r>
+            <a:r>
+              <a:rPr/>
+              <a:t> needs three things, joined with </a:t>
+            </a:r>
+            <a:r>
+              <a:rPr>
+                <a:latin typeface="Courier"/>
+              </a:rPr>
+              <a:t>+</a:t>
+            </a:r>
+            <a:r>
+              <a:rPr/>
+              <a:t>:</a:t>
+            </a:r>
+          </a:p>
+          <a:p>
+            <a:pPr lvl="0" indent="-342900" marL="342900">
+              <a:buAutoNum type="arabicPeriod"/>
+            </a:pPr>
             <a:r>
               <a:rPr b="1"/>
-              <a:t>vector</a:t>
-            </a:r>
-            <a:r>
-              <a:rPr/>
-              <a:t> is a row of values made with </a:t>
-            </a:r>
-            <a:r>
-              <a:rPr>
-                <a:latin typeface="Courier"/>
-              </a:rPr>
-              <a:t>c()</a:t>
-            </a:r>
-            <a:r>
-              <a:rPr/>
-              <a:t> — a spreadsheet column is really just a vector:</a:t>
+              <a:t>data</a:t>
+            </a:r>
+            <a:r>
+              <a:rPr/>
+              <a:t> — which data frame</a:t>
+            </a:r>
+          </a:p>
+          <a:p>
+            <a:pPr lvl="0" indent="-342900" marL="342900">
+              <a:buAutoNum type="arabicPeriod"/>
+            </a:pPr>
+            <a:r>
+              <a:rPr b="1"/>
+              <a:t>aes()</a:t>
+            </a:r>
+            <a:r>
+              <a:rPr/>
+              <a:t> — which columns map to x and y</a:t>
+            </a:r>
+          </a:p>
+          <a:p>
+            <a:pPr lvl="0" indent="-342900" marL="342900">
+              <a:buAutoNum type="arabicPeriod"/>
+            </a:pPr>
+            <a:r>
+              <a:rPr b="1"/>
+              <a:t>geom</a:t>
+            </a:r>
+            <a:r>
+              <a:rPr/>
+              <a:t> — how to draw it</a:t>
             </a:r>
           </a:p>
           <a:p>
@@ -5660,11 +6930,20 @@
             <a:r>
               <a:rPr>
                 <a:solidFill>
+                  <a:srgbClr val="4758AB"/>
+                </a:solidFill>
+                <a:latin typeface="Courier"/>
+              </a:rPr>
+              <a:t>ggplot</a:t>
+            </a:r>
+            <a:r>
+              <a:rPr>
+                <a:solidFill>
                   <a:srgbClr val="003B4F"/>
                 </a:solidFill>
                 <a:latin typeface="Courier"/>
               </a:rPr>
-              <a:t>length_mm &lt;- </a:t>
+              <a:t>(pine_df, </a:t>
             </a:r>
             <a:r>
               <a:rPr>
@@ -5673,7 +6952,7 @@
                 </a:solidFill>
                 <a:latin typeface="Courier"/>
               </a:rPr>
-              <a:t>c</a:t>
+              <a:t>aes</a:t>
             </a:r>
             <a:r>
               <a:rPr>
@@ -5687,11 +6966,11 @@
             <a:r>
               <a:rPr>
                 <a:solidFill>
-                  <a:srgbClr val="AD0000"/>
-                </a:solidFill>
-                <a:latin typeface="Courier"/>
-              </a:rPr>
-              <a:t>20</a:t>
+                  <a:srgbClr val="657422"/>
+                </a:solidFill>
+                <a:latin typeface="Courier"/>
+              </a:rPr>
+              <a:t>x =</a:t>
             </a:r>
             <a:r>
               <a:rPr>
@@ -5700,16 +6979,16 @@
                 </a:solidFill>
                 <a:latin typeface="Courier"/>
               </a:rPr>
-              <a:t>, </a:t>
-            </a:r>
-            <a:r>
-              <a:rPr>
-                <a:solidFill>
-                  <a:srgbClr val="AD0000"/>
-                </a:solidFill>
-                <a:latin typeface="Courier"/>
-              </a:rPr>
-              <a:t>21</a:t>
+              <a:t> wind, </a:t>
+            </a:r>
+            <a:r>
+              <a:rPr>
+                <a:solidFill>
+                  <a:srgbClr val="657422"/>
+                </a:solidFill>
+                <a:latin typeface="Courier"/>
+              </a:rPr>
+              <a:t>y =</a:t>
             </a:r>
             <a:r>
               <a:rPr>
@@ -5718,17 +6997,18 @@
                 </a:solidFill>
                 <a:latin typeface="Courier"/>
               </a:rPr>
-              <a:t>, </a:t>
-            </a:r>
-            <a:r>
-              <a:rPr>
-                <a:solidFill>
-                  <a:srgbClr val="AD0000"/>
-                </a:solidFill>
-                <a:latin typeface="Courier"/>
-              </a:rPr>
-              <a:t>23</a:t>
-            </a:r>
+              <a:t> length_mm)) </a:t>
+            </a:r>
+            <a:r>
+              <a:rPr>
+                <a:solidFill>
+                  <a:srgbClr val="5E5E5E"/>
+                </a:solidFill>
+                <a:latin typeface="Courier"/>
+              </a:rPr>
+              <a:t>+</a:t>
+            </a:r>
+            <a:br/>
             <a:r>
               <a:rPr>
                 <a:solidFill>
@@ -5736,16 +7016,16 @@
                 </a:solidFill>
                 <a:latin typeface="Courier"/>
               </a:rPr>
-              <a:t>, </a:t>
-            </a:r>
-            <a:r>
-              <a:rPr>
-                <a:solidFill>
-                  <a:srgbClr val="AD0000"/>
-                </a:solidFill>
-                <a:latin typeface="Courier"/>
-              </a:rPr>
-              <a:t>25</a:t>
+              <a:t>  </a:t>
+            </a:r>
+            <a:r>
+              <a:rPr>
+                <a:solidFill>
+                  <a:srgbClr val="4758AB"/>
+                </a:solidFill>
+                <a:latin typeface="Courier"/>
+              </a:rPr>
+              <a:t>geom_point</a:t>
             </a:r>
             <a:r>
               <a:rPr>
@@ -5754,137 +7034,55 @@
                 </a:solidFill>
                 <a:latin typeface="Courier"/>
               </a:rPr>
-              <a:t>)      </a:t>
-            </a:r>
-            <a:r>
-              <a:rPr>
-                <a:solidFill>
-                  <a:srgbClr val="5E5E5E"/>
-                </a:solidFill>
-                <a:latin typeface="Courier"/>
-              </a:rPr>
-              <a:t># numeric</a:t>
-            </a:r>
-            <a:br/>
-            <a:r>
-              <a:rPr>
-                <a:solidFill>
-                  <a:srgbClr val="003B4F"/>
-                </a:solidFill>
-                <a:latin typeface="Courier"/>
-              </a:rPr>
-              <a:t>side      &lt;- </a:t>
-            </a:r>
-            <a:r>
-              <a:rPr>
-                <a:solidFill>
-                  <a:srgbClr val="4758AB"/>
-                </a:solidFill>
-                <a:latin typeface="Courier"/>
-              </a:rPr>
-              <a:t>c</a:t>
-            </a:r>
-            <a:r>
-              <a:rPr>
-                <a:solidFill>
-                  <a:srgbClr val="003B4F"/>
-                </a:solidFill>
-                <a:latin typeface="Courier"/>
-              </a:rPr>
-              <a:t>(</a:t>
-            </a:r>
-            <a:r>
-              <a:rPr>
-                <a:solidFill>
-                  <a:srgbClr val="20794D"/>
-                </a:solidFill>
-                <a:latin typeface="Courier"/>
-              </a:rPr>
-              <a:t>"n"</a:t>
-            </a:r>
-            <a:r>
-              <a:rPr>
-                <a:solidFill>
-                  <a:srgbClr val="003B4F"/>
-                </a:solidFill>
-                <a:latin typeface="Courier"/>
-              </a:rPr>
-              <a:t>, </a:t>
-            </a:r>
-            <a:r>
-              <a:rPr>
-                <a:solidFill>
-                  <a:srgbClr val="20794D"/>
-                </a:solidFill>
-                <a:latin typeface="Courier"/>
-              </a:rPr>
-              <a:t>"s"</a:t>
-            </a:r>
-            <a:r>
-              <a:rPr>
-                <a:solidFill>
-                  <a:srgbClr val="003B4F"/>
-                </a:solidFill>
-                <a:latin typeface="Courier"/>
-              </a:rPr>
-              <a:t>)            </a:t>
-            </a:r>
-            <a:r>
-              <a:rPr>
-                <a:solidFill>
-                  <a:srgbClr val="5E5E5E"/>
-                </a:solidFill>
-                <a:latin typeface="Courier"/>
-              </a:rPr>
-              <a:t># character — needs quotes</a:t>
-            </a:r>
-          </a:p>
-          <a:p>
-            <a:pPr lvl="0" indent="0" marL="0">
-              <a:buNone/>
-            </a:pPr>
-            <a:r>
-              <a:rPr/>
-              <a:t>The </a:t>
-            </a:r>
-            <a:r>
-              <a:rPr b="1"/>
-              <a:t>console forgets</a:t>
-            </a:r>
-            <a:r>
-              <a:rPr/>
-              <a:t>. A </a:t>
-            </a:r>
-            <a:r>
-              <a:rPr b="1"/>
-              <a:t>script</a:t>
-            </a:r>
-            <a:r>
-              <a:rPr/>
-              <a:t> (</a:t>
-            </a:r>
-            <a:r>
-              <a:rPr>
-                <a:latin typeface="Courier"/>
-              </a:rPr>
-              <a:t>.R</a:t>
-            </a:r>
-            <a:r>
-              <a:rPr/>
-              <a:t> file) remembers:</a:t>
-            </a:r>
-          </a:p>
-          <a:p>
-            <a:pPr lvl="0"/>
-            <a:r>
-              <a:rPr b="1"/>
-              <a:t>File → New File → R File</a:t>
-            </a:r>
-            <a:r>
-              <a:rPr/>
-              <a:t>, save it, run lines with Ctrl/Cmd+Enter</a:t>
-            </a:r>
-          </a:p>
+              <a:t>()</a:t>
+            </a:r>
+          </a:p>
+        </p:txBody>
+      </p:sp>
+      <p:pic>
+        <p:nvPicPr>
+          <p:cNvPr descr="getting_started_lecture_files/figure-pptx/unnamed-chunk-4-1.png" id="0" name="Picture 1"/>
+          <p:cNvPicPr>
+            <a:picLocks noGrp="1" noChangeAspect="1"/>
+          </p:cNvPicPr>
+          <p:nvPr/>
+        </p:nvPicPr>
+        <p:blipFill>
+          <a:blip r:embed="rId2"/>
+          <a:stretch>
+            <a:fillRect/>
+          </a:stretch>
+        </p:blipFill>
+        <p:spPr bwMode="auto">
+          <a:xfrm>
+            <a:off x="127000" y="1485900"/>
+            <a:ext cx="4432300" cy="2882900"/>
+          </a:xfrm>
+          <a:prstGeom prst="rect">
+            <a:avLst/>
+          </a:prstGeom>
+          <a:noFill/>
+          <a:ln w="9525">
+            <a:noFill/>
+            <a:headEnd/>
+            <a:tailEnd/>
+          </a:ln>
+        </p:spPr>
+      </p:pic>
+      <p:sp>
+        <p:nvSpPr>
+          <p:cNvPr id="4" name="Content Placeholder 3"/>
+          <p:cNvSpPr>
+            <a:spLocks noGrp="1"/>
+          </p:cNvSpPr>
+          <p:nvPr>
+            <p:ph idx="2" sz="half"/>
+          </p:nvPr>
+        </p:nvSpPr>
+        <p:spPr/>
+        <p:txBody>
+          <a:bodyPr/>
+          <a:lstStyle/>
           <a:p>
             <a:pPr lvl="0" indent="0" marL="1270000">
               <a:buNone/>
@@ -5908,30 +7106,34 @@
               <a:buNone/>
             </a:pPr>
             <a:r>
+              <a:rPr sz="2000">
+                <a:latin typeface="Courier"/>
+              </a:rPr>
+              <a:t>+</a:t>
+            </a:r>
+            <a:r>
               <a:rPr sz="2000"/>
-              <a:t>Without quotes, </a:t>
-            </a:r>
-            <a:r>
-              <a:rPr sz="2000">
-                <a:latin typeface="Courier"/>
-              </a:rPr>
-              <a:t>s</a:t>
+              <a:t> sits at the </a:t>
+            </a:r>
+            <a:r>
+              <a:rPr sz="2000" b="1"/>
+              <a:t>end</a:t>
             </a:r>
             <a:r>
               <a:rPr sz="2000"/>
-              <a:t> means “find an object called s,” not the text “s.” R will error if no such object exists.</a:t>
-            </a:r>
-          </a:p>
-        </p:txBody>
-      </p:sp>
-      <p:sp>
-        <p:nvSpPr>
-          <p:cNvPr id="4" name="Content Placeholder 3"/>
-          <p:cNvSpPr>
-            <a:spLocks noGrp="1"/>
-          </p:cNvSpPr>
-          <p:nvPr>
-            <p:ph idx="2" sz="half"/>
+              <a:t> of a line, never the start.</a:t>
+            </a:r>
+          </a:p>
+        </p:txBody>
+      </p:sp>
+      <p:sp>
+        <p:nvSpPr>
+          <p:cNvPr id="5" name="Text Placeholder 4"/>
+          <p:cNvSpPr>
+            <a:spLocks noGrp="1"/>
+          </p:cNvSpPr>
+          <p:nvPr>
+            <p:ph idx="3" sz="quarter" type="body"/>
           </p:nvPr>
         </p:nvSpPr>
         <p:spPr/>
@@ -5961,8 +7163,12 @@
               <a:buNone/>
             </a:pPr>
             <a:r>
+              <a:rPr sz="2000" i="1"/>
+              <a:t>Seeing</a:t>
+            </a:r>
+            <a:r>
               <a:rPr sz="2000"/>
-              <a:t>Console = scratch paper. Script = the lab notebook you keep and rerun.</a:t>
+              <a:t> your data is the single most important habit in this course — before you summarize or test anything, plot it.</a:t>
             </a:r>
           </a:p>
         </p:txBody>
@@ -5991,28 +7197,606 @@
       </p:grpSpPr>
       <p:sp>
         <p:nvSpPr>
-          <p:cNvPr id="3" name="Content Placeholder 2"/>
-          <p:cNvSpPr>
-            <a:spLocks noGrp="1"/>
-          </p:cNvSpPr>
-          <p:nvPr>
-            <p:ph idx="1"/>
-          </p:nvPr>
-        </p:nvSpPr>
-        <p:spPr/>
+          <p:cNvPr id="2" name="Title 1"/>
+          <p:cNvSpPr>
+            <a:spLocks noGrp="1"/>
+          </p:cNvSpPr>
+          <p:nvPr>
+            <p:ph type="title"/>
+          </p:nvPr>
+        </p:nvSpPr>
+        <p:spPr>
+          <a:xfrm>
+            <a:off x="139485" y="78119"/>
+            <a:ext cx="8229600" cy="607682"/>
+          </a:xfrm>
+        </p:spPr>
         <p:txBody>
           <a:bodyPr/>
           <a:lstStyle/>
           <a:p>
             <a:pPr lvl="0" indent="0" marL="0">
-              <a:spcBef>
-                <a:spcPts val="3000"/>
-              </a:spcBef>
-              <a:buNone/>
-            </a:pPr>
-            <a:r>
-              <a:rPr b="1"/>
-              <a:t>Packages — extending what R can do</a:t>
+              <a:buNone/>
+            </a:pPr>
+            <a:r>
+              <a:rPr/>
+              <a:t>One layer at a time</a:t>
+            </a:r>
+          </a:p>
+        </p:txBody>
+      </p:sp>
+      <p:sp>
+        <p:nvSpPr>
+          <p:cNvPr id="3" name="Text Placeholder 2"/>
+          <p:cNvSpPr>
+            <a:spLocks noGrp="1"/>
+          </p:cNvSpPr>
+          <p:nvPr>
+            <p:ph idx="1" type="body"/>
+          </p:nvPr>
+        </p:nvSpPr>
+        <p:spPr/>
+        <p:txBody>
+          <a:bodyPr/>
+          <a:lstStyle/>
+          <a:p>
+            <a:pPr lvl="0" indent="0">
+              <a:buNone/>
+            </a:pPr>
+            <a:r>
+              <a:rPr>
+                <a:solidFill>
+                  <a:srgbClr val="4758AB"/>
+                </a:solidFill>
+                <a:latin typeface="Courier"/>
+              </a:rPr>
+              <a:t>ggplot</a:t>
+            </a:r>
+            <a:r>
+              <a:rPr>
+                <a:solidFill>
+                  <a:srgbClr val="003B4F"/>
+                </a:solidFill>
+                <a:latin typeface="Courier"/>
+              </a:rPr>
+              <a:t>(pine_df, </a:t>
+            </a:r>
+            <a:r>
+              <a:rPr>
+                <a:solidFill>
+                  <a:srgbClr val="4758AB"/>
+                </a:solidFill>
+                <a:latin typeface="Courier"/>
+              </a:rPr>
+              <a:t>aes</a:t>
+            </a:r>
+            <a:r>
+              <a:rPr>
+                <a:solidFill>
+                  <a:srgbClr val="003B4F"/>
+                </a:solidFill>
+                <a:latin typeface="Courier"/>
+              </a:rPr>
+              <a:t>(</a:t>
+            </a:r>
+            <a:r>
+              <a:rPr>
+                <a:solidFill>
+                  <a:srgbClr val="657422"/>
+                </a:solidFill>
+                <a:latin typeface="Courier"/>
+              </a:rPr>
+              <a:t>x =</a:t>
+            </a:r>
+            <a:r>
+              <a:rPr>
+                <a:solidFill>
+                  <a:srgbClr val="003B4F"/>
+                </a:solidFill>
+                <a:latin typeface="Courier"/>
+              </a:rPr>
+              <a:t> wind, </a:t>
+            </a:r>
+            <a:r>
+              <a:rPr>
+                <a:solidFill>
+                  <a:srgbClr val="657422"/>
+                </a:solidFill>
+                <a:latin typeface="Courier"/>
+              </a:rPr>
+              <a:t>y =</a:t>
+            </a:r>
+            <a:r>
+              <a:rPr>
+                <a:solidFill>
+                  <a:srgbClr val="003B4F"/>
+                </a:solidFill>
+                <a:latin typeface="Courier"/>
+              </a:rPr>
+              <a:t> length_mm)) </a:t>
+            </a:r>
+            <a:r>
+              <a:rPr>
+                <a:solidFill>
+                  <a:srgbClr val="5E5E5E"/>
+                </a:solidFill>
+                <a:latin typeface="Courier"/>
+              </a:rPr>
+              <a:t>+</a:t>
+            </a:r>
+            <a:br/>
+            <a:r>
+              <a:rPr>
+                <a:solidFill>
+                  <a:srgbClr val="003B4F"/>
+                </a:solidFill>
+                <a:latin typeface="Courier"/>
+              </a:rPr>
+              <a:t>  </a:t>
+            </a:r>
+            <a:r>
+              <a:rPr>
+                <a:solidFill>
+                  <a:srgbClr val="4758AB"/>
+                </a:solidFill>
+                <a:latin typeface="Courier"/>
+              </a:rPr>
+              <a:t>geom_boxplot</a:t>
+            </a:r>
+            <a:r>
+              <a:rPr>
+                <a:solidFill>
+                  <a:srgbClr val="003B4F"/>
+                </a:solidFill>
+                <a:latin typeface="Courier"/>
+              </a:rPr>
+              <a:t>() </a:t>
+            </a:r>
+            <a:r>
+              <a:rPr>
+                <a:solidFill>
+                  <a:srgbClr val="5E5E5E"/>
+                </a:solidFill>
+                <a:latin typeface="Courier"/>
+              </a:rPr>
+              <a:t>+</a:t>
+            </a:r>
+            <a:br/>
+            <a:r>
+              <a:rPr>
+                <a:solidFill>
+                  <a:srgbClr val="003B4F"/>
+                </a:solidFill>
+                <a:latin typeface="Courier"/>
+              </a:rPr>
+              <a:t>  </a:t>
+            </a:r>
+            <a:r>
+              <a:rPr>
+                <a:solidFill>
+                  <a:srgbClr val="4758AB"/>
+                </a:solidFill>
+                <a:latin typeface="Courier"/>
+              </a:rPr>
+              <a:t>geom_jitter</a:t>
+            </a:r>
+            <a:r>
+              <a:rPr>
+                <a:solidFill>
+                  <a:srgbClr val="003B4F"/>
+                </a:solidFill>
+                <a:latin typeface="Courier"/>
+              </a:rPr>
+              <a:t>(</a:t>
+            </a:r>
+            <a:r>
+              <a:rPr>
+                <a:solidFill>
+                  <a:srgbClr val="657422"/>
+                </a:solidFill>
+                <a:latin typeface="Courier"/>
+              </a:rPr>
+              <a:t>width =</a:t>
+            </a:r>
+            <a:r>
+              <a:rPr>
+                <a:solidFill>
+                  <a:srgbClr val="003B4F"/>
+                </a:solidFill>
+                <a:latin typeface="Courier"/>
+              </a:rPr>
+              <a:t> </a:t>
+            </a:r>
+            <a:r>
+              <a:rPr>
+                <a:solidFill>
+                  <a:srgbClr val="AD0000"/>
+                </a:solidFill>
+                <a:latin typeface="Courier"/>
+              </a:rPr>
+              <a:t>0.15</a:t>
+            </a:r>
+            <a:r>
+              <a:rPr>
+                <a:solidFill>
+                  <a:srgbClr val="003B4F"/>
+                </a:solidFill>
+                <a:latin typeface="Courier"/>
+              </a:rPr>
+              <a:t>, </a:t>
+            </a:r>
+            <a:r>
+              <a:rPr>
+                <a:solidFill>
+                  <a:srgbClr val="657422"/>
+                </a:solidFill>
+                <a:latin typeface="Courier"/>
+              </a:rPr>
+              <a:t>alpha =</a:t>
+            </a:r>
+            <a:r>
+              <a:rPr>
+                <a:solidFill>
+                  <a:srgbClr val="003B4F"/>
+                </a:solidFill>
+                <a:latin typeface="Courier"/>
+              </a:rPr>
+              <a:t> </a:t>
+            </a:r>
+            <a:r>
+              <a:rPr>
+                <a:solidFill>
+                  <a:srgbClr val="AD0000"/>
+                </a:solidFill>
+                <a:latin typeface="Courier"/>
+              </a:rPr>
+              <a:t>0.6</a:t>
+            </a:r>
+            <a:r>
+              <a:rPr>
+                <a:solidFill>
+                  <a:srgbClr val="003B4F"/>
+                </a:solidFill>
+                <a:latin typeface="Courier"/>
+              </a:rPr>
+              <a:t>, </a:t>
+            </a:r>
+            <a:r>
+              <a:rPr>
+                <a:solidFill>
+                  <a:srgbClr val="657422"/>
+                </a:solidFill>
+                <a:latin typeface="Courier"/>
+              </a:rPr>
+              <a:t>color =</a:t>
+            </a:r>
+            <a:r>
+              <a:rPr>
+                <a:solidFill>
+                  <a:srgbClr val="003B4F"/>
+                </a:solidFill>
+                <a:latin typeface="Courier"/>
+              </a:rPr>
+              <a:t> </a:t>
+            </a:r>
+            <a:r>
+              <a:rPr>
+                <a:solidFill>
+                  <a:srgbClr val="20794D"/>
+                </a:solidFill>
+                <a:latin typeface="Courier"/>
+              </a:rPr>
+              <a:t>"tomato"</a:t>
+            </a:r>
+            <a:r>
+              <a:rPr>
+                <a:solidFill>
+                  <a:srgbClr val="003B4F"/>
+                </a:solidFill>
+                <a:latin typeface="Courier"/>
+              </a:rPr>
+              <a:t>) </a:t>
+            </a:r>
+            <a:r>
+              <a:rPr>
+                <a:solidFill>
+                  <a:srgbClr val="5E5E5E"/>
+                </a:solidFill>
+                <a:latin typeface="Courier"/>
+              </a:rPr>
+              <a:t>+</a:t>
+            </a:r>
+            <a:br/>
+            <a:r>
+              <a:rPr>
+                <a:solidFill>
+                  <a:srgbClr val="003B4F"/>
+                </a:solidFill>
+                <a:latin typeface="Courier"/>
+              </a:rPr>
+              <a:t>  </a:t>
+            </a:r>
+            <a:r>
+              <a:rPr>
+                <a:solidFill>
+                  <a:srgbClr val="4758AB"/>
+                </a:solidFill>
+                <a:latin typeface="Courier"/>
+              </a:rPr>
+              <a:t>labs</a:t>
+            </a:r>
+            <a:r>
+              <a:rPr>
+                <a:solidFill>
+                  <a:srgbClr val="003B4F"/>
+                </a:solidFill>
+                <a:latin typeface="Courier"/>
+              </a:rPr>
+              <a:t>(</a:t>
+            </a:r>
+            <a:r>
+              <a:rPr>
+                <a:solidFill>
+                  <a:srgbClr val="657422"/>
+                </a:solidFill>
+                <a:latin typeface="Courier"/>
+              </a:rPr>
+              <a:t>x =</a:t>
+            </a:r>
+            <a:r>
+              <a:rPr>
+                <a:solidFill>
+                  <a:srgbClr val="003B4F"/>
+                </a:solidFill>
+                <a:latin typeface="Courier"/>
+              </a:rPr>
+              <a:t> </a:t>
+            </a:r>
+            <a:r>
+              <a:rPr>
+                <a:solidFill>
+                  <a:srgbClr val="20794D"/>
+                </a:solidFill>
+                <a:latin typeface="Courier"/>
+              </a:rPr>
+              <a:t>"Side of tree"</a:t>
+            </a:r>
+            <a:r>
+              <a:rPr>
+                <a:solidFill>
+                  <a:srgbClr val="003B4F"/>
+                </a:solidFill>
+                <a:latin typeface="Courier"/>
+              </a:rPr>
+              <a:t>,</a:t>
+            </a:r>
+            <a:br/>
+            <a:r>
+              <a:rPr>
+                <a:solidFill>
+                  <a:srgbClr val="003B4F"/>
+                </a:solidFill>
+                <a:latin typeface="Courier"/>
+              </a:rPr>
+              <a:t>       </a:t>
+            </a:r>
+            <a:r>
+              <a:rPr>
+                <a:solidFill>
+                  <a:srgbClr val="657422"/>
+                </a:solidFill>
+                <a:latin typeface="Courier"/>
+              </a:rPr>
+              <a:t>y =</a:t>
+            </a:r>
+            <a:r>
+              <a:rPr>
+                <a:solidFill>
+                  <a:srgbClr val="003B4F"/>
+                </a:solidFill>
+                <a:latin typeface="Courier"/>
+              </a:rPr>
+              <a:t> </a:t>
+            </a:r>
+            <a:r>
+              <a:rPr>
+                <a:solidFill>
+                  <a:srgbClr val="20794D"/>
+                </a:solidFill>
+                <a:latin typeface="Courier"/>
+              </a:rPr>
+              <a:t>"Needle length (mm)"</a:t>
+            </a:r>
+            <a:r>
+              <a:rPr>
+                <a:solidFill>
+                  <a:srgbClr val="003B4F"/>
+                </a:solidFill>
+                <a:latin typeface="Courier"/>
+              </a:rPr>
+              <a:t>,</a:t>
+            </a:r>
+            <a:br/>
+            <a:r>
+              <a:rPr>
+                <a:solidFill>
+                  <a:srgbClr val="003B4F"/>
+                </a:solidFill>
+                <a:latin typeface="Courier"/>
+              </a:rPr>
+              <a:t>       </a:t>
+            </a:r>
+            <a:r>
+              <a:rPr>
+                <a:solidFill>
+                  <a:srgbClr val="657422"/>
+                </a:solidFill>
+                <a:latin typeface="Courier"/>
+              </a:rPr>
+              <a:t>title =</a:t>
+            </a:r>
+            <a:r>
+              <a:rPr>
+                <a:solidFill>
+                  <a:srgbClr val="003B4F"/>
+                </a:solidFill>
+                <a:latin typeface="Courier"/>
+              </a:rPr>
+              <a:t> </a:t>
+            </a:r>
+            <a:r>
+              <a:rPr>
+                <a:solidFill>
+                  <a:srgbClr val="20794D"/>
+                </a:solidFill>
+                <a:latin typeface="Courier"/>
+              </a:rPr>
+              <a:t>"Needle length by wind exposure"</a:t>
+            </a:r>
+            <a:r>
+              <a:rPr>
+                <a:solidFill>
+                  <a:srgbClr val="003B4F"/>
+                </a:solidFill>
+                <a:latin typeface="Courier"/>
+              </a:rPr>
+              <a:t>)</a:t>
+            </a:r>
+          </a:p>
+        </p:txBody>
+      </p:sp>
+      <p:pic>
+        <p:nvPicPr>
+          <p:cNvPr descr="getting_started_lecture_files/figure-pptx/unnamed-chunk-5-1.png" id="0" name="Picture 1"/>
+          <p:cNvPicPr>
+            <a:picLocks noGrp="1" noChangeAspect="1"/>
+          </p:cNvPicPr>
+          <p:nvPr/>
+        </p:nvPicPr>
+        <p:blipFill>
+          <a:blip r:embed="rId2"/>
+          <a:stretch>
+            <a:fillRect/>
+          </a:stretch>
+        </p:blipFill>
+        <p:spPr bwMode="auto">
+          <a:xfrm>
+            <a:off x="127000" y="1485900"/>
+            <a:ext cx="4432300" cy="2882900"/>
+          </a:xfrm>
+          <a:prstGeom prst="rect">
+            <a:avLst/>
+          </a:prstGeom>
+          <a:noFill/>
+          <a:ln w="9525">
+            <a:noFill/>
+            <a:headEnd/>
+            <a:tailEnd/>
+          </a:ln>
+        </p:spPr>
+      </p:pic>
+      <p:sp>
+        <p:nvSpPr>
+          <p:cNvPr id="4" name="Content Placeholder 3"/>
+          <p:cNvSpPr>
+            <a:spLocks noGrp="1"/>
+          </p:cNvSpPr>
+          <p:nvPr>
+            <p:ph idx="2" sz="half"/>
+          </p:nvPr>
+        </p:nvSpPr>
+        <p:spPr/>
+        <p:txBody>
+          <a:bodyPr/>
+          <a:lstStyle/>
+          <a:p>
+            <a:pPr lvl="0" indent="0" marL="1270000">
+              <a:buNone/>
+            </a:pPr>
+            <a:r>
+              <a:rPr sz="2000" b="1"/>
+              <a:t>Tip</a:t>
+            </a:r>
+          </a:p>
+          <a:p>
+            <a:pPr lvl="0" indent="0" marL="1270000">
+              <a:buNone/>
+            </a:pPr>
+            <a:r>
+              <a:rPr sz="2000" b="1"/>
+              <a:t>🖐 Try it yourself</a:t>
+            </a:r>
+          </a:p>
+          <a:p>
+            <a:pPr lvl="0" indent="0" marL="1270000">
+              <a:buNone/>
+            </a:pPr>
+            <a:r>
+              <a:rPr sz="2000"/>
+              <a:t>Swap </a:t>
+            </a:r>
+            <a:r>
+              <a:rPr sz="2000">
+                <a:latin typeface="Courier"/>
+              </a:rPr>
+              <a:t>wind</a:t>
+            </a:r>
+            <a:r>
+              <a:rPr sz="2000"/>
+              <a:t> for </a:t>
+            </a:r>
+            <a:r>
+              <a:rPr sz="2000">
+                <a:latin typeface="Courier"/>
+              </a:rPr>
+              <a:t>group</a:t>
+            </a:r>
+            <a:r>
+              <a:rPr sz="2000"/>
+              <a:t>. What does that plot tell you instead?</a:t>
+            </a:r>
+          </a:p>
+        </p:txBody>
+      </p:sp>
+      <p:sp>
+        <p:nvSpPr>
+          <p:cNvPr id="5" name="Text Placeholder 4"/>
+          <p:cNvSpPr>
+            <a:spLocks noGrp="1"/>
+          </p:cNvSpPr>
+          <p:nvPr>
+            <p:ph idx="3" sz="quarter" type="body"/>
+          </p:nvPr>
+        </p:nvSpPr>
+        <p:spPr/>
+        <p:txBody>
+          <a:bodyPr/>
+          <a:lstStyle/>
+          <a:p>
+            <a:pPr lvl="0" indent="0" marL="1270000">
+              <a:buNone/>
+            </a:pPr>
+            <a:r>
+              <a:rPr sz="2000" b="1"/>
+              <a:t>Note</a:t>
+            </a:r>
+          </a:p>
+          <a:p>
+            <a:pPr lvl="0" indent="0" marL="1270000">
+              <a:buNone/>
+            </a:pPr>
+            <a:r>
+              <a:rPr sz="2000" b="1"/>
+              <a:t>✅ Key idea</a:t>
+            </a:r>
+          </a:p>
+          <a:p>
+            <a:pPr lvl="0" indent="0" marL="1270000">
+              <a:buNone/>
+            </a:pPr>
+            <a:r>
+              <a:rPr sz="2000"/>
+              <a:t>A boxplot shows the summary; the jittered points show every real value underneath it. Show both when you can.</a:t>
             </a:r>
           </a:p>
         </p:txBody>
@@ -6041,15 +7825,23 @@
       </p:grpSpPr>
       <p:sp>
         <p:nvSpPr>
-          <p:cNvPr id="3" name="Content Placeholder 2"/>
-          <p:cNvSpPr>
-            <a:spLocks noGrp="1"/>
-          </p:cNvSpPr>
-          <p:nvPr>
-            <p:ph idx="1" sz="half"/>
-          </p:nvPr>
-        </p:nvSpPr>
-        <p:spPr/>
+          <p:cNvPr id="2" name="Title 1"/>
+          <p:cNvSpPr>
+            <a:spLocks noGrp="1"/>
+          </p:cNvSpPr>
+          <p:nvPr>
+            <p:ph type="title"/>
+          </p:nvPr>
+        </p:nvSpPr>
+        <p:spPr>
+          <a:xfrm>
+            <a:off x="0" y="0"/>
+            <a:ext cx="9144000" cy="602780"/>
+          </a:xfrm>
+          <a:solidFill>
+            <a:srgbClr val="70121D"/>
+          </a:solidFill>
+        </p:spPr>
         <p:txBody>
           <a:bodyPr/>
           <a:lstStyle/>
@@ -6058,14 +7850,26 @@
               <a:buNone/>
             </a:pPr>
             <a:r>
-              <a:rPr b="1"/>
-              <a:t>Install once</a:t>
-            </a:r>
-            <a:r>
-              <a:rPr/>
-              <a:t>, in the console:</a:t>
-            </a:r>
-          </a:p>
+              <a:rPr/>
+              <a:t>Save your plot</a:t>
+            </a:r>
+          </a:p>
+        </p:txBody>
+      </p:sp>
+      <p:sp>
+        <p:nvSpPr>
+          <p:cNvPr id="3" name="Content Placeholder 2"/>
+          <p:cNvSpPr>
+            <a:spLocks noGrp="1"/>
+          </p:cNvSpPr>
+          <p:nvPr>
+            <p:ph idx="1" sz="half"/>
+          </p:nvPr>
+        </p:nvSpPr>
+        <p:spPr/>
+        <p:txBody>
+          <a:bodyPr/>
+          <a:lstStyle/>
           <a:p>
             <a:pPr lvl="0" indent="0">
               <a:buNone/>
@@ -6073,11 +7877,20 @@
             <a:r>
               <a:rPr>
                 <a:solidFill>
+                  <a:srgbClr val="003B4F"/>
+                </a:solidFill>
+                <a:latin typeface="Courier"/>
+              </a:rPr>
+              <a:t>needle_plot &lt;- </a:t>
+            </a:r>
+            <a:r>
+              <a:rPr>
+                <a:solidFill>
                   <a:srgbClr val="4758AB"/>
                 </a:solidFill>
                 <a:latin typeface="Courier"/>
               </a:rPr>
-              <a:t>install.packages</a:t>
+              <a:t>ggplot</a:t>
             </a:r>
             <a:r>
               <a:rPr>
@@ -6086,16 +7899,234 @@
                 </a:solidFill>
                 <a:latin typeface="Courier"/>
               </a:rPr>
+              <a:t>(pine_df, </a:t>
+            </a:r>
+            <a:r>
+              <a:rPr>
+                <a:solidFill>
+                  <a:srgbClr val="4758AB"/>
+                </a:solidFill>
+                <a:latin typeface="Courier"/>
+              </a:rPr>
+              <a:t>aes</a:t>
+            </a:r>
+            <a:r>
+              <a:rPr>
+                <a:solidFill>
+                  <a:srgbClr val="003B4F"/>
+                </a:solidFill>
+                <a:latin typeface="Courier"/>
+              </a:rPr>
               <a:t>(</a:t>
             </a:r>
             <a:r>
               <a:rPr>
                 <a:solidFill>
+                  <a:srgbClr val="657422"/>
+                </a:solidFill>
+                <a:latin typeface="Courier"/>
+              </a:rPr>
+              <a:t>x =</a:t>
+            </a:r>
+            <a:r>
+              <a:rPr>
+                <a:solidFill>
+                  <a:srgbClr val="003B4F"/>
+                </a:solidFill>
+                <a:latin typeface="Courier"/>
+              </a:rPr>
+              <a:t> wind, </a:t>
+            </a:r>
+            <a:r>
+              <a:rPr>
+                <a:solidFill>
+                  <a:srgbClr val="657422"/>
+                </a:solidFill>
+                <a:latin typeface="Courier"/>
+              </a:rPr>
+              <a:t>y =</a:t>
+            </a:r>
+            <a:r>
+              <a:rPr>
+                <a:solidFill>
+                  <a:srgbClr val="003B4F"/>
+                </a:solidFill>
+                <a:latin typeface="Courier"/>
+              </a:rPr>
+              <a:t> length_mm)) </a:t>
+            </a:r>
+            <a:r>
+              <a:rPr>
+                <a:solidFill>
+                  <a:srgbClr val="5E5E5E"/>
+                </a:solidFill>
+                <a:latin typeface="Courier"/>
+              </a:rPr>
+              <a:t>+</a:t>
+            </a:r>
+            <a:br/>
+            <a:r>
+              <a:rPr>
+                <a:solidFill>
+                  <a:srgbClr val="003B4F"/>
+                </a:solidFill>
+                <a:latin typeface="Courier"/>
+              </a:rPr>
+              <a:t>  </a:t>
+            </a:r>
+            <a:r>
+              <a:rPr>
+                <a:solidFill>
+                  <a:srgbClr val="4758AB"/>
+                </a:solidFill>
+                <a:latin typeface="Courier"/>
+              </a:rPr>
+              <a:t>geom_boxplot</a:t>
+            </a:r>
+            <a:r>
+              <a:rPr>
+                <a:solidFill>
+                  <a:srgbClr val="003B4F"/>
+                </a:solidFill>
+                <a:latin typeface="Courier"/>
+              </a:rPr>
+              <a:t>() </a:t>
+            </a:r>
+            <a:r>
+              <a:rPr>
+                <a:solidFill>
+                  <a:srgbClr val="5E5E5E"/>
+                </a:solidFill>
+                <a:latin typeface="Courier"/>
+              </a:rPr>
+              <a:t>+</a:t>
+            </a:r>
+            <a:br/>
+            <a:r>
+              <a:rPr>
+                <a:solidFill>
+                  <a:srgbClr val="003B4F"/>
+                </a:solidFill>
+                <a:latin typeface="Courier"/>
+              </a:rPr>
+              <a:t>  </a:t>
+            </a:r>
+            <a:r>
+              <a:rPr>
+                <a:solidFill>
+                  <a:srgbClr val="4758AB"/>
+                </a:solidFill>
+                <a:latin typeface="Courier"/>
+              </a:rPr>
+              <a:t>geom_jitter</a:t>
+            </a:r>
+            <a:r>
+              <a:rPr>
+                <a:solidFill>
+                  <a:srgbClr val="003B4F"/>
+                </a:solidFill>
+                <a:latin typeface="Courier"/>
+              </a:rPr>
+              <a:t>(</a:t>
+            </a:r>
+            <a:r>
+              <a:rPr>
+                <a:solidFill>
+                  <a:srgbClr val="657422"/>
+                </a:solidFill>
+                <a:latin typeface="Courier"/>
+              </a:rPr>
+              <a:t>width =</a:t>
+            </a:r>
+            <a:r>
+              <a:rPr>
+                <a:solidFill>
+                  <a:srgbClr val="003B4F"/>
+                </a:solidFill>
+                <a:latin typeface="Courier"/>
+              </a:rPr>
+              <a:t> </a:t>
+            </a:r>
+            <a:r>
+              <a:rPr>
+                <a:solidFill>
+                  <a:srgbClr val="AD0000"/>
+                </a:solidFill>
+                <a:latin typeface="Courier"/>
+              </a:rPr>
+              <a:t>0.15</a:t>
+            </a:r>
+            <a:r>
+              <a:rPr>
+                <a:solidFill>
+                  <a:srgbClr val="003B4F"/>
+                </a:solidFill>
+                <a:latin typeface="Courier"/>
+              </a:rPr>
+              <a:t>, </a:t>
+            </a:r>
+            <a:r>
+              <a:rPr>
+                <a:solidFill>
+                  <a:srgbClr val="657422"/>
+                </a:solidFill>
+                <a:latin typeface="Courier"/>
+              </a:rPr>
+              <a:t>alpha =</a:t>
+            </a:r>
+            <a:r>
+              <a:rPr>
+                <a:solidFill>
+                  <a:srgbClr val="003B4F"/>
+                </a:solidFill>
+                <a:latin typeface="Courier"/>
+              </a:rPr>
+              <a:t> </a:t>
+            </a:r>
+            <a:r>
+              <a:rPr>
+                <a:solidFill>
+                  <a:srgbClr val="AD0000"/>
+                </a:solidFill>
+                <a:latin typeface="Courier"/>
+              </a:rPr>
+              <a:t>0.6</a:t>
+            </a:r>
+            <a:r>
+              <a:rPr>
+                <a:solidFill>
+                  <a:srgbClr val="003B4F"/>
+                </a:solidFill>
+                <a:latin typeface="Courier"/>
+              </a:rPr>
+              <a:t>, </a:t>
+            </a:r>
+            <a:r>
+              <a:rPr>
+                <a:solidFill>
+                  <a:srgbClr val="657422"/>
+                </a:solidFill>
+                <a:latin typeface="Courier"/>
+              </a:rPr>
+              <a:t>color =</a:t>
+            </a:r>
+            <a:r>
+              <a:rPr>
+                <a:solidFill>
+                  <a:srgbClr val="003B4F"/>
+                </a:solidFill>
+                <a:latin typeface="Courier"/>
+              </a:rPr>
+              <a:t> </a:t>
+            </a:r>
+            <a:r>
+              <a:rPr>
+                <a:solidFill>
                   <a:srgbClr val="20794D"/>
                 </a:solidFill>
                 <a:latin typeface="Courier"/>
               </a:rPr>
-              <a:t>"tidyverse"</a:t>
+              <a:t>"tomato"</a:t>
             </a:r>
             <a:r>
               <a:rPr>
@@ -6104,26 +8135,119 @@
                 </a:solidFill>
                 <a:latin typeface="Courier"/>
               </a:rPr>
+              <a:t>) </a:t>
+            </a:r>
+            <a:r>
+              <a:rPr>
+                <a:solidFill>
+                  <a:srgbClr val="5E5E5E"/>
+                </a:solidFill>
+                <a:latin typeface="Courier"/>
+              </a:rPr>
+              <a:t>+</a:t>
+            </a:r>
+            <a:br/>
+            <a:r>
+              <a:rPr>
+                <a:solidFill>
+                  <a:srgbClr val="003B4F"/>
+                </a:solidFill>
+                <a:latin typeface="Courier"/>
+              </a:rPr>
+              <a:t>  </a:t>
+            </a:r>
+            <a:r>
+              <a:rPr>
+                <a:solidFill>
+                  <a:srgbClr val="4758AB"/>
+                </a:solidFill>
+                <a:latin typeface="Courier"/>
+              </a:rPr>
+              <a:t>labs</a:t>
+            </a:r>
+            <a:r>
+              <a:rPr>
+                <a:solidFill>
+                  <a:srgbClr val="003B4F"/>
+                </a:solidFill>
+                <a:latin typeface="Courier"/>
+              </a:rPr>
+              <a:t>(</a:t>
+            </a:r>
+            <a:r>
+              <a:rPr>
+                <a:solidFill>
+                  <a:srgbClr val="657422"/>
+                </a:solidFill>
+                <a:latin typeface="Courier"/>
+              </a:rPr>
+              <a:t>x =</a:t>
+            </a:r>
+            <a:r>
+              <a:rPr>
+                <a:solidFill>
+                  <a:srgbClr val="003B4F"/>
+                </a:solidFill>
+                <a:latin typeface="Courier"/>
+              </a:rPr>
+              <a:t> </a:t>
+            </a:r>
+            <a:r>
+              <a:rPr>
+                <a:solidFill>
+                  <a:srgbClr val="20794D"/>
+                </a:solidFill>
+                <a:latin typeface="Courier"/>
+              </a:rPr>
+              <a:t>"Side of tree"</a:t>
+            </a:r>
+            <a:r>
+              <a:rPr>
+                <a:solidFill>
+                  <a:srgbClr val="003B4F"/>
+                </a:solidFill>
+                <a:latin typeface="Courier"/>
+              </a:rPr>
+              <a:t>, </a:t>
+            </a:r>
+            <a:r>
+              <a:rPr>
+                <a:solidFill>
+                  <a:srgbClr val="657422"/>
+                </a:solidFill>
+                <a:latin typeface="Courier"/>
+              </a:rPr>
+              <a:t>y =</a:t>
+            </a:r>
+            <a:r>
+              <a:rPr>
+                <a:solidFill>
+                  <a:srgbClr val="003B4F"/>
+                </a:solidFill>
+                <a:latin typeface="Courier"/>
+              </a:rPr>
+              <a:t> </a:t>
+            </a:r>
+            <a:r>
+              <a:rPr>
+                <a:solidFill>
+                  <a:srgbClr val="20794D"/>
+                </a:solidFill>
+                <a:latin typeface="Courier"/>
+              </a:rPr>
+              <a:t>"Needle length (mm)"</a:t>
+            </a:r>
+            <a:r>
+              <a:rPr>
+                <a:solidFill>
+                  <a:srgbClr val="003B4F"/>
+                </a:solidFill>
+                <a:latin typeface="Courier"/>
+              </a:rPr>
               <a:t>)</a:t>
             </a:r>
-          </a:p>
-          <a:p>
-            <a:pPr lvl="0" indent="0" marL="0">
-              <a:buNone/>
-            </a:pPr>
-            <a:r>
-              <a:rPr b="1"/>
-              <a:t>Load every session</a:t>
-            </a:r>
-            <a:r>
-              <a:rPr/>
-              <a:t>, at the top of every script:</a:t>
-            </a:r>
-          </a:p>
-          <a:p>
-            <a:pPr lvl="0" indent="0">
-              <a:buNone/>
-            </a:pPr>
+            <a:br/>
+            <a:br/>
             <a:r>
               <a:rPr>
                 <a:solidFill>
@@ -6131,7 +8255,7 @@
                 </a:solidFill>
                 <a:latin typeface="Courier"/>
               </a:rPr>
-              <a:t>library</a:t>
+              <a:t>ggsave</a:t>
             </a:r>
             <a:r>
               <a:rPr>
@@ -6140,16 +8264,207 @@
                 </a:solidFill>
                 <a:latin typeface="Courier"/>
               </a:rPr>
-              <a:t>(tidyverse)   </a:t>
-            </a:r>
-            <a:r>
-              <a:rPr>
-                <a:solidFill>
-                  <a:srgbClr val="5E5E5E"/>
-                </a:solidFill>
-                <a:latin typeface="Courier"/>
-              </a:rPr>
-              <a:t># wrangling + ggplot2</a:t>
+              <a:t>(</a:t>
+            </a:r>
+            <a:r>
+              <a:rPr>
+                <a:solidFill>
+                  <a:srgbClr val="20794D"/>
+                </a:solidFill>
+                <a:latin typeface="Courier"/>
+              </a:rPr>
+              <a:t>"figures/needle_length.png"</a:t>
+            </a:r>
+            <a:r>
+              <a:rPr>
+                <a:solidFill>
+                  <a:srgbClr val="003B4F"/>
+                </a:solidFill>
+                <a:latin typeface="Courier"/>
+              </a:rPr>
+              <a:t>,</a:t>
+            </a:r>
+            <a:br/>
+            <a:r>
+              <a:rPr>
+                <a:solidFill>
+                  <a:srgbClr val="003B4F"/>
+                </a:solidFill>
+                <a:latin typeface="Courier"/>
+              </a:rPr>
+              <a:t>       </a:t>
+            </a:r>
+            <a:r>
+              <a:rPr>
+                <a:solidFill>
+                  <a:srgbClr val="657422"/>
+                </a:solidFill>
+                <a:latin typeface="Courier"/>
+              </a:rPr>
+              <a:t>plot =</a:t>
+            </a:r>
+            <a:r>
+              <a:rPr>
+                <a:solidFill>
+                  <a:srgbClr val="003B4F"/>
+                </a:solidFill>
+                <a:latin typeface="Courier"/>
+              </a:rPr>
+              <a:t> needle_plot,</a:t>
+            </a:r>
+            <a:br/>
+            <a:r>
+              <a:rPr>
+                <a:solidFill>
+                  <a:srgbClr val="003B4F"/>
+                </a:solidFill>
+                <a:latin typeface="Courier"/>
+              </a:rPr>
+              <a:t>       </a:t>
+            </a:r>
+            <a:r>
+              <a:rPr>
+                <a:solidFill>
+                  <a:srgbClr val="657422"/>
+                </a:solidFill>
+                <a:latin typeface="Courier"/>
+              </a:rPr>
+              <a:t>width =</a:t>
+            </a:r>
+            <a:r>
+              <a:rPr>
+                <a:solidFill>
+                  <a:srgbClr val="003B4F"/>
+                </a:solidFill>
+                <a:latin typeface="Courier"/>
+              </a:rPr>
+              <a:t> </a:t>
+            </a:r>
+            <a:r>
+              <a:rPr>
+                <a:solidFill>
+                  <a:srgbClr val="AD0000"/>
+                </a:solidFill>
+                <a:latin typeface="Courier"/>
+              </a:rPr>
+              <a:t>3</a:t>
+            </a:r>
+            <a:r>
+              <a:rPr>
+                <a:solidFill>
+                  <a:srgbClr val="003B4F"/>
+                </a:solidFill>
+                <a:latin typeface="Courier"/>
+              </a:rPr>
+              <a:t>, </a:t>
+            </a:r>
+            <a:r>
+              <a:rPr>
+                <a:solidFill>
+                  <a:srgbClr val="657422"/>
+                </a:solidFill>
+                <a:latin typeface="Courier"/>
+              </a:rPr>
+              <a:t>height =</a:t>
+            </a:r>
+            <a:r>
+              <a:rPr>
+                <a:solidFill>
+                  <a:srgbClr val="003B4F"/>
+                </a:solidFill>
+                <a:latin typeface="Courier"/>
+              </a:rPr>
+              <a:t> </a:t>
+            </a:r>
+            <a:r>
+              <a:rPr>
+                <a:solidFill>
+                  <a:srgbClr val="AD0000"/>
+                </a:solidFill>
+                <a:latin typeface="Courier"/>
+              </a:rPr>
+              <a:t>3</a:t>
+            </a:r>
+            <a:r>
+              <a:rPr>
+                <a:solidFill>
+                  <a:srgbClr val="003B4F"/>
+                </a:solidFill>
+                <a:latin typeface="Courier"/>
+              </a:rPr>
+              <a:t>, </a:t>
+            </a:r>
+            <a:r>
+              <a:rPr>
+                <a:solidFill>
+                  <a:srgbClr val="657422"/>
+                </a:solidFill>
+                <a:latin typeface="Courier"/>
+              </a:rPr>
+              <a:t>units =</a:t>
+            </a:r>
+            <a:r>
+              <a:rPr>
+                <a:solidFill>
+                  <a:srgbClr val="003B4F"/>
+                </a:solidFill>
+                <a:latin typeface="Courier"/>
+              </a:rPr>
+              <a:t> </a:t>
+            </a:r>
+            <a:r>
+              <a:rPr>
+                <a:solidFill>
+                  <a:srgbClr val="20794D"/>
+                </a:solidFill>
+                <a:latin typeface="Courier"/>
+              </a:rPr>
+              <a:t>"in"</a:t>
+            </a:r>
+            <a:r>
+              <a:rPr>
+                <a:solidFill>
+                  <a:srgbClr val="003B4F"/>
+                </a:solidFill>
+                <a:latin typeface="Courier"/>
+              </a:rPr>
+              <a:t>, </a:t>
+            </a:r>
+            <a:r>
+              <a:rPr>
+                <a:solidFill>
+                  <a:srgbClr val="657422"/>
+                </a:solidFill>
+                <a:latin typeface="Courier"/>
+              </a:rPr>
+              <a:t>dpi =</a:t>
+            </a:r>
+            <a:r>
+              <a:rPr>
+                <a:solidFill>
+                  <a:srgbClr val="003B4F"/>
+                </a:solidFill>
+                <a:latin typeface="Courier"/>
+              </a:rPr>
+              <a:t> </a:t>
+            </a:r>
+            <a:r>
+              <a:rPr>
+                <a:solidFill>
+                  <a:srgbClr val="AD0000"/>
+                </a:solidFill>
+                <a:latin typeface="Courier"/>
+              </a:rPr>
+              <a:t>300</a:t>
+            </a:r>
+            <a:r>
+              <a:rPr>
+                <a:solidFill>
+                  <a:srgbClr val="003B4F"/>
+                </a:solidFill>
+                <a:latin typeface="Courier"/>
+              </a:rPr>
+              <a:t>)</a:t>
             </a:r>
           </a:p>
           <a:p>
@@ -6175,22 +8490,42 @@
               <a:buNone/>
             </a:pPr>
             <a:r>
-              <a:rPr sz="2000" i="1"/>
-              <a:t>“could not find function…”</a:t>
+              <a:rPr sz="2000">
+                <a:latin typeface="Courier"/>
+              </a:rPr>
+              <a:t>ggsave()</a:t>
             </a:r>
             <a:r>
               <a:rPr sz="2000"/>
-              <a:t> almost always means you forgot the </a:t>
+              <a:t> wants the </a:t>
+            </a:r>
+            <a:r>
+              <a:rPr sz="2000" b="1"/>
+              <a:t>filename first</a:t>
+            </a:r>
+            <a:r>
+              <a:rPr sz="2000"/>
+              <a:t>, then </a:t>
             </a:r>
             <a:r>
               <a:rPr sz="2000">
                 <a:latin typeface="Courier"/>
               </a:rPr>
-              <a:t>library()</a:t>
+              <a:t>plot =</a:t>
             </a:r>
             <a:r>
               <a:rPr sz="2000"/>
-              <a:t> line for that session.</a:t>
+              <a:t>. Always use </a:t>
+            </a:r>
+            <a:r>
+              <a:rPr sz="2000">
+                <a:latin typeface="Courier"/>
+              </a:rPr>
+              <a:t>dpi = 300</a:t>
+            </a:r>
+            <a:r>
+              <a:rPr sz="2000"/>
+              <a:t> — print/poster quality.</a:t>
             </a:r>
           </a:p>
         </p:txBody>
@@ -6224,29 +8559,24 @@
             </a:pPr>
             <a:r>
               <a:rPr sz="2000" b="1"/>
-              <a:t>📖 New words</a:t>
-            </a:r>
-          </a:p>
-          <a:p>
-            <a:pPr lvl="0"/>
+              <a:t>📖 File format tip</a:t>
+            </a:r>
+          </a:p>
+          <a:p>
+            <a:pPr lvl="0" indent="0" marL="1270000">
+              <a:buNone/>
+            </a:pPr>
+            <a:r>
+              <a:rPr sz="2000"/>
+              <a:t>Save figures as </a:t>
+            </a:r>
             <a:r>
               <a:rPr sz="2000" b="1"/>
-              <a:t>Package</a:t>
+              <a:t>PNG</a:t>
             </a:r>
             <a:r>
               <a:rPr sz="2000"/>
-              <a:t> — the installed toolbox (once)</a:t>
-            </a:r>
-          </a:p>
-          <a:p>
-            <a:pPr lvl="0"/>
-            <a:r>
-              <a:rPr sz="2000" b="1"/>
-              <a:t>Library</a:t>
-            </a:r>
-            <a:r>
-              <a:rPr sz="2000"/>
-              <a:t> — loading it for today’s session (every time)</a:t>
+              <a:t> for reports and submissions.</a:t>
             </a:r>
           </a:p>
         </p:txBody>
@@ -6286,8 +8616,11 @@
         <p:spPr>
           <a:xfrm>
             <a:off x="0" y="0"/>
-            <a:ext cx="9144000" cy="582780"/>
+            <a:ext cx="9144000" cy="602780"/>
           </a:xfrm>
+          <a:solidFill>
+            <a:srgbClr val="70121D"/>
+          </a:solidFill>
         </p:spPr>
         <p:txBody>
           <a:bodyPr/>
@@ -6298,7 +8631,7 @@
             </a:pPr>
             <a:r>
               <a:rPr/>
-              <a:t>Part 4 · Load Data and Make Your First Plot</a:t>
+              <a:t>Wrap-up</a:t>
             </a:r>
           </a:p>
         </p:txBody>
@@ -6310,7 +8643,7 @@
             <a:spLocks noGrp="1"/>
           </p:cNvSpPr>
           <p:nvPr>
-            <p:ph idx="1"/>
+            <p:ph idx="1" sz="half"/>
           </p:nvPr>
         </p:nvSpPr>
         <p:spPr/>
@@ -6319,14 +8652,231 @@
           <a:lstStyle/>
           <a:p>
             <a:pPr lvl="0" indent="0" marL="0">
-              <a:spcBef>
-                <a:spcPts val="3000"/>
-              </a:spcBef>
-              <a:buNone/>
-            </a:pPr>
+              <a:buNone/>
+            </a:pPr>
+            <a:r>
+              <a:rPr/>
+              <a:t>Today you:</a:t>
+            </a:r>
+          </a:p>
+          <a:p>
+            <a:pPr lvl="0"/>
+            <a:r>
+              <a:rPr/>
+              <a:t>Turned a question into a testable </a:t>
+            </a:r>
             <a:r>
               <a:rPr b="1"/>
-              <a:t>Bring the data in</a:t>
+              <a:t>H₀ / Hₐ</a:t>
+            </a:r>
+          </a:p>
+          <a:p>
+            <a:pPr lvl="0"/>
+            <a:r>
+              <a:rPr/>
+              <a:t>Organized a project folder with </a:t>
+            </a:r>
+            <a:r>
+              <a:rPr b="1"/>
+              <a:t>data/scripts/figures</a:t>
+            </a:r>
+          </a:p>
+          <a:p>
+            <a:pPr lvl="0"/>
+            <a:r>
+              <a:rPr/>
+              <a:t>Ran your first R code — objects, functions, vectors, packages</a:t>
+            </a:r>
+          </a:p>
+          <a:p>
+            <a:pPr lvl="0"/>
+            <a:r>
+              <a:rPr/>
+              <a:t>Loaded real data and made — and saved — your </a:t>
+            </a:r>
+            <a:r>
+              <a:rPr b="1"/>
+              <a:t>first </a:t>
+            </a:r>
+            <a:r>
+              <a:rPr b="1">
+                <a:latin typeface="Courier"/>
+              </a:rPr>
+              <a:t>ggplot</a:t>
+            </a:r>
+          </a:p>
+          <a:p>
+            <a:pPr lvl="0" indent="0" marL="1270000">
+              <a:buNone/>
+            </a:pPr>
+            <a:r>
+              <a:rPr sz="2000" b="1"/>
+              <a:t>Tip</a:t>
+            </a:r>
+          </a:p>
+          <a:p>
+            <a:pPr lvl="0" indent="0" marL="1270000">
+              <a:buNone/>
+            </a:pPr>
+            <a:r>
+              <a:rPr sz="2000" b="1"/>
+              <a:t>🖐 Before next class</a:t>
+            </a:r>
+          </a:p>
+          <a:p>
+            <a:pPr lvl="0" indent="0" marL="1270000">
+              <a:buNone/>
+            </a:pPr>
+            <a:r>
+              <a:rPr sz="2000"/>
+              <a:t>Finish the worksheet: load </a:t>
+            </a:r>
+            <a:r>
+              <a:rPr sz="2000">
+                <a:latin typeface="Courier"/>
+              </a:rPr>
+              <a:t>pine_needles.csv</a:t>
+            </a:r>
+            <a:r>
+              <a:rPr sz="2000"/>
+              <a:t>, run </a:t>
+            </a:r>
+            <a:r>
+              <a:rPr sz="2000">
+                <a:latin typeface="Courier"/>
+              </a:rPr>
+              <a:t>glimpse()</a:t>
+            </a:r>
+            <a:r>
+              <a:rPr sz="2000"/>
+              <a:t>, and make one more plot — </a:t>
+            </a:r>
+            <a:r>
+              <a:rPr sz="2000">
+                <a:latin typeface="Courier"/>
+              </a:rPr>
+              <a:t>length_mm</a:t>
+            </a:r>
+            <a:r>
+              <a:rPr sz="2000"/>
+              <a:t> by </a:t>
+            </a:r>
+            <a:r>
+              <a:rPr sz="2000">
+                <a:latin typeface="Courier"/>
+              </a:rPr>
+              <a:t>n_s</a:t>
+            </a:r>
+            <a:r>
+              <a:rPr sz="2000"/>
+              <a:t> this time. Save it to </a:t>
+            </a:r>
+            <a:r>
+              <a:rPr sz="2000">
+                <a:latin typeface="Courier"/>
+              </a:rPr>
+              <a:t>figures/</a:t>
+            </a:r>
+            <a:r>
+              <a:rPr sz="2000"/>
+              <a:t>.</a:t>
+            </a:r>
+          </a:p>
+        </p:txBody>
+      </p:sp>
+      <p:sp>
+        <p:nvSpPr>
+          <p:cNvPr id="4" name="Content Placeholder 3"/>
+          <p:cNvSpPr>
+            <a:spLocks noGrp="1"/>
+          </p:cNvSpPr>
+          <p:nvPr>
+            <p:ph idx="2" sz="half"/>
+          </p:nvPr>
+        </p:nvSpPr>
+        <p:spPr/>
+        <p:txBody>
+          <a:bodyPr/>
+          <a:lstStyle/>
+          <a:p>
+            <a:pPr lvl="0" indent="0" marL="1270000">
+              <a:buNone/>
+            </a:pPr>
+            <a:r>
+              <a:rPr sz="2000" b="1"/>
+              <a:t>Note</a:t>
+            </a:r>
+          </a:p>
+          <a:p>
+            <a:pPr lvl="0" indent="0" marL="1270000">
+              <a:buNone/>
+            </a:pPr>
+            <a:r>
+              <a:rPr sz="2000" b="1"/>
+              <a:t>Up next — Module 2</a:t>
+            </a:r>
+          </a:p>
+          <a:p>
+            <a:pPr lvl="0"/>
+            <a:r>
+              <a:rPr sz="2000">
+                <a:latin typeface="Courier"/>
+              </a:rPr>
+              <a:t>filter()</a:t>
+            </a:r>
+            <a:r>
+              <a:rPr sz="2000"/>
+              <a:t>, </a:t>
+            </a:r>
+            <a:r>
+              <a:rPr sz="2000">
+                <a:latin typeface="Courier"/>
+              </a:rPr>
+              <a:t>select()</a:t>
+            </a:r>
+            <a:r>
+              <a:rPr sz="2000"/>
+              <a:t>, </a:t>
+            </a:r>
+            <a:r>
+              <a:rPr sz="2000">
+                <a:latin typeface="Courier"/>
+              </a:rPr>
+              <a:t>mutate()</a:t>
+            </a:r>
+            <a:r>
+              <a:rPr sz="2000"/>
+              <a:t>, </a:t>
+            </a:r>
+            <a:r>
+              <a:rPr sz="2000">
+                <a:latin typeface="Courier"/>
+              </a:rPr>
+              <a:t>arrange()</a:t>
+            </a:r>
+          </a:p>
+          <a:p>
+            <a:pPr lvl="0"/>
+            <a:r>
+              <a:rPr sz="2000"/>
+              <a:t>Cleaning a genuinely messy version of this dataset</a:t>
+            </a:r>
+          </a:p>
+          <a:p>
+            <a:pPr lvl="0"/>
+            <a:r>
+              <a:rPr sz="2000"/>
+              <a:t>The pipe </a:t>
+            </a:r>
+            <a:r>
+              <a:rPr sz="2000">
+                <a:latin typeface="Courier"/>
+              </a:rPr>
+              <a:t>|&gt;</a:t>
+            </a:r>
+            <a:r>
+              <a:rPr sz="2000"/>
+              <a:t> and building a pipeline</a:t>
             </a:r>
           </a:p>
         </p:txBody>
@@ -6355,15 +8905,20 @@
       </p:grpSpPr>
       <p:sp>
         <p:nvSpPr>
-          <p:cNvPr id="3" name="Content Placeholder 2"/>
-          <p:cNvSpPr>
-            <a:spLocks noGrp="1"/>
-          </p:cNvSpPr>
-          <p:nvPr>
-            <p:ph idx="1" sz="half"/>
-          </p:nvPr>
-        </p:nvSpPr>
-        <p:spPr/>
+          <p:cNvPr id="2" name="Title 1"/>
+          <p:cNvSpPr>
+            <a:spLocks noGrp="1"/>
+          </p:cNvSpPr>
+          <p:nvPr>
+            <p:ph type="title"/>
+          </p:nvPr>
+        </p:nvSpPr>
+        <p:spPr>
+          <a:xfrm>
+            <a:off x="0" y="0"/>
+            <a:ext cx="9144000" cy="582780"/>
+          </a:xfrm>
+        </p:spPr>
         <p:txBody>
           <a:bodyPr/>
           <a:lstStyle/>
@@ -6373,87 +8928,128 @@
             </a:pPr>
             <a:r>
               <a:rPr/>
-              <a:t>Put the file in </a:t>
-            </a:r>
-            <a:r>
-              <a:rPr>
-                <a:latin typeface="Courier"/>
-              </a:rPr>
-              <a:t>data/</a:t>
-            </a:r>
-            <a:r>
-              <a:rPr/>
-              <a:t>, then:</a:t>
-            </a:r>
-          </a:p>
-          <a:p>
-            <a:pPr lvl="0" indent="0">
-              <a:buNone/>
-            </a:pPr>
-            <a:r>
-              <a:rPr>
-                <a:solidFill>
-                  <a:srgbClr val="4758AB"/>
-                </a:solidFill>
-                <a:latin typeface="Courier"/>
-              </a:rPr>
-              <a:t>library</a:t>
-            </a:r>
-            <a:r>
-              <a:rPr>
-                <a:solidFill>
-                  <a:srgbClr val="003B4F"/>
-                </a:solidFill>
-                <a:latin typeface="Courier"/>
-              </a:rPr>
-              <a:t>(tidyverse)</a:t>
-            </a:r>
-            <a:br/>
-            <a:br/>
-            <a:r>
-              <a:rPr>
-                <a:solidFill>
-                  <a:srgbClr val="003B4F"/>
-                </a:solidFill>
-                <a:latin typeface="Courier"/>
-              </a:rPr>
-              <a:t>pine_df &lt;- </a:t>
-            </a:r>
-            <a:r>
-              <a:rPr>
-                <a:solidFill>
-                  <a:srgbClr val="4758AB"/>
-                </a:solidFill>
-                <a:latin typeface="Courier"/>
-              </a:rPr>
-              <a:t>read_csv</a:t>
-            </a:r>
-            <a:r>
-              <a:rPr>
-                <a:solidFill>
-                  <a:srgbClr val="003B4F"/>
-                </a:solidFill>
-                <a:latin typeface="Courier"/>
-              </a:rPr>
-              <a:t>(</a:t>
-            </a:r>
-            <a:r>
-              <a:rPr>
-                <a:solidFill>
-                  <a:srgbClr val="20794D"/>
-                </a:solidFill>
-                <a:latin typeface="Courier"/>
-              </a:rPr>
-              <a:t>"data/pine_needles.csv"</a:t>
-            </a:r>
-            <a:r>
-              <a:rPr>
-                <a:solidFill>
-                  <a:srgbClr val="003B4F"/>
-                </a:solidFill>
+              <a:t>Getting unstuck</a:t>
+            </a:r>
+          </a:p>
+        </p:txBody>
+      </p:sp>
+      <p:sp>
+        <p:nvSpPr>
+          <p:cNvPr id="3" name="Content Placeholder 2"/>
+          <p:cNvSpPr>
+            <a:spLocks noGrp="1"/>
+          </p:cNvSpPr>
+          <p:nvPr>
+            <p:ph idx="1"/>
+          </p:nvPr>
+        </p:nvSpPr>
+        <p:spPr/>
+        <p:txBody>
+          <a:bodyPr/>
+          <a:lstStyle/>
+          <a:p>
+            <a:pPr lvl="0" indent="0" marL="0">
+              <a:buNone/>
+            </a:pPr>
+            <a:r>
+              <a:rPr/>
+              <a:t>When code breaks — and it will, that is normal:</a:t>
+            </a:r>
+          </a:p>
+          <a:p>
+            <a:pPr lvl="0" indent="-342900" marL="342900">
+              <a:buAutoNum type="arabicPeriod"/>
+            </a:pPr>
+            <a:r>
+              <a:rPr/>
+              <a:t>Read the </a:t>
+            </a:r>
+            <a:r>
+              <a:rPr b="1"/>
+              <a:t>error message</a:t>
+            </a:r>
+            <a:r>
+              <a:rPr/>
+              <a:t> out loud; it usually names the line</a:t>
+            </a:r>
+          </a:p>
+          <a:p>
+            <a:pPr lvl="0" indent="-342900" marL="342900">
+              <a:buAutoNum type="arabicPeriod"/>
+            </a:pPr>
+            <a:r>
+              <a:rPr/>
+              <a:t>Check the usual suspects: </a:t>
+            </a:r>
+            <a:r>
+              <a:rPr>
+                <a:latin typeface="Courier"/>
+              </a:rPr>
+              <a:t>library(tidyverse)</a:t>
+            </a:r>
+            <a:r>
+              <a:rPr/>
+              <a:t> loaded? Spelling? A missing </a:t>
+            </a:r>
+            <a:r>
+              <a:rPr>
                 <a:latin typeface="Courier"/>
               </a:rPr>
               <a:t>)</a:t>
+            </a:r>
+            <a:r>
+              <a:rPr/>
+              <a:t> or </a:t>
+            </a:r>
+            <a:r>
+              <a:rPr>
+                <a:latin typeface="Courier"/>
+              </a:rPr>
+              <a:t>+</a:t>
+            </a:r>
+            <a:r>
+              <a:rPr/>
+              <a:t> at the </a:t>
+            </a:r>
+            <a:r>
+              <a:rPr i="1"/>
+              <a:t>start</a:t>
+            </a:r>
+            <a:r>
+              <a:rPr/>
+              <a:t> of a line?</a:t>
+            </a:r>
+          </a:p>
+          <a:p>
+            <a:pPr lvl="0" indent="-342900" marL="342900">
+              <a:buAutoNum type="arabicPeriod"/>
+            </a:pPr>
+            <a:r>
+              <a:rPr>
+                <a:latin typeface="Courier"/>
+              </a:rPr>
+              <a:t>?function_name</a:t>
+            </a:r>
+            <a:r>
+              <a:rPr/>
+              <a:t> opens the help page</a:t>
+            </a:r>
+          </a:p>
+          <a:p>
+            <a:pPr lvl="0" indent="-342900" marL="342900">
+              <a:buAutoNum type="arabicPeriod"/>
+            </a:pPr>
+            <a:r>
+              <a:rPr/>
+              <a:t>Bring the </a:t>
+            </a:r>
+            <a:r>
+              <a:rPr b="1"/>
+              <a:t>exact error</a:t>
+            </a:r>
+            <a:r>
+              <a:rPr/>
+              <a:t> (copy-paste it) to class or office hours</a:t>
             </a:r>
           </a:p>
           <a:p>
@@ -6479,514 +9075,8 @@
               <a:buNone/>
             </a:pPr>
             <a:r>
-              <a:rPr sz="2000">
-                <a:latin typeface="Courier"/>
-              </a:rPr>
-              <a:t>read_csv()</a:t>
-            </a:r>
-            <a:r>
               <a:rPr sz="2000"/>
-              <a:t> comes free with </a:t>
-            </a:r>
-            <a:r>
-              <a:rPr sz="2000">
-                <a:latin typeface="Courier"/>
-              </a:rPr>
-              <a:t>library(tidyverse)</a:t>
-            </a:r>
-            <a:r>
-              <a:rPr sz="2000"/>
-              <a:t>. Your file’s first row becomes the </a:t>
-            </a:r>
-            <a:r>
-              <a:rPr sz="2000" b="1"/>
-              <a:t>column names</a:t>
-            </a:r>
-            <a:r>
-              <a:rPr sz="2000"/>
-              <a:t> in R.</a:t>
-            </a:r>
-          </a:p>
-        </p:txBody>
-      </p:sp>
-      <p:sp>
-        <p:nvSpPr>
-          <p:cNvPr id="4" name="Content Placeholder 3"/>
-          <p:cNvSpPr>
-            <a:spLocks noGrp="1"/>
-          </p:cNvSpPr>
-          <p:nvPr>
-            <p:ph idx="2" sz="half"/>
-          </p:nvPr>
-        </p:nvSpPr>
-        <p:spPr/>
-        <p:txBody>
-          <a:bodyPr/>
-          <a:lstStyle/>
-          <a:p>
-            <a:pPr lvl="0" indent="0" marL="1270000">
-              <a:buNone/>
-            </a:pPr>
-            <a:r>
-              <a:rPr sz="2000" b="1"/>
-              <a:t>Note</a:t>
-            </a:r>
-          </a:p>
-          <a:p>
-            <a:pPr lvl="0" indent="0" marL="1270000">
-              <a:buNone/>
-            </a:pPr>
-            <a:r>
-              <a:rPr sz="2000" b="1"/>
-              <a:t>Our columns</a:t>
-            </a:r>
-          </a:p>
-          <a:p>
-            <a:pPr lvl="0"/>
-            <a:r>
-              <a:rPr sz="2000">
-                <a:latin typeface="Courier"/>
-              </a:rPr>
-              <a:t>n_s</a:t>
-            </a:r>
-            <a:r>
-              <a:rPr sz="2000"/>
-              <a:t> — </a:t>
-            </a:r>
-            <a:r>
-              <a:rPr sz="2000">
-                <a:latin typeface="Courier"/>
-              </a:rPr>
-              <a:t>"n"</a:t>
-            </a:r>
-            <a:r>
-              <a:rPr sz="2000"/>
-              <a:t> (sheltered/lee) or </a:t>
-            </a:r>
-            <a:r>
-              <a:rPr sz="2000">
-                <a:latin typeface="Courier"/>
-              </a:rPr>
-              <a:t>"s"</a:t>
-            </a:r>
-            <a:r>
-              <a:rPr sz="2000"/>
-              <a:t> (exposed/windward)</a:t>
-            </a:r>
-          </a:p>
-          <a:p>
-            <a:pPr lvl="0"/>
-            <a:r>
-              <a:rPr sz="2000">
-                <a:latin typeface="Courier"/>
-              </a:rPr>
-              <a:t>wind</a:t>
-            </a:r>
-            <a:r>
-              <a:rPr sz="2000"/>
-              <a:t> — </a:t>
-            </a:r>
-            <a:r>
-              <a:rPr sz="2000">
-                <a:latin typeface="Courier"/>
-              </a:rPr>
-              <a:t>"lee"</a:t>
-            </a:r>
-            <a:r>
-              <a:rPr sz="2000"/>
-              <a:t> or </a:t>
-            </a:r>
-            <a:r>
-              <a:rPr sz="2000">
-                <a:latin typeface="Courier"/>
-              </a:rPr>
-              <a:t>"wind"</a:t>
-            </a:r>
-            <a:r>
-              <a:rPr sz="2000"/>
-              <a:t>, same grouping said a different way</a:t>
-            </a:r>
-          </a:p>
-          <a:p>
-            <a:pPr lvl="0"/>
-            <a:r>
-              <a:rPr sz="2000">
-                <a:latin typeface="Courier"/>
-              </a:rPr>
-              <a:t>length_mm</a:t>
-            </a:r>
-            <a:r>
-              <a:rPr sz="2000"/>
-              <a:t> — needle length in millimeters</a:t>
-            </a:r>
-          </a:p>
-        </p:txBody>
-      </p:sp>
-    </p:spTree>
-  </p:cSld>
-</p:sld>
-</file>
-
-<file path=ppt/slides/slide27.xml><?xml version="1.0" encoding="utf-8"?>
-<p:sld xmlns:a="http://schemas.openxmlformats.org/drawingml/2006/main" xmlns:r="http://schemas.openxmlformats.org/officeDocument/2006/relationships" xmlns:p="http://schemas.openxmlformats.org/presentationml/2006/main">
-  <p:cSld>
-    <p:spTree>
-      <p:nvGrpSpPr>
-        <p:cNvPr id="1" name=""/>
-        <p:cNvGrpSpPr/>
-        <p:nvPr/>
-      </p:nvGrpSpPr>
-      <p:grpSpPr>
-        <a:xfrm>
-          <a:off x="0" y="0"/>
-          <a:ext cx="0" cy="0"/>
-          <a:chOff x="0" y="0"/>
-          <a:chExt cx="0" cy="0"/>
-        </a:xfrm>
-      </p:grpSpPr>
-      <p:sp>
-        <p:nvSpPr>
-          <p:cNvPr id="3" name="Content Placeholder 2"/>
-          <p:cNvSpPr>
-            <a:spLocks noGrp="1"/>
-          </p:cNvSpPr>
-          <p:nvPr>
-            <p:ph idx="1"/>
-          </p:nvPr>
-        </p:nvSpPr>
-        <p:spPr/>
-        <p:txBody>
-          <a:bodyPr/>
-          <a:lstStyle/>
-          <a:p>
-            <a:pPr lvl="0" indent="0" marL="0">
-              <a:spcBef>
-                <a:spcPts val="3000"/>
-              </a:spcBef>
-              <a:buNone/>
-            </a:pPr>
-            <a:r>
-              <a:rPr b="1"/>
-              <a:t>Look before you trust it</a:t>
-            </a:r>
-          </a:p>
-        </p:txBody>
-      </p:sp>
-    </p:spTree>
-  </p:cSld>
-</p:sld>
-</file>
-
-<file path=ppt/slides/slide28.xml><?xml version="1.0" encoding="utf-8"?>
-<p:sld xmlns:a="http://schemas.openxmlformats.org/drawingml/2006/main" xmlns:r="http://schemas.openxmlformats.org/officeDocument/2006/relationships" xmlns:p="http://schemas.openxmlformats.org/presentationml/2006/main">
-  <p:cSld>
-    <p:spTree>
-      <p:nvGrpSpPr>
-        <p:cNvPr id="1" name=""/>
-        <p:cNvGrpSpPr/>
-        <p:nvPr/>
-      </p:nvGrpSpPr>
-      <p:grpSpPr>
-        <a:xfrm>
-          <a:off x="0" y="0"/>
-          <a:ext cx="0" cy="0"/>
-          <a:chOff x="0" y="0"/>
-          <a:chExt cx="0" cy="0"/>
-        </a:xfrm>
-      </p:grpSpPr>
-      <p:sp>
-        <p:nvSpPr>
-          <p:cNvPr id="3" name="Content Placeholder 2"/>
-          <p:cNvSpPr>
-            <a:spLocks noGrp="1"/>
-          </p:cNvSpPr>
-          <p:nvPr>
-            <p:ph idx="1" sz="half"/>
-          </p:nvPr>
-        </p:nvSpPr>
-        <p:spPr/>
-        <p:txBody>
-          <a:bodyPr/>
-          <a:lstStyle/>
-          <a:p>
-            <a:pPr lvl="0" indent="0">
-              <a:buNone/>
-            </a:pPr>
-            <a:r>
-              <a:rPr>
-                <a:solidFill>
-                  <a:srgbClr val="4758AB"/>
-                </a:solidFill>
-                <a:latin typeface="Courier"/>
-              </a:rPr>
-              <a:t>glimpse</a:t>
-            </a:r>
-            <a:r>
-              <a:rPr>
-                <a:solidFill>
-                  <a:srgbClr val="003B4F"/>
-                </a:solidFill>
-                <a:latin typeface="Courier"/>
-              </a:rPr>
-              <a:t>(pine_df)</a:t>
-            </a:r>
-          </a:p>
-          <a:p>
-            <a:pPr lvl="0" indent="0">
-              <a:buNone/>
-            </a:pPr>
-            <a:r>
-              <a:rPr>
-                <a:latin typeface="Courier"/>
-              </a:rPr>
-              <a:t>Rows: 48
-Columns: 6
-$ date      &lt;chr&gt; "3/20/25", "3/20/25", "3/20/25", "3/20/25", "3/20/25", "3/20…
-$ group     &lt;chr&gt; "cephalopods", "cephalopods", "cephalopods", "cephalopods", …
-$ n_s       &lt;chr&gt; "n", "n", "n", "n", "n", "n", "s", "s", "s", "s", "s", "s", …
-$ wind      &lt;chr&gt; "lee", "lee", "lee", "lee", "lee", "lee", "wind", "wind", "w…
-$ tree_no   &lt;dbl&gt; 1, 1, 1, 1, 1, 1, 1, 1, 1, 1, 1, 1, 2, 2, 2, 2, 2, 2, 2, 2, …
-$ length_mm &lt;dbl&gt; 20, 21, 23, 25, 21, 16, 15, 16, 14, 17, 13, 15, 19, 18, 20, …</a:t>
-            </a:r>
-          </a:p>
-          <a:p>
-            <a:pPr lvl="0" indent="0">
-              <a:buNone/>
-            </a:pPr>
-            <a:r>
-              <a:rPr>
-                <a:solidFill>
-                  <a:srgbClr val="4758AB"/>
-                </a:solidFill>
-                <a:latin typeface="Courier"/>
-              </a:rPr>
-              <a:t>dim</a:t>
-            </a:r>
-            <a:r>
-              <a:rPr>
-                <a:solidFill>
-                  <a:srgbClr val="003B4F"/>
-                </a:solidFill>
-                <a:latin typeface="Courier"/>
-              </a:rPr>
-              <a:t>(pine_df)</a:t>
-            </a:r>
-          </a:p>
-          <a:p>
-            <a:pPr lvl="0" indent="0">
-              <a:buNone/>
-            </a:pPr>
-            <a:r>
-              <a:rPr>
-                <a:latin typeface="Courier"/>
-              </a:rPr>
-              <a:t>[1] 48  6</a:t>
-            </a:r>
-          </a:p>
-          <a:p>
-            <a:pPr lvl="0" indent="0" marL="1270000">
-              <a:buNone/>
-            </a:pPr>
-            <a:r>
-              <a:rPr sz="2000" b="1"/>
-              <a:t>Tip</a:t>
-            </a:r>
-          </a:p>
-          <a:p>
-            <a:pPr lvl="0" indent="0" marL="1270000">
-              <a:buNone/>
-            </a:pPr>
-            <a:r>
-              <a:rPr sz="2000" b="1"/>
-              <a:t>🖐 Notice</a:t>
-            </a:r>
-          </a:p>
-          <a:p>
-            <a:pPr lvl="0" indent="0" marL="1270000">
-              <a:buNone/>
-            </a:pPr>
-            <a:r>
-              <a:rPr sz="2000">
-                <a:latin typeface="Courier"/>
-              </a:rPr>
-              <a:t>n_s</a:t>
-            </a:r>
-            <a:r>
-              <a:rPr sz="2000"/>
-              <a:t> and </a:t>
-            </a:r>
-            <a:r>
-              <a:rPr sz="2000">
-                <a:latin typeface="Courier"/>
-              </a:rPr>
-              <a:t>wind</a:t>
-            </a:r>
-            <a:r>
-              <a:rPr sz="2000"/>
-              <a:t> always travel together — </a:t>
-            </a:r>
-            <a:r>
-              <a:rPr sz="2000">
-                <a:latin typeface="Courier"/>
-              </a:rPr>
-              <a:t>n</a:t>
-            </a:r>
-            <a:r>
-              <a:rPr sz="2000"/>
-              <a:t> with </a:t>
-            </a:r>
-            <a:r>
-              <a:rPr sz="2000">
-                <a:latin typeface="Courier"/>
-              </a:rPr>
-              <a:t>lee</a:t>
-            </a:r>
-            <a:r>
-              <a:rPr sz="2000"/>
-              <a:t>, </a:t>
-            </a:r>
-            <a:r>
-              <a:rPr sz="2000">
-                <a:latin typeface="Courier"/>
-              </a:rPr>
-              <a:t>s</a:t>
-            </a:r>
-            <a:r>
-              <a:rPr sz="2000"/>
-              <a:t> with </a:t>
-            </a:r>
-            <a:r>
-              <a:rPr sz="2000">
-                <a:latin typeface="Courier"/>
-              </a:rPr>
-              <a:t>wind</a:t>
-            </a:r>
-            <a:r>
-              <a:rPr sz="2000"/>
-              <a:t>. Two columns encoding the same grouping. Useful redundancy, or something to simplify? We’ll revisit this in Module 2.</a:t>
-            </a:r>
-          </a:p>
-        </p:txBody>
-      </p:sp>
-      <p:sp>
-        <p:nvSpPr>
-          <p:cNvPr id="4" name="Content Placeholder 3"/>
-          <p:cNvSpPr>
-            <a:spLocks noGrp="1"/>
-          </p:cNvSpPr>
-          <p:nvPr>
-            <p:ph idx="2" sz="half"/>
-          </p:nvPr>
-        </p:nvSpPr>
-        <p:spPr/>
-        <p:txBody>
-          <a:bodyPr/>
-          <a:lstStyle/>
-          <a:p>
-            <a:pPr lvl="0" indent="0" marL="1270000">
-              <a:buNone/>
-            </a:pPr>
-            <a:r>
-              <a:rPr sz="2000" b="1"/>
-              <a:t>Warning</a:t>
-            </a:r>
-          </a:p>
-          <a:p>
-            <a:pPr lvl="0" indent="0" marL="1270000">
-              <a:buNone/>
-            </a:pPr>
-            <a:r>
-              <a:rPr sz="2000" b="1"/>
-              <a:t>⚠️ Watch out!</a:t>
-            </a:r>
-          </a:p>
-          <a:p>
-            <a:pPr lvl="0" indent="0" marL="1270000">
-              <a:buNone/>
-            </a:pPr>
-            <a:r>
-              <a:rPr sz="2000"/>
-              <a:t>If a number column shows as </a:t>
-            </a:r>
-            <a:r>
-              <a:rPr sz="2000">
-                <a:latin typeface="Courier"/>
-              </a:rPr>
-              <a:t>&lt;chr&gt;</a:t>
-            </a:r>
-            <a:r>
-              <a:rPr sz="2000"/>
-              <a:t> in </a:t>
-            </a:r>
-            <a:r>
-              <a:rPr sz="2000">
-                <a:latin typeface="Courier"/>
-              </a:rPr>
-              <a:t>glimpse()</a:t>
-            </a:r>
-            <a:r>
-              <a:rPr sz="2000"/>
-              <a:t>, a stray letter or comma is hiding in that column.</a:t>
-            </a:r>
-          </a:p>
-        </p:txBody>
-      </p:sp>
-    </p:spTree>
-  </p:cSld>
-</p:sld>
-</file>
-
-<file path=ppt/slides/slide29.xml><?xml version="1.0" encoding="utf-8"?>
-<p:sld xmlns:a="http://schemas.openxmlformats.org/drawingml/2006/main" xmlns:r="http://schemas.openxmlformats.org/officeDocument/2006/relationships" xmlns:p="http://schemas.openxmlformats.org/presentationml/2006/main">
-  <p:cSld>
-    <p:spTree>
-      <p:nvGrpSpPr>
-        <p:cNvPr id="1" name=""/>
-        <p:cNvGrpSpPr/>
-        <p:nvPr/>
-      </p:nvGrpSpPr>
-      <p:grpSpPr>
-        <a:xfrm>
-          <a:off x="0" y="0"/>
-          <a:ext cx="0" cy="0"/>
-          <a:chOff x="0" y="0"/>
-          <a:chExt cx="0" cy="0"/>
-        </a:xfrm>
-      </p:grpSpPr>
-      <p:sp>
-        <p:nvSpPr>
-          <p:cNvPr id="3" name="Content Placeholder 2"/>
-          <p:cNvSpPr>
-            <a:spLocks noGrp="1"/>
-          </p:cNvSpPr>
-          <p:nvPr>
-            <p:ph idx="1"/>
-          </p:nvPr>
-        </p:nvSpPr>
-        <p:spPr/>
-        <p:txBody>
-          <a:bodyPr/>
-          <a:lstStyle/>
-          <a:p>
-            <a:pPr lvl="0" indent="0" marL="0">
-              <a:spcBef>
-                <a:spcPts val="3000"/>
-              </a:spcBef>
-              <a:buNone/>
-            </a:pPr>
-            <a:r>
-              <a:rPr b="1"/>
-              <a:t>Your first plot: </a:t>
-            </a:r>
-            <a:r>
-              <a:rPr b="1">
-                <a:latin typeface="Courier"/>
-              </a:rPr>
-              <a:t>ggplot</a:t>
-            </a:r>
-            <a:r>
-              <a:rPr b="1"/>
-              <a:t>, built in layers</a:t>
+              <a:t>Every working scientist googles error messages daily. Getting stuck is not failing — it is the job.</a:t>
             </a:r>
           </a:p>
         </p:txBody>
@@ -7043,2333 +9133,6 @@
           </a:p>
         </p:txBody>
       </p:sp>
-      <p:sp>
-        <p:nvSpPr>
-          <p:cNvPr id="3" name="Content Placeholder 2"/>
-          <p:cNvSpPr>
-            <a:spLocks noGrp="1"/>
-          </p:cNvSpPr>
-          <p:nvPr>
-            <p:ph idx="1"/>
-          </p:nvPr>
-        </p:nvSpPr>
-        <p:spPr/>
-        <p:txBody>
-          <a:bodyPr/>
-          <a:lstStyle/>
-          <a:p>
-            <a:pPr lvl="0" indent="0" marL="0">
-              <a:spcBef>
-                <a:spcPts val="3000"/>
-              </a:spcBef>
-              <a:buNone/>
-            </a:pPr>
-            <a:r>
-              <a:rPr b="1"/>
-              <a:t>What makes something science?</a:t>
-            </a:r>
-          </a:p>
-        </p:txBody>
-      </p:sp>
-    </p:spTree>
-  </p:cSld>
-</p:sld>
-</file>
-
-<file path=ppt/slides/slide30.xml><?xml version="1.0" encoding="utf-8"?>
-<p:sld xmlns:a="http://schemas.openxmlformats.org/drawingml/2006/main" xmlns:r="http://schemas.openxmlformats.org/officeDocument/2006/relationships" xmlns:p="http://schemas.openxmlformats.org/presentationml/2006/main">
-  <p:cSld>
-    <p:spTree>
-      <p:nvGrpSpPr>
-        <p:cNvPr id="1" name=""/>
-        <p:cNvGrpSpPr/>
-        <p:nvPr/>
-      </p:nvGrpSpPr>
-      <p:grpSpPr>
-        <a:xfrm>
-          <a:off x="0" y="0"/>
-          <a:ext cx="0" cy="0"/>
-          <a:chOff x="0" y="0"/>
-          <a:chExt cx="0" cy="0"/>
-        </a:xfrm>
-      </p:grpSpPr>
-      <p:sp>
-        <p:nvSpPr>
-          <p:cNvPr id="3" name="Text Placeholder 2"/>
-          <p:cNvSpPr>
-            <a:spLocks noGrp="1"/>
-          </p:cNvSpPr>
-          <p:nvPr>
-            <p:ph idx="1" type="body"/>
-          </p:nvPr>
-        </p:nvSpPr>
-        <p:spPr/>
-        <p:txBody>
-          <a:bodyPr/>
-          <a:lstStyle/>
-          <a:p>
-            <a:pPr lvl="0" indent="0" marL="0">
-              <a:buNone/>
-            </a:pPr>
-            <a:r>
-              <a:rPr/>
-              <a:t>Every </a:t>
-            </a:r>
-            <a:r>
-              <a:rPr>
-                <a:latin typeface="Courier"/>
-              </a:rPr>
-              <a:t>ggplot</a:t>
-            </a:r>
-            <a:r>
-              <a:rPr/>
-              <a:t> needs three things, joined with </a:t>
-            </a:r>
-            <a:r>
-              <a:rPr>
-                <a:latin typeface="Courier"/>
-              </a:rPr>
-              <a:t>+</a:t>
-            </a:r>
-            <a:r>
-              <a:rPr/>
-              <a:t>:</a:t>
-            </a:r>
-          </a:p>
-          <a:p>
-            <a:pPr lvl="0" indent="-342900" marL="342900">
-              <a:buAutoNum type="arabicPeriod"/>
-            </a:pPr>
-            <a:r>
-              <a:rPr b="1"/>
-              <a:t>data</a:t>
-            </a:r>
-            <a:r>
-              <a:rPr/>
-              <a:t> — which data frame</a:t>
-            </a:r>
-          </a:p>
-          <a:p>
-            <a:pPr lvl="0" indent="-342900" marL="342900">
-              <a:buAutoNum type="arabicPeriod"/>
-            </a:pPr>
-            <a:r>
-              <a:rPr b="1"/>
-              <a:t>aes()</a:t>
-            </a:r>
-            <a:r>
-              <a:rPr/>
-              <a:t> — which columns map to x and y</a:t>
-            </a:r>
-          </a:p>
-          <a:p>
-            <a:pPr lvl="0" indent="-342900" marL="342900">
-              <a:buAutoNum type="arabicPeriod"/>
-            </a:pPr>
-            <a:r>
-              <a:rPr b="1"/>
-              <a:t>geom</a:t>
-            </a:r>
-            <a:r>
-              <a:rPr/>
-              <a:t> — how to draw it</a:t>
-            </a:r>
-          </a:p>
-          <a:p>
-            <a:pPr lvl="0" indent="0">
-              <a:buNone/>
-            </a:pPr>
-            <a:r>
-              <a:rPr>
-                <a:solidFill>
-                  <a:srgbClr val="4758AB"/>
-                </a:solidFill>
-                <a:latin typeface="Courier"/>
-              </a:rPr>
-              <a:t>ggplot</a:t>
-            </a:r>
-            <a:r>
-              <a:rPr>
-                <a:solidFill>
-                  <a:srgbClr val="003B4F"/>
-                </a:solidFill>
-                <a:latin typeface="Courier"/>
-              </a:rPr>
-              <a:t>(pine_df, </a:t>
-            </a:r>
-            <a:r>
-              <a:rPr>
-                <a:solidFill>
-                  <a:srgbClr val="4758AB"/>
-                </a:solidFill>
-                <a:latin typeface="Courier"/>
-              </a:rPr>
-              <a:t>aes</a:t>
-            </a:r>
-            <a:r>
-              <a:rPr>
-                <a:solidFill>
-                  <a:srgbClr val="003B4F"/>
-                </a:solidFill>
-                <a:latin typeface="Courier"/>
-              </a:rPr>
-              <a:t>(</a:t>
-            </a:r>
-            <a:r>
-              <a:rPr>
-                <a:solidFill>
-                  <a:srgbClr val="657422"/>
-                </a:solidFill>
-                <a:latin typeface="Courier"/>
-              </a:rPr>
-              <a:t>x =</a:t>
-            </a:r>
-            <a:r>
-              <a:rPr>
-                <a:solidFill>
-                  <a:srgbClr val="003B4F"/>
-                </a:solidFill>
-                <a:latin typeface="Courier"/>
-              </a:rPr>
-              <a:t> wind, </a:t>
-            </a:r>
-            <a:r>
-              <a:rPr>
-                <a:solidFill>
-                  <a:srgbClr val="657422"/>
-                </a:solidFill>
-                <a:latin typeface="Courier"/>
-              </a:rPr>
-              <a:t>y =</a:t>
-            </a:r>
-            <a:r>
-              <a:rPr>
-                <a:solidFill>
-                  <a:srgbClr val="003B4F"/>
-                </a:solidFill>
-                <a:latin typeface="Courier"/>
-              </a:rPr>
-              <a:t> length_mm)) </a:t>
-            </a:r>
-            <a:r>
-              <a:rPr>
-                <a:solidFill>
-                  <a:srgbClr val="5E5E5E"/>
-                </a:solidFill>
-                <a:latin typeface="Courier"/>
-              </a:rPr>
-              <a:t>+</a:t>
-            </a:r>
-            <a:br/>
-            <a:r>
-              <a:rPr>
-                <a:solidFill>
-                  <a:srgbClr val="003B4F"/>
-                </a:solidFill>
-                <a:latin typeface="Courier"/>
-              </a:rPr>
-              <a:t>  </a:t>
-            </a:r>
-            <a:r>
-              <a:rPr>
-                <a:solidFill>
-                  <a:srgbClr val="4758AB"/>
-                </a:solidFill>
-                <a:latin typeface="Courier"/>
-              </a:rPr>
-              <a:t>geom_point</a:t>
-            </a:r>
-            <a:r>
-              <a:rPr>
-                <a:solidFill>
-                  <a:srgbClr val="003B4F"/>
-                </a:solidFill>
-                <a:latin typeface="Courier"/>
-              </a:rPr>
-              <a:t>()</a:t>
-            </a:r>
-          </a:p>
-        </p:txBody>
-      </p:sp>
-      <p:pic>
-        <p:nvPicPr>
-          <p:cNvPr descr="getting_started_lecture_files/figure-pptx/unnamed-chunk-4-1.png" id="0" name="Picture 1"/>
-          <p:cNvPicPr>
-            <a:picLocks noGrp="1" noChangeAspect="1"/>
-          </p:cNvPicPr>
-          <p:nvPr/>
-        </p:nvPicPr>
-        <p:blipFill>
-          <a:blip r:embed="rId2"/>
-          <a:stretch>
-            <a:fillRect/>
-          </a:stretch>
-        </p:blipFill>
-        <p:spPr bwMode="auto">
-          <a:xfrm>
-            <a:off x="127000" y="1562100"/>
-            <a:ext cx="4432300" cy="2730500"/>
-          </a:xfrm>
-          <a:prstGeom prst="rect">
-            <a:avLst/>
-          </a:prstGeom>
-          <a:noFill/>
-          <a:ln w="9525">
-            <a:noFill/>
-            <a:headEnd/>
-            <a:tailEnd/>
-          </a:ln>
-        </p:spPr>
-      </p:pic>
-      <p:sp>
-        <p:nvSpPr>
-          <p:cNvPr id="4" name="Content Placeholder 3"/>
-          <p:cNvSpPr>
-            <a:spLocks noGrp="1"/>
-          </p:cNvSpPr>
-          <p:nvPr>
-            <p:ph idx="2" sz="half"/>
-          </p:nvPr>
-        </p:nvSpPr>
-        <p:spPr/>
-        <p:txBody>
-          <a:bodyPr/>
-          <a:lstStyle/>
-          <a:p>
-            <a:pPr lvl="0" indent="0" marL="1270000">
-              <a:buNone/>
-            </a:pPr>
-            <a:r>
-              <a:rPr sz="2000" b="1"/>
-              <a:t>Warning</a:t>
-            </a:r>
-          </a:p>
-          <a:p>
-            <a:pPr lvl="0" indent="0" marL="1270000">
-              <a:buNone/>
-            </a:pPr>
-            <a:r>
-              <a:rPr sz="2000" b="1"/>
-              <a:t>⚠️ Watch out!</a:t>
-            </a:r>
-          </a:p>
-          <a:p>
-            <a:pPr lvl="0" indent="0" marL="1270000">
-              <a:buNone/>
-            </a:pPr>
-            <a:r>
-              <a:rPr sz="2000">
-                <a:latin typeface="Courier"/>
-              </a:rPr>
-              <a:t>+</a:t>
-            </a:r>
-            <a:r>
-              <a:rPr sz="2000"/>
-              <a:t> sits at the </a:t>
-            </a:r>
-            <a:r>
-              <a:rPr sz="2000" b="1"/>
-              <a:t>end</a:t>
-            </a:r>
-            <a:r>
-              <a:rPr sz="2000"/>
-              <a:t> of a line, never the start.</a:t>
-            </a:r>
-          </a:p>
-        </p:txBody>
-      </p:sp>
-      <p:sp>
-        <p:nvSpPr>
-          <p:cNvPr id="5" name="Text Placeholder 4"/>
-          <p:cNvSpPr>
-            <a:spLocks noGrp="1"/>
-          </p:cNvSpPr>
-          <p:nvPr>
-            <p:ph idx="3" sz="quarter" type="body"/>
-          </p:nvPr>
-        </p:nvSpPr>
-        <p:spPr/>
-        <p:txBody>
-          <a:bodyPr/>
-          <a:lstStyle/>
-          <a:p>
-            <a:pPr lvl="0" indent="0" marL="1270000">
-              <a:buNone/>
-            </a:pPr>
-            <a:r>
-              <a:rPr sz="2000" b="1"/>
-              <a:t>Note</a:t>
-            </a:r>
-          </a:p>
-          <a:p>
-            <a:pPr lvl="0" indent="0" marL="1270000">
-              <a:buNone/>
-            </a:pPr>
-            <a:r>
-              <a:rPr sz="2000" b="1"/>
-              <a:t>✅ Key idea</a:t>
-            </a:r>
-          </a:p>
-          <a:p>
-            <a:pPr lvl="0" indent="0" marL="1270000">
-              <a:buNone/>
-            </a:pPr>
-            <a:r>
-              <a:rPr sz="2000" i="1"/>
-              <a:t>Seeing</a:t>
-            </a:r>
-            <a:r>
-              <a:rPr sz="2000"/>
-              <a:t> your data is the single most important habit in this course — before you summarize or test anything, plot it.</a:t>
-            </a:r>
-          </a:p>
-        </p:txBody>
-      </p:sp>
-    </p:spTree>
-  </p:cSld>
-</p:sld>
-</file>
-
-<file path=ppt/slides/slide31.xml><?xml version="1.0" encoding="utf-8"?>
-<p:sld xmlns:a="http://schemas.openxmlformats.org/drawingml/2006/main" xmlns:r="http://schemas.openxmlformats.org/officeDocument/2006/relationships" xmlns:p="http://schemas.openxmlformats.org/presentationml/2006/main">
-  <p:cSld>
-    <p:spTree>
-      <p:nvGrpSpPr>
-        <p:cNvPr id="1" name=""/>
-        <p:cNvGrpSpPr/>
-        <p:nvPr/>
-      </p:nvGrpSpPr>
-      <p:grpSpPr>
-        <a:xfrm>
-          <a:off x="0" y="0"/>
-          <a:ext cx="0" cy="0"/>
-          <a:chOff x="0" y="0"/>
-          <a:chExt cx="0" cy="0"/>
-        </a:xfrm>
-      </p:grpSpPr>
-      <p:sp>
-        <p:nvSpPr>
-          <p:cNvPr id="3" name="Content Placeholder 2"/>
-          <p:cNvSpPr>
-            <a:spLocks noGrp="1"/>
-          </p:cNvSpPr>
-          <p:nvPr>
-            <p:ph idx="1"/>
-          </p:nvPr>
-        </p:nvSpPr>
-        <p:spPr/>
-        <p:txBody>
-          <a:bodyPr/>
-          <a:lstStyle/>
-          <a:p>
-            <a:pPr lvl="0" indent="0" marL="0">
-              <a:spcBef>
-                <a:spcPts val="3000"/>
-              </a:spcBef>
-              <a:buNone/>
-            </a:pPr>
-            <a:r>
-              <a:rPr b="1"/>
-              <a:t>One layer at a time</a:t>
-            </a:r>
-          </a:p>
-        </p:txBody>
-      </p:sp>
-    </p:spTree>
-  </p:cSld>
-</p:sld>
-</file>
-
-<file path=ppt/slides/slide32.xml><?xml version="1.0" encoding="utf-8"?>
-<p:sld xmlns:a="http://schemas.openxmlformats.org/drawingml/2006/main" xmlns:r="http://schemas.openxmlformats.org/officeDocument/2006/relationships" xmlns:p="http://schemas.openxmlformats.org/presentationml/2006/main">
-  <p:cSld>
-    <p:spTree>
-      <p:nvGrpSpPr>
-        <p:cNvPr id="1" name=""/>
-        <p:cNvGrpSpPr/>
-        <p:nvPr/>
-      </p:nvGrpSpPr>
-      <p:grpSpPr>
-        <a:xfrm>
-          <a:off x="0" y="0"/>
-          <a:ext cx="0" cy="0"/>
-          <a:chOff x="0" y="0"/>
-          <a:chExt cx="0" cy="0"/>
-        </a:xfrm>
-      </p:grpSpPr>
-      <p:sp>
-        <p:nvSpPr>
-          <p:cNvPr id="3" name="Text Placeholder 2"/>
-          <p:cNvSpPr>
-            <a:spLocks noGrp="1"/>
-          </p:cNvSpPr>
-          <p:nvPr>
-            <p:ph idx="1" type="body"/>
-          </p:nvPr>
-        </p:nvSpPr>
-        <p:spPr/>
-        <p:txBody>
-          <a:bodyPr/>
-          <a:lstStyle/>
-          <a:p>
-            <a:pPr lvl="0" indent="0">
-              <a:buNone/>
-            </a:pPr>
-            <a:r>
-              <a:rPr>
-                <a:solidFill>
-                  <a:srgbClr val="4758AB"/>
-                </a:solidFill>
-                <a:latin typeface="Courier"/>
-              </a:rPr>
-              <a:t>ggplot</a:t>
-            </a:r>
-            <a:r>
-              <a:rPr>
-                <a:solidFill>
-                  <a:srgbClr val="003B4F"/>
-                </a:solidFill>
-                <a:latin typeface="Courier"/>
-              </a:rPr>
-              <a:t>(pine_df, </a:t>
-            </a:r>
-            <a:r>
-              <a:rPr>
-                <a:solidFill>
-                  <a:srgbClr val="4758AB"/>
-                </a:solidFill>
-                <a:latin typeface="Courier"/>
-              </a:rPr>
-              <a:t>aes</a:t>
-            </a:r>
-            <a:r>
-              <a:rPr>
-                <a:solidFill>
-                  <a:srgbClr val="003B4F"/>
-                </a:solidFill>
-                <a:latin typeface="Courier"/>
-              </a:rPr>
-              <a:t>(</a:t>
-            </a:r>
-            <a:r>
-              <a:rPr>
-                <a:solidFill>
-                  <a:srgbClr val="657422"/>
-                </a:solidFill>
-                <a:latin typeface="Courier"/>
-              </a:rPr>
-              <a:t>x =</a:t>
-            </a:r>
-            <a:r>
-              <a:rPr>
-                <a:solidFill>
-                  <a:srgbClr val="003B4F"/>
-                </a:solidFill>
-                <a:latin typeface="Courier"/>
-              </a:rPr>
-              <a:t> wind, </a:t>
-            </a:r>
-            <a:r>
-              <a:rPr>
-                <a:solidFill>
-                  <a:srgbClr val="657422"/>
-                </a:solidFill>
-                <a:latin typeface="Courier"/>
-              </a:rPr>
-              <a:t>y =</a:t>
-            </a:r>
-            <a:r>
-              <a:rPr>
-                <a:solidFill>
-                  <a:srgbClr val="003B4F"/>
-                </a:solidFill>
-                <a:latin typeface="Courier"/>
-              </a:rPr>
-              <a:t> length_mm)) </a:t>
-            </a:r>
-            <a:r>
-              <a:rPr>
-                <a:solidFill>
-                  <a:srgbClr val="5E5E5E"/>
-                </a:solidFill>
-                <a:latin typeface="Courier"/>
-              </a:rPr>
-              <a:t>+</a:t>
-            </a:r>
-            <a:br/>
-            <a:r>
-              <a:rPr>
-                <a:solidFill>
-                  <a:srgbClr val="003B4F"/>
-                </a:solidFill>
-                <a:latin typeface="Courier"/>
-              </a:rPr>
-              <a:t>  </a:t>
-            </a:r>
-            <a:r>
-              <a:rPr>
-                <a:solidFill>
-                  <a:srgbClr val="4758AB"/>
-                </a:solidFill>
-                <a:latin typeface="Courier"/>
-              </a:rPr>
-              <a:t>geom_boxplot</a:t>
-            </a:r>
-            <a:r>
-              <a:rPr>
-                <a:solidFill>
-                  <a:srgbClr val="003B4F"/>
-                </a:solidFill>
-                <a:latin typeface="Courier"/>
-              </a:rPr>
-              <a:t>() </a:t>
-            </a:r>
-            <a:r>
-              <a:rPr>
-                <a:solidFill>
-                  <a:srgbClr val="5E5E5E"/>
-                </a:solidFill>
-                <a:latin typeface="Courier"/>
-              </a:rPr>
-              <a:t>+</a:t>
-            </a:r>
-            <a:br/>
-            <a:r>
-              <a:rPr>
-                <a:solidFill>
-                  <a:srgbClr val="003B4F"/>
-                </a:solidFill>
-                <a:latin typeface="Courier"/>
-              </a:rPr>
-              <a:t>  </a:t>
-            </a:r>
-            <a:r>
-              <a:rPr>
-                <a:solidFill>
-                  <a:srgbClr val="4758AB"/>
-                </a:solidFill>
-                <a:latin typeface="Courier"/>
-              </a:rPr>
-              <a:t>geom_jitter</a:t>
-            </a:r>
-            <a:r>
-              <a:rPr>
-                <a:solidFill>
-                  <a:srgbClr val="003B4F"/>
-                </a:solidFill>
-                <a:latin typeface="Courier"/>
-              </a:rPr>
-              <a:t>(</a:t>
-            </a:r>
-            <a:r>
-              <a:rPr>
-                <a:solidFill>
-                  <a:srgbClr val="657422"/>
-                </a:solidFill>
-                <a:latin typeface="Courier"/>
-              </a:rPr>
-              <a:t>width =</a:t>
-            </a:r>
-            <a:r>
-              <a:rPr>
-                <a:solidFill>
-                  <a:srgbClr val="003B4F"/>
-                </a:solidFill>
-                <a:latin typeface="Courier"/>
-              </a:rPr>
-              <a:t> </a:t>
-            </a:r>
-            <a:r>
-              <a:rPr>
-                <a:solidFill>
-                  <a:srgbClr val="AD0000"/>
-                </a:solidFill>
-                <a:latin typeface="Courier"/>
-              </a:rPr>
-              <a:t>0.15</a:t>
-            </a:r>
-            <a:r>
-              <a:rPr>
-                <a:solidFill>
-                  <a:srgbClr val="003B4F"/>
-                </a:solidFill>
-                <a:latin typeface="Courier"/>
-              </a:rPr>
-              <a:t>, </a:t>
-            </a:r>
-            <a:r>
-              <a:rPr>
-                <a:solidFill>
-                  <a:srgbClr val="657422"/>
-                </a:solidFill>
-                <a:latin typeface="Courier"/>
-              </a:rPr>
-              <a:t>alpha =</a:t>
-            </a:r>
-            <a:r>
-              <a:rPr>
-                <a:solidFill>
-                  <a:srgbClr val="003B4F"/>
-                </a:solidFill>
-                <a:latin typeface="Courier"/>
-              </a:rPr>
-              <a:t> </a:t>
-            </a:r>
-            <a:r>
-              <a:rPr>
-                <a:solidFill>
-                  <a:srgbClr val="AD0000"/>
-                </a:solidFill>
-                <a:latin typeface="Courier"/>
-              </a:rPr>
-              <a:t>0.6</a:t>
-            </a:r>
-            <a:r>
-              <a:rPr>
-                <a:solidFill>
-                  <a:srgbClr val="003B4F"/>
-                </a:solidFill>
-                <a:latin typeface="Courier"/>
-              </a:rPr>
-              <a:t>, </a:t>
-            </a:r>
-            <a:r>
-              <a:rPr>
-                <a:solidFill>
-                  <a:srgbClr val="657422"/>
-                </a:solidFill>
-                <a:latin typeface="Courier"/>
-              </a:rPr>
-              <a:t>color =</a:t>
-            </a:r>
-            <a:r>
-              <a:rPr>
-                <a:solidFill>
-                  <a:srgbClr val="003B4F"/>
-                </a:solidFill>
-                <a:latin typeface="Courier"/>
-              </a:rPr>
-              <a:t> </a:t>
-            </a:r>
-            <a:r>
-              <a:rPr>
-                <a:solidFill>
-                  <a:srgbClr val="20794D"/>
-                </a:solidFill>
-                <a:latin typeface="Courier"/>
-              </a:rPr>
-              <a:t>"tomato"</a:t>
-            </a:r>
-            <a:r>
-              <a:rPr>
-                <a:solidFill>
-                  <a:srgbClr val="003B4F"/>
-                </a:solidFill>
-                <a:latin typeface="Courier"/>
-              </a:rPr>
-              <a:t>) </a:t>
-            </a:r>
-            <a:r>
-              <a:rPr>
-                <a:solidFill>
-                  <a:srgbClr val="5E5E5E"/>
-                </a:solidFill>
-                <a:latin typeface="Courier"/>
-              </a:rPr>
-              <a:t>+</a:t>
-            </a:r>
-            <a:br/>
-            <a:r>
-              <a:rPr>
-                <a:solidFill>
-                  <a:srgbClr val="003B4F"/>
-                </a:solidFill>
-                <a:latin typeface="Courier"/>
-              </a:rPr>
-              <a:t>  </a:t>
-            </a:r>
-            <a:r>
-              <a:rPr>
-                <a:solidFill>
-                  <a:srgbClr val="4758AB"/>
-                </a:solidFill>
-                <a:latin typeface="Courier"/>
-              </a:rPr>
-              <a:t>labs</a:t>
-            </a:r>
-            <a:r>
-              <a:rPr>
-                <a:solidFill>
-                  <a:srgbClr val="003B4F"/>
-                </a:solidFill>
-                <a:latin typeface="Courier"/>
-              </a:rPr>
-              <a:t>(</a:t>
-            </a:r>
-            <a:r>
-              <a:rPr>
-                <a:solidFill>
-                  <a:srgbClr val="657422"/>
-                </a:solidFill>
-                <a:latin typeface="Courier"/>
-              </a:rPr>
-              <a:t>x =</a:t>
-            </a:r>
-            <a:r>
-              <a:rPr>
-                <a:solidFill>
-                  <a:srgbClr val="003B4F"/>
-                </a:solidFill>
-                <a:latin typeface="Courier"/>
-              </a:rPr>
-              <a:t> </a:t>
-            </a:r>
-            <a:r>
-              <a:rPr>
-                <a:solidFill>
-                  <a:srgbClr val="20794D"/>
-                </a:solidFill>
-                <a:latin typeface="Courier"/>
-              </a:rPr>
-              <a:t>"Side of tree"</a:t>
-            </a:r>
-            <a:r>
-              <a:rPr>
-                <a:solidFill>
-                  <a:srgbClr val="003B4F"/>
-                </a:solidFill>
-                <a:latin typeface="Courier"/>
-              </a:rPr>
-              <a:t>,</a:t>
-            </a:r>
-            <a:br/>
-            <a:r>
-              <a:rPr>
-                <a:solidFill>
-                  <a:srgbClr val="003B4F"/>
-                </a:solidFill>
-                <a:latin typeface="Courier"/>
-              </a:rPr>
-              <a:t>       </a:t>
-            </a:r>
-            <a:r>
-              <a:rPr>
-                <a:solidFill>
-                  <a:srgbClr val="657422"/>
-                </a:solidFill>
-                <a:latin typeface="Courier"/>
-              </a:rPr>
-              <a:t>y =</a:t>
-            </a:r>
-            <a:r>
-              <a:rPr>
-                <a:solidFill>
-                  <a:srgbClr val="003B4F"/>
-                </a:solidFill>
-                <a:latin typeface="Courier"/>
-              </a:rPr>
-              <a:t> </a:t>
-            </a:r>
-            <a:r>
-              <a:rPr>
-                <a:solidFill>
-                  <a:srgbClr val="20794D"/>
-                </a:solidFill>
-                <a:latin typeface="Courier"/>
-              </a:rPr>
-              <a:t>"Needle length (mm)"</a:t>
-            </a:r>
-            <a:r>
-              <a:rPr>
-                <a:solidFill>
-                  <a:srgbClr val="003B4F"/>
-                </a:solidFill>
-                <a:latin typeface="Courier"/>
-              </a:rPr>
-              <a:t>,</a:t>
-            </a:r>
-            <a:br/>
-            <a:r>
-              <a:rPr>
-                <a:solidFill>
-                  <a:srgbClr val="003B4F"/>
-                </a:solidFill>
-                <a:latin typeface="Courier"/>
-              </a:rPr>
-              <a:t>       </a:t>
-            </a:r>
-            <a:r>
-              <a:rPr>
-                <a:solidFill>
-                  <a:srgbClr val="657422"/>
-                </a:solidFill>
-                <a:latin typeface="Courier"/>
-              </a:rPr>
-              <a:t>title =</a:t>
-            </a:r>
-            <a:r>
-              <a:rPr>
-                <a:solidFill>
-                  <a:srgbClr val="003B4F"/>
-                </a:solidFill>
-                <a:latin typeface="Courier"/>
-              </a:rPr>
-              <a:t> </a:t>
-            </a:r>
-            <a:r>
-              <a:rPr>
-                <a:solidFill>
-                  <a:srgbClr val="20794D"/>
-                </a:solidFill>
-                <a:latin typeface="Courier"/>
-              </a:rPr>
-              <a:t>"Needle length by wind exposure"</a:t>
-            </a:r>
-            <a:r>
-              <a:rPr>
-                <a:solidFill>
-                  <a:srgbClr val="003B4F"/>
-                </a:solidFill>
-                <a:latin typeface="Courier"/>
-              </a:rPr>
-              <a:t>)</a:t>
-            </a:r>
-          </a:p>
-        </p:txBody>
-      </p:sp>
-      <p:pic>
-        <p:nvPicPr>
-          <p:cNvPr descr="getting_started_lecture_files/figure-pptx/unnamed-chunk-5-1.png" id="0" name="Picture 1"/>
-          <p:cNvPicPr>
-            <a:picLocks noGrp="1" noChangeAspect="1"/>
-          </p:cNvPicPr>
-          <p:nvPr/>
-        </p:nvPicPr>
-        <p:blipFill>
-          <a:blip r:embed="rId2"/>
-          <a:stretch>
-            <a:fillRect/>
-          </a:stretch>
-        </p:blipFill>
-        <p:spPr bwMode="auto">
-          <a:xfrm>
-            <a:off x="127000" y="1562100"/>
-            <a:ext cx="4432300" cy="2730500"/>
-          </a:xfrm>
-          <a:prstGeom prst="rect">
-            <a:avLst/>
-          </a:prstGeom>
-          <a:noFill/>
-          <a:ln w="9525">
-            <a:noFill/>
-            <a:headEnd/>
-            <a:tailEnd/>
-          </a:ln>
-        </p:spPr>
-      </p:pic>
-      <p:sp>
-        <p:nvSpPr>
-          <p:cNvPr id="4" name="Content Placeholder 3"/>
-          <p:cNvSpPr>
-            <a:spLocks noGrp="1"/>
-          </p:cNvSpPr>
-          <p:nvPr>
-            <p:ph idx="2" sz="half"/>
-          </p:nvPr>
-        </p:nvSpPr>
-        <p:spPr/>
-        <p:txBody>
-          <a:bodyPr/>
-          <a:lstStyle/>
-          <a:p>
-            <a:pPr lvl="0" indent="0" marL="1270000">
-              <a:buNone/>
-            </a:pPr>
-            <a:r>
-              <a:rPr sz="2000" b="1"/>
-              <a:t>Tip</a:t>
-            </a:r>
-          </a:p>
-          <a:p>
-            <a:pPr lvl="0" indent="0" marL="1270000">
-              <a:buNone/>
-            </a:pPr>
-            <a:r>
-              <a:rPr sz="2000" b="1"/>
-              <a:t>🖐 Try it yourself</a:t>
-            </a:r>
-          </a:p>
-          <a:p>
-            <a:pPr lvl="0" indent="0" marL="1270000">
-              <a:buNone/>
-            </a:pPr>
-            <a:r>
-              <a:rPr sz="2000"/>
-              <a:t>Swap </a:t>
-            </a:r>
-            <a:r>
-              <a:rPr sz="2000">
-                <a:latin typeface="Courier"/>
-              </a:rPr>
-              <a:t>wind</a:t>
-            </a:r>
-            <a:r>
-              <a:rPr sz="2000"/>
-              <a:t> for </a:t>
-            </a:r>
-            <a:r>
-              <a:rPr sz="2000">
-                <a:latin typeface="Courier"/>
-              </a:rPr>
-              <a:t>group</a:t>
-            </a:r>
-            <a:r>
-              <a:rPr sz="2000"/>
-              <a:t>. What does that plot tell you instead?</a:t>
-            </a:r>
-          </a:p>
-        </p:txBody>
-      </p:sp>
-      <p:sp>
-        <p:nvSpPr>
-          <p:cNvPr id="5" name="Text Placeholder 4"/>
-          <p:cNvSpPr>
-            <a:spLocks noGrp="1"/>
-          </p:cNvSpPr>
-          <p:nvPr>
-            <p:ph idx="3" sz="quarter" type="body"/>
-          </p:nvPr>
-        </p:nvSpPr>
-        <p:spPr/>
-        <p:txBody>
-          <a:bodyPr/>
-          <a:lstStyle/>
-          <a:p>
-            <a:pPr lvl="0" indent="0" marL="1270000">
-              <a:buNone/>
-            </a:pPr>
-            <a:r>
-              <a:rPr sz="2000" b="1"/>
-              <a:t>Note</a:t>
-            </a:r>
-          </a:p>
-          <a:p>
-            <a:pPr lvl="0" indent="0" marL="1270000">
-              <a:buNone/>
-            </a:pPr>
-            <a:r>
-              <a:rPr sz="2000" b="1"/>
-              <a:t>✅ Key idea</a:t>
-            </a:r>
-          </a:p>
-          <a:p>
-            <a:pPr lvl="0" indent="0" marL="1270000">
-              <a:buNone/>
-            </a:pPr>
-            <a:r>
-              <a:rPr sz="2000"/>
-              <a:t>A boxplot shows the summary; the jittered points show every real value underneath it. Show both when you can.</a:t>
-            </a:r>
-          </a:p>
-        </p:txBody>
-      </p:sp>
-    </p:spTree>
-  </p:cSld>
-</p:sld>
-</file>
-
-<file path=ppt/slides/slide33.xml><?xml version="1.0" encoding="utf-8"?>
-<p:sld xmlns:a="http://schemas.openxmlformats.org/drawingml/2006/main" xmlns:r="http://schemas.openxmlformats.org/officeDocument/2006/relationships" xmlns:p="http://schemas.openxmlformats.org/presentationml/2006/main">
-  <p:cSld>
-    <p:spTree>
-      <p:nvGrpSpPr>
-        <p:cNvPr id="1" name=""/>
-        <p:cNvGrpSpPr/>
-        <p:nvPr/>
-      </p:nvGrpSpPr>
-      <p:grpSpPr>
-        <a:xfrm>
-          <a:off x="0" y="0"/>
-          <a:ext cx="0" cy="0"/>
-          <a:chOff x="0" y="0"/>
-          <a:chExt cx="0" cy="0"/>
-        </a:xfrm>
-      </p:grpSpPr>
-      <p:sp>
-        <p:nvSpPr>
-          <p:cNvPr id="3" name="Content Placeholder 2"/>
-          <p:cNvSpPr>
-            <a:spLocks noGrp="1"/>
-          </p:cNvSpPr>
-          <p:nvPr>
-            <p:ph idx="1"/>
-          </p:nvPr>
-        </p:nvSpPr>
-        <p:spPr/>
-        <p:txBody>
-          <a:bodyPr/>
-          <a:lstStyle/>
-          <a:p>
-            <a:pPr lvl="0" indent="0" marL="0">
-              <a:spcBef>
-                <a:spcPts val="3000"/>
-              </a:spcBef>
-              <a:buNone/>
-            </a:pPr>
-            <a:r>
-              <a:rPr b="1"/>
-              <a:t>Save your plot</a:t>
-            </a:r>
-          </a:p>
-        </p:txBody>
-      </p:sp>
-    </p:spTree>
-  </p:cSld>
-</p:sld>
-</file>
-
-<file path=ppt/slides/slide34.xml><?xml version="1.0" encoding="utf-8"?>
-<p:sld xmlns:a="http://schemas.openxmlformats.org/drawingml/2006/main" xmlns:r="http://schemas.openxmlformats.org/officeDocument/2006/relationships" xmlns:p="http://schemas.openxmlformats.org/presentationml/2006/main">
-  <p:cSld>
-    <p:spTree>
-      <p:nvGrpSpPr>
-        <p:cNvPr id="1" name=""/>
-        <p:cNvGrpSpPr/>
-        <p:nvPr/>
-      </p:nvGrpSpPr>
-      <p:grpSpPr>
-        <a:xfrm>
-          <a:off x="0" y="0"/>
-          <a:ext cx="0" cy="0"/>
-          <a:chOff x="0" y="0"/>
-          <a:chExt cx="0" cy="0"/>
-        </a:xfrm>
-      </p:grpSpPr>
-      <p:sp>
-        <p:nvSpPr>
-          <p:cNvPr id="3" name="Content Placeholder 2"/>
-          <p:cNvSpPr>
-            <a:spLocks noGrp="1"/>
-          </p:cNvSpPr>
-          <p:nvPr>
-            <p:ph idx="1" sz="half"/>
-          </p:nvPr>
-        </p:nvSpPr>
-        <p:spPr/>
-        <p:txBody>
-          <a:bodyPr/>
-          <a:lstStyle/>
-          <a:p>
-            <a:pPr lvl="0" indent="0">
-              <a:buNone/>
-            </a:pPr>
-            <a:r>
-              <a:rPr>
-                <a:solidFill>
-                  <a:srgbClr val="003B4F"/>
-                </a:solidFill>
-                <a:latin typeface="Courier"/>
-              </a:rPr>
-              <a:t>needle_plot &lt;- </a:t>
-            </a:r>
-            <a:r>
-              <a:rPr>
-                <a:solidFill>
-                  <a:srgbClr val="4758AB"/>
-                </a:solidFill>
-                <a:latin typeface="Courier"/>
-              </a:rPr>
-              <a:t>ggplot</a:t>
-            </a:r>
-            <a:r>
-              <a:rPr>
-                <a:solidFill>
-                  <a:srgbClr val="003B4F"/>
-                </a:solidFill>
-                <a:latin typeface="Courier"/>
-              </a:rPr>
-              <a:t>(pine_df, </a:t>
-            </a:r>
-            <a:r>
-              <a:rPr>
-                <a:solidFill>
-                  <a:srgbClr val="4758AB"/>
-                </a:solidFill>
-                <a:latin typeface="Courier"/>
-              </a:rPr>
-              <a:t>aes</a:t>
-            </a:r>
-            <a:r>
-              <a:rPr>
-                <a:solidFill>
-                  <a:srgbClr val="003B4F"/>
-                </a:solidFill>
-                <a:latin typeface="Courier"/>
-              </a:rPr>
-              <a:t>(</a:t>
-            </a:r>
-            <a:r>
-              <a:rPr>
-                <a:solidFill>
-                  <a:srgbClr val="657422"/>
-                </a:solidFill>
-                <a:latin typeface="Courier"/>
-              </a:rPr>
-              <a:t>x =</a:t>
-            </a:r>
-            <a:r>
-              <a:rPr>
-                <a:solidFill>
-                  <a:srgbClr val="003B4F"/>
-                </a:solidFill>
-                <a:latin typeface="Courier"/>
-              </a:rPr>
-              <a:t> wind, </a:t>
-            </a:r>
-            <a:r>
-              <a:rPr>
-                <a:solidFill>
-                  <a:srgbClr val="657422"/>
-                </a:solidFill>
-                <a:latin typeface="Courier"/>
-              </a:rPr>
-              <a:t>y =</a:t>
-            </a:r>
-            <a:r>
-              <a:rPr>
-                <a:solidFill>
-                  <a:srgbClr val="003B4F"/>
-                </a:solidFill>
-                <a:latin typeface="Courier"/>
-              </a:rPr>
-              <a:t> length_mm)) </a:t>
-            </a:r>
-            <a:r>
-              <a:rPr>
-                <a:solidFill>
-                  <a:srgbClr val="5E5E5E"/>
-                </a:solidFill>
-                <a:latin typeface="Courier"/>
-              </a:rPr>
-              <a:t>+</a:t>
-            </a:r>
-            <a:br/>
-            <a:r>
-              <a:rPr>
-                <a:solidFill>
-                  <a:srgbClr val="003B4F"/>
-                </a:solidFill>
-                <a:latin typeface="Courier"/>
-              </a:rPr>
-              <a:t>  </a:t>
-            </a:r>
-            <a:r>
-              <a:rPr>
-                <a:solidFill>
-                  <a:srgbClr val="4758AB"/>
-                </a:solidFill>
-                <a:latin typeface="Courier"/>
-              </a:rPr>
-              <a:t>geom_boxplot</a:t>
-            </a:r>
-            <a:r>
-              <a:rPr>
-                <a:solidFill>
-                  <a:srgbClr val="003B4F"/>
-                </a:solidFill>
-                <a:latin typeface="Courier"/>
-              </a:rPr>
-              <a:t>() </a:t>
-            </a:r>
-            <a:r>
-              <a:rPr>
-                <a:solidFill>
-                  <a:srgbClr val="5E5E5E"/>
-                </a:solidFill>
-                <a:latin typeface="Courier"/>
-              </a:rPr>
-              <a:t>+</a:t>
-            </a:r>
-            <a:br/>
-            <a:r>
-              <a:rPr>
-                <a:solidFill>
-                  <a:srgbClr val="003B4F"/>
-                </a:solidFill>
-                <a:latin typeface="Courier"/>
-              </a:rPr>
-              <a:t>  </a:t>
-            </a:r>
-            <a:r>
-              <a:rPr>
-                <a:solidFill>
-                  <a:srgbClr val="4758AB"/>
-                </a:solidFill>
-                <a:latin typeface="Courier"/>
-              </a:rPr>
-              <a:t>geom_jitter</a:t>
-            </a:r>
-            <a:r>
-              <a:rPr>
-                <a:solidFill>
-                  <a:srgbClr val="003B4F"/>
-                </a:solidFill>
-                <a:latin typeface="Courier"/>
-              </a:rPr>
-              <a:t>(</a:t>
-            </a:r>
-            <a:r>
-              <a:rPr>
-                <a:solidFill>
-                  <a:srgbClr val="657422"/>
-                </a:solidFill>
-                <a:latin typeface="Courier"/>
-              </a:rPr>
-              <a:t>width =</a:t>
-            </a:r>
-            <a:r>
-              <a:rPr>
-                <a:solidFill>
-                  <a:srgbClr val="003B4F"/>
-                </a:solidFill>
-                <a:latin typeface="Courier"/>
-              </a:rPr>
-              <a:t> </a:t>
-            </a:r>
-            <a:r>
-              <a:rPr>
-                <a:solidFill>
-                  <a:srgbClr val="AD0000"/>
-                </a:solidFill>
-                <a:latin typeface="Courier"/>
-              </a:rPr>
-              <a:t>0.15</a:t>
-            </a:r>
-            <a:r>
-              <a:rPr>
-                <a:solidFill>
-                  <a:srgbClr val="003B4F"/>
-                </a:solidFill>
-                <a:latin typeface="Courier"/>
-              </a:rPr>
-              <a:t>, </a:t>
-            </a:r>
-            <a:r>
-              <a:rPr>
-                <a:solidFill>
-                  <a:srgbClr val="657422"/>
-                </a:solidFill>
-                <a:latin typeface="Courier"/>
-              </a:rPr>
-              <a:t>alpha =</a:t>
-            </a:r>
-            <a:r>
-              <a:rPr>
-                <a:solidFill>
-                  <a:srgbClr val="003B4F"/>
-                </a:solidFill>
-                <a:latin typeface="Courier"/>
-              </a:rPr>
-              <a:t> </a:t>
-            </a:r>
-            <a:r>
-              <a:rPr>
-                <a:solidFill>
-                  <a:srgbClr val="AD0000"/>
-                </a:solidFill>
-                <a:latin typeface="Courier"/>
-              </a:rPr>
-              <a:t>0.6</a:t>
-            </a:r>
-            <a:r>
-              <a:rPr>
-                <a:solidFill>
-                  <a:srgbClr val="003B4F"/>
-                </a:solidFill>
-                <a:latin typeface="Courier"/>
-              </a:rPr>
-              <a:t>, </a:t>
-            </a:r>
-            <a:r>
-              <a:rPr>
-                <a:solidFill>
-                  <a:srgbClr val="657422"/>
-                </a:solidFill>
-                <a:latin typeface="Courier"/>
-              </a:rPr>
-              <a:t>color =</a:t>
-            </a:r>
-            <a:r>
-              <a:rPr>
-                <a:solidFill>
-                  <a:srgbClr val="003B4F"/>
-                </a:solidFill>
-                <a:latin typeface="Courier"/>
-              </a:rPr>
-              <a:t> </a:t>
-            </a:r>
-            <a:r>
-              <a:rPr>
-                <a:solidFill>
-                  <a:srgbClr val="20794D"/>
-                </a:solidFill>
-                <a:latin typeface="Courier"/>
-              </a:rPr>
-              <a:t>"tomato"</a:t>
-            </a:r>
-            <a:r>
-              <a:rPr>
-                <a:solidFill>
-                  <a:srgbClr val="003B4F"/>
-                </a:solidFill>
-                <a:latin typeface="Courier"/>
-              </a:rPr>
-              <a:t>) </a:t>
-            </a:r>
-            <a:r>
-              <a:rPr>
-                <a:solidFill>
-                  <a:srgbClr val="5E5E5E"/>
-                </a:solidFill>
-                <a:latin typeface="Courier"/>
-              </a:rPr>
-              <a:t>+</a:t>
-            </a:r>
-            <a:br/>
-            <a:r>
-              <a:rPr>
-                <a:solidFill>
-                  <a:srgbClr val="003B4F"/>
-                </a:solidFill>
-                <a:latin typeface="Courier"/>
-              </a:rPr>
-              <a:t>  </a:t>
-            </a:r>
-            <a:r>
-              <a:rPr>
-                <a:solidFill>
-                  <a:srgbClr val="4758AB"/>
-                </a:solidFill>
-                <a:latin typeface="Courier"/>
-              </a:rPr>
-              <a:t>labs</a:t>
-            </a:r>
-            <a:r>
-              <a:rPr>
-                <a:solidFill>
-                  <a:srgbClr val="003B4F"/>
-                </a:solidFill>
-                <a:latin typeface="Courier"/>
-              </a:rPr>
-              <a:t>(</a:t>
-            </a:r>
-            <a:r>
-              <a:rPr>
-                <a:solidFill>
-                  <a:srgbClr val="657422"/>
-                </a:solidFill>
-                <a:latin typeface="Courier"/>
-              </a:rPr>
-              <a:t>x =</a:t>
-            </a:r>
-            <a:r>
-              <a:rPr>
-                <a:solidFill>
-                  <a:srgbClr val="003B4F"/>
-                </a:solidFill>
-                <a:latin typeface="Courier"/>
-              </a:rPr>
-              <a:t> </a:t>
-            </a:r>
-            <a:r>
-              <a:rPr>
-                <a:solidFill>
-                  <a:srgbClr val="20794D"/>
-                </a:solidFill>
-                <a:latin typeface="Courier"/>
-              </a:rPr>
-              <a:t>"Side of tree"</a:t>
-            </a:r>
-            <a:r>
-              <a:rPr>
-                <a:solidFill>
-                  <a:srgbClr val="003B4F"/>
-                </a:solidFill>
-                <a:latin typeface="Courier"/>
-              </a:rPr>
-              <a:t>, </a:t>
-            </a:r>
-            <a:r>
-              <a:rPr>
-                <a:solidFill>
-                  <a:srgbClr val="657422"/>
-                </a:solidFill>
-                <a:latin typeface="Courier"/>
-              </a:rPr>
-              <a:t>y =</a:t>
-            </a:r>
-            <a:r>
-              <a:rPr>
-                <a:solidFill>
-                  <a:srgbClr val="003B4F"/>
-                </a:solidFill>
-                <a:latin typeface="Courier"/>
-              </a:rPr>
-              <a:t> </a:t>
-            </a:r>
-            <a:r>
-              <a:rPr>
-                <a:solidFill>
-                  <a:srgbClr val="20794D"/>
-                </a:solidFill>
-                <a:latin typeface="Courier"/>
-              </a:rPr>
-              <a:t>"Needle length (mm)"</a:t>
-            </a:r>
-            <a:r>
-              <a:rPr>
-                <a:solidFill>
-                  <a:srgbClr val="003B4F"/>
-                </a:solidFill>
-                <a:latin typeface="Courier"/>
-              </a:rPr>
-              <a:t>)</a:t>
-            </a:r>
-            <a:br/>
-            <a:br/>
-            <a:r>
-              <a:rPr>
-                <a:solidFill>
-                  <a:srgbClr val="4758AB"/>
-                </a:solidFill>
-                <a:latin typeface="Courier"/>
-              </a:rPr>
-              <a:t>ggsave</a:t>
-            </a:r>
-            <a:r>
-              <a:rPr>
-                <a:solidFill>
-                  <a:srgbClr val="003B4F"/>
-                </a:solidFill>
-                <a:latin typeface="Courier"/>
-              </a:rPr>
-              <a:t>(</a:t>
-            </a:r>
-            <a:r>
-              <a:rPr>
-                <a:solidFill>
-                  <a:srgbClr val="20794D"/>
-                </a:solidFill>
-                <a:latin typeface="Courier"/>
-              </a:rPr>
-              <a:t>"figures/needle_length.png"</a:t>
-            </a:r>
-            <a:r>
-              <a:rPr>
-                <a:solidFill>
-                  <a:srgbClr val="003B4F"/>
-                </a:solidFill>
-                <a:latin typeface="Courier"/>
-              </a:rPr>
-              <a:t>,</a:t>
-            </a:r>
-            <a:br/>
-            <a:r>
-              <a:rPr>
-                <a:solidFill>
-                  <a:srgbClr val="003B4F"/>
-                </a:solidFill>
-                <a:latin typeface="Courier"/>
-              </a:rPr>
-              <a:t>       </a:t>
-            </a:r>
-            <a:r>
-              <a:rPr>
-                <a:solidFill>
-                  <a:srgbClr val="657422"/>
-                </a:solidFill>
-                <a:latin typeface="Courier"/>
-              </a:rPr>
-              <a:t>plot =</a:t>
-            </a:r>
-            <a:r>
-              <a:rPr>
-                <a:solidFill>
-                  <a:srgbClr val="003B4F"/>
-                </a:solidFill>
-                <a:latin typeface="Courier"/>
-              </a:rPr>
-              <a:t> needle_plot,</a:t>
-            </a:r>
-            <a:br/>
-            <a:r>
-              <a:rPr>
-                <a:solidFill>
-                  <a:srgbClr val="003B4F"/>
-                </a:solidFill>
-                <a:latin typeface="Courier"/>
-              </a:rPr>
-              <a:t>       </a:t>
-            </a:r>
-            <a:r>
-              <a:rPr>
-                <a:solidFill>
-                  <a:srgbClr val="657422"/>
-                </a:solidFill>
-                <a:latin typeface="Courier"/>
-              </a:rPr>
-              <a:t>width =</a:t>
-            </a:r>
-            <a:r>
-              <a:rPr>
-                <a:solidFill>
-                  <a:srgbClr val="003B4F"/>
-                </a:solidFill>
-                <a:latin typeface="Courier"/>
-              </a:rPr>
-              <a:t> </a:t>
-            </a:r>
-            <a:r>
-              <a:rPr>
-                <a:solidFill>
-                  <a:srgbClr val="AD0000"/>
-                </a:solidFill>
-                <a:latin typeface="Courier"/>
-              </a:rPr>
-              <a:t>3</a:t>
-            </a:r>
-            <a:r>
-              <a:rPr>
-                <a:solidFill>
-                  <a:srgbClr val="003B4F"/>
-                </a:solidFill>
-                <a:latin typeface="Courier"/>
-              </a:rPr>
-              <a:t>, </a:t>
-            </a:r>
-            <a:r>
-              <a:rPr>
-                <a:solidFill>
-                  <a:srgbClr val="657422"/>
-                </a:solidFill>
-                <a:latin typeface="Courier"/>
-              </a:rPr>
-              <a:t>height =</a:t>
-            </a:r>
-            <a:r>
-              <a:rPr>
-                <a:solidFill>
-                  <a:srgbClr val="003B4F"/>
-                </a:solidFill>
-                <a:latin typeface="Courier"/>
-              </a:rPr>
-              <a:t> </a:t>
-            </a:r>
-            <a:r>
-              <a:rPr>
-                <a:solidFill>
-                  <a:srgbClr val="AD0000"/>
-                </a:solidFill>
-                <a:latin typeface="Courier"/>
-              </a:rPr>
-              <a:t>3</a:t>
-            </a:r>
-            <a:r>
-              <a:rPr>
-                <a:solidFill>
-                  <a:srgbClr val="003B4F"/>
-                </a:solidFill>
-                <a:latin typeface="Courier"/>
-              </a:rPr>
-              <a:t>, </a:t>
-            </a:r>
-            <a:r>
-              <a:rPr>
-                <a:solidFill>
-                  <a:srgbClr val="657422"/>
-                </a:solidFill>
-                <a:latin typeface="Courier"/>
-              </a:rPr>
-              <a:t>units =</a:t>
-            </a:r>
-            <a:r>
-              <a:rPr>
-                <a:solidFill>
-                  <a:srgbClr val="003B4F"/>
-                </a:solidFill>
-                <a:latin typeface="Courier"/>
-              </a:rPr>
-              <a:t> </a:t>
-            </a:r>
-            <a:r>
-              <a:rPr>
-                <a:solidFill>
-                  <a:srgbClr val="20794D"/>
-                </a:solidFill>
-                <a:latin typeface="Courier"/>
-              </a:rPr>
-              <a:t>"in"</a:t>
-            </a:r>
-            <a:r>
-              <a:rPr>
-                <a:solidFill>
-                  <a:srgbClr val="003B4F"/>
-                </a:solidFill>
-                <a:latin typeface="Courier"/>
-              </a:rPr>
-              <a:t>, </a:t>
-            </a:r>
-            <a:r>
-              <a:rPr>
-                <a:solidFill>
-                  <a:srgbClr val="657422"/>
-                </a:solidFill>
-                <a:latin typeface="Courier"/>
-              </a:rPr>
-              <a:t>dpi =</a:t>
-            </a:r>
-            <a:r>
-              <a:rPr>
-                <a:solidFill>
-                  <a:srgbClr val="003B4F"/>
-                </a:solidFill>
-                <a:latin typeface="Courier"/>
-              </a:rPr>
-              <a:t> </a:t>
-            </a:r>
-            <a:r>
-              <a:rPr>
-                <a:solidFill>
-                  <a:srgbClr val="AD0000"/>
-                </a:solidFill>
-                <a:latin typeface="Courier"/>
-              </a:rPr>
-              <a:t>300</a:t>
-            </a:r>
-            <a:r>
-              <a:rPr>
-                <a:solidFill>
-                  <a:srgbClr val="003B4F"/>
-                </a:solidFill>
-                <a:latin typeface="Courier"/>
-              </a:rPr>
-              <a:t>)</a:t>
-            </a:r>
-          </a:p>
-          <a:p>
-            <a:pPr lvl="0" indent="0" marL="1270000">
-              <a:buNone/>
-            </a:pPr>
-            <a:r>
-              <a:rPr sz="2000" b="1"/>
-              <a:t>Warning</a:t>
-            </a:r>
-          </a:p>
-          <a:p>
-            <a:pPr lvl="0" indent="0" marL="1270000">
-              <a:buNone/>
-            </a:pPr>
-            <a:r>
-              <a:rPr sz="2000" b="1"/>
-              <a:t>⚠️ Watch out!</a:t>
-            </a:r>
-          </a:p>
-          <a:p>
-            <a:pPr lvl="0" indent="0" marL="1270000">
-              <a:buNone/>
-            </a:pPr>
-            <a:r>
-              <a:rPr sz="2000">
-                <a:latin typeface="Courier"/>
-              </a:rPr>
-              <a:t>ggsave()</a:t>
-            </a:r>
-            <a:r>
-              <a:rPr sz="2000"/>
-              <a:t> wants the </a:t>
-            </a:r>
-            <a:r>
-              <a:rPr sz="2000" b="1"/>
-              <a:t>filename first</a:t>
-            </a:r>
-            <a:r>
-              <a:rPr sz="2000"/>
-              <a:t>, then </a:t>
-            </a:r>
-            <a:r>
-              <a:rPr sz="2000">
-                <a:latin typeface="Courier"/>
-              </a:rPr>
-              <a:t>plot =</a:t>
-            </a:r>
-            <a:r>
-              <a:rPr sz="2000"/>
-              <a:t>. Always use </a:t>
-            </a:r>
-            <a:r>
-              <a:rPr sz="2000">
-                <a:latin typeface="Courier"/>
-              </a:rPr>
-              <a:t>dpi = 300</a:t>
-            </a:r>
-            <a:r>
-              <a:rPr sz="2000"/>
-              <a:t> — print/poster quality.</a:t>
-            </a:r>
-          </a:p>
-        </p:txBody>
-      </p:sp>
-      <p:sp>
-        <p:nvSpPr>
-          <p:cNvPr id="4" name="Content Placeholder 3"/>
-          <p:cNvSpPr>
-            <a:spLocks noGrp="1"/>
-          </p:cNvSpPr>
-          <p:nvPr>
-            <p:ph idx="2" sz="half"/>
-          </p:nvPr>
-        </p:nvSpPr>
-        <p:spPr/>
-        <p:txBody>
-          <a:bodyPr/>
-          <a:lstStyle/>
-          <a:p>
-            <a:pPr lvl="0" indent="0" marL="1270000">
-              <a:buNone/>
-            </a:pPr>
-            <a:r>
-              <a:rPr sz="2000" b="1"/>
-              <a:t>Note</a:t>
-            </a:r>
-          </a:p>
-          <a:p>
-            <a:pPr lvl="0" indent="0" marL="1270000">
-              <a:buNone/>
-            </a:pPr>
-            <a:r>
-              <a:rPr sz="2000" b="1"/>
-              <a:t>📖 File format tip</a:t>
-            </a:r>
-          </a:p>
-          <a:p>
-            <a:pPr lvl="0" indent="0" marL="1270000">
-              <a:buNone/>
-            </a:pPr>
-            <a:r>
-              <a:rPr sz="2000"/>
-              <a:t>Save figures as </a:t>
-            </a:r>
-            <a:r>
-              <a:rPr sz="2000" b="1"/>
-              <a:t>PNG</a:t>
-            </a:r>
-            <a:r>
-              <a:rPr sz="2000"/>
-              <a:t> for reports and submissions.</a:t>
-            </a:r>
-          </a:p>
-        </p:txBody>
-      </p:sp>
-    </p:spTree>
-  </p:cSld>
-</p:sld>
-</file>
-
-<file path=ppt/slides/slide35.xml><?xml version="1.0" encoding="utf-8"?>
-<p:sld xmlns:a="http://schemas.openxmlformats.org/drawingml/2006/main" xmlns:r="http://schemas.openxmlformats.org/officeDocument/2006/relationships" xmlns:p="http://schemas.openxmlformats.org/presentationml/2006/main">
-  <p:cSld>
-    <p:spTree>
-      <p:nvGrpSpPr>
-        <p:cNvPr id="1" name=""/>
-        <p:cNvGrpSpPr/>
-        <p:nvPr/>
-      </p:nvGrpSpPr>
-      <p:grpSpPr>
-        <a:xfrm>
-          <a:off x="0" y="0"/>
-          <a:ext cx="0" cy="0"/>
-          <a:chOff x="0" y="0"/>
-          <a:chExt cx="0" cy="0"/>
-        </a:xfrm>
-      </p:grpSpPr>
-      <p:sp>
-        <p:nvSpPr>
-          <p:cNvPr id="2" name="Title 1"/>
-          <p:cNvSpPr>
-            <a:spLocks noGrp="1"/>
-          </p:cNvSpPr>
-          <p:nvPr>
-            <p:ph type="title"/>
-          </p:nvPr>
-        </p:nvSpPr>
-        <p:spPr>
-          <a:xfrm>
-            <a:off x="0" y="0"/>
-            <a:ext cx="9144000" cy="602780"/>
-          </a:xfrm>
-          <a:solidFill>
-            <a:srgbClr val="70121D"/>
-          </a:solidFill>
-        </p:spPr>
-        <p:txBody>
-          <a:bodyPr/>
-          <a:lstStyle/>
-          <a:p>
-            <a:pPr lvl="0" indent="0" marL="0">
-              <a:buNone/>
-            </a:pPr>
-            <a:r>
-              <a:rPr/>
-              <a:t>Wrap-up</a:t>
-            </a:r>
-          </a:p>
-        </p:txBody>
-      </p:sp>
-      <p:sp>
-        <p:nvSpPr>
-          <p:cNvPr id="3" name="Content Placeholder 2"/>
-          <p:cNvSpPr>
-            <a:spLocks noGrp="1"/>
-          </p:cNvSpPr>
-          <p:nvPr>
-            <p:ph idx="1" sz="half"/>
-          </p:nvPr>
-        </p:nvSpPr>
-        <p:spPr/>
-        <p:txBody>
-          <a:bodyPr/>
-          <a:lstStyle/>
-          <a:p>
-            <a:pPr lvl="0" indent="0" marL="0">
-              <a:buNone/>
-            </a:pPr>
-            <a:r>
-              <a:rPr/>
-              <a:t>Today you:</a:t>
-            </a:r>
-          </a:p>
-          <a:p>
-            <a:pPr lvl="0"/>
-            <a:r>
-              <a:rPr/>
-              <a:t>Turned a question into a testable </a:t>
-            </a:r>
-            <a:r>
-              <a:rPr b="1"/>
-              <a:t>H₀ / Hₐ</a:t>
-            </a:r>
-          </a:p>
-          <a:p>
-            <a:pPr lvl="0"/>
-            <a:r>
-              <a:rPr/>
-              <a:t>Organized a project folder with </a:t>
-            </a:r>
-            <a:r>
-              <a:rPr b="1"/>
-              <a:t>data/scripts/figures</a:t>
-            </a:r>
-          </a:p>
-          <a:p>
-            <a:pPr lvl="0"/>
-            <a:r>
-              <a:rPr/>
-              <a:t>Ran your first R code — objects, functions, vectors, packages</a:t>
-            </a:r>
-          </a:p>
-          <a:p>
-            <a:pPr lvl="0"/>
-            <a:r>
-              <a:rPr/>
-              <a:t>Loaded real data and made — and saved — your </a:t>
-            </a:r>
-            <a:r>
-              <a:rPr b="1"/>
-              <a:t>first </a:t>
-            </a:r>
-            <a:r>
-              <a:rPr b="1">
-                <a:latin typeface="Courier"/>
-              </a:rPr>
-              <a:t>ggplot</a:t>
-            </a:r>
-          </a:p>
-          <a:p>
-            <a:pPr lvl="0" indent="0" marL="1270000">
-              <a:buNone/>
-            </a:pPr>
-            <a:r>
-              <a:rPr sz="2000" b="1"/>
-              <a:t>Tip</a:t>
-            </a:r>
-          </a:p>
-          <a:p>
-            <a:pPr lvl="0" indent="0" marL="1270000">
-              <a:buNone/>
-            </a:pPr>
-            <a:r>
-              <a:rPr sz="2000" b="1"/>
-              <a:t>🖐 Before next class</a:t>
-            </a:r>
-          </a:p>
-          <a:p>
-            <a:pPr lvl="0" indent="0" marL="1270000">
-              <a:buNone/>
-            </a:pPr>
-            <a:r>
-              <a:rPr sz="2000"/>
-              <a:t>Finish the worksheet: load </a:t>
-            </a:r>
-            <a:r>
-              <a:rPr sz="2000">
-                <a:latin typeface="Courier"/>
-              </a:rPr>
-              <a:t>pine_needles.csv</a:t>
-            </a:r>
-            <a:r>
-              <a:rPr sz="2000"/>
-              <a:t>, run </a:t>
-            </a:r>
-            <a:r>
-              <a:rPr sz="2000">
-                <a:latin typeface="Courier"/>
-              </a:rPr>
-              <a:t>glimpse()</a:t>
-            </a:r>
-            <a:r>
-              <a:rPr sz="2000"/>
-              <a:t>, and make one more plot — </a:t>
-            </a:r>
-            <a:r>
-              <a:rPr sz="2000">
-                <a:latin typeface="Courier"/>
-              </a:rPr>
-              <a:t>length_mm</a:t>
-            </a:r>
-            <a:r>
-              <a:rPr sz="2000"/>
-              <a:t> by </a:t>
-            </a:r>
-            <a:r>
-              <a:rPr sz="2000">
-                <a:latin typeface="Courier"/>
-              </a:rPr>
-              <a:t>n_s</a:t>
-            </a:r>
-            <a:r>
-              <a:rPr sz="2000"/>
-              <a:t> this time. Save it to </a:t>
-            </a:r>
-            <a:r>
-              <a:rPr sz="2000">
-                <a:latin typeface="Courier"/>
-              </a:rPr>
-              <a:t>figures/</a:t>
-            </a:r>
-            <a:r>
-              <a:rPr sz="2000"/>
-              <a:t>.</a:t>
-            </a:r>
-          </a:p>
-        </p:txBody>
-      </p:sp>
-      <p:sp>
-        <p:nvSpPr>
-          <p:cNvPr id="4" name="Content Placeholder 3"/>
-          <p:cNvSpPr>
-            <a:spLocks noGrp="1"/>
-          </p:cNvSpPr>
-          <p:nvPr>
-            <p:ph idx="2" sz="half"/>
-          </p:nvPr>
-        </p:nvSpPr>
-        <p:spPr/>
-        <p:txBody>
-          <a:bodyPr/>
-          <a:lstStyle/>
-          <a:p>
-            <a:pPr lvl="0" indent="0" marL="1270000">
-              <a:buNone/>
-            </a:pPr>
-            <a:r>
-              <a:rPr sz="2000" b="1"/>
-              <a:t>Note</a:t>
-            </a:r>
-          </a:p>
-          <a:p>
-            <a:pPr lvl="0" indent="0" marL="1270000">
-              <a:buNone/>
-            </a:pPr>
-            <a:r>
-              <a:rPr sz="2000" b="1"/>
-              <a:t>Up next — Module 2</a:t>
-            </a:r>
-          </a:p>
-          <a:p>
-            <a:pPr lvl="0"/>
-            <a:r>
-              <a:rPr sz="2000">
-                <a:latin typeface="Courier"/>
-              </a:rPr>
-              <a:t>filter()</a:t>
-            </a:r>
-            <a:r>
-              <a:rPr sz="2000"/>
-              <a:t>, </a:t>
-            </a:r>
-            <a:r>
-              <a:rPr sz="2000">
-                <a:latin typeface="Courier"/>
-              </a:rPr>
-              <a:t>select()</a:t>
-            </a:r>
-            <a:r>
-              <a:rPr sz="2000"/>
-              <a:t>, </a:t>
-            </a:r>
-            <a:r>
-              <a:rPr sz="2000">
-                <a:latin typeface="Courier"/>
-              </a:rPr>
-              <a:t>mutate()</a:t>
-            </a:r>
-            <a:r>
-              <a:rPr sz="2000"/>
-              <a:t>, </a:t>
-            </a:r>
-            <a:r>
-              <a:rPr sz="2000">
-                <a:latin typeface="Courier"/>
-              </a:rPr>
-              <a:t>arrange()</a:t>
-            </a:r>
-          </a:p>
-          <a:p>
-            <a:pPr lvl="0"/>
-            <a:r>
-              <a:rPr sz="2000"/>
-              <a:t>Cleaning a genuinely messy version of this dataset</a:t>
-            </a:r>
-          </a:p>
-          <a:p>
-            <a:pPr lvl="0"/>
-            <a:r>
-              <a:rPr sz="2000"/>
-              <a:t>The pipe </a:t>
-            </a:r>
-            <a:r>
-              <a:rPr sz="2000">
-                <a:latin typeface="Courier"/>
-              </a:rPr>
-              <a:t>|&gt;</a:t>
-            </a:r>
-            <a:r>
-              <a:rPr sz="2000"/>
-              <a:t> and building a pipeline</a:t>
-            </a:r>
-          </a:p>
-        </p:txBody>
-      </p:sp>
-    </p:spTree>
-  </p:cSld>
-</p:sld>
-</file>
-
-<file path=ppt/slides/slide36.xml><?xml version="1.0" encoding="utf-8"?>
-<p:sld xmlns:a="http://schemas.openxmlformats.org/drawingml/2006/main" xmlns:r="http://schemas.openxmlformats.org/officeDocument/2006/relationships" xmlns:p="http://schemas.openxmlformats.org/presentationml/2006/main">
-  <p:cSld>
-    <p:spTree>
-      <p:nvGrpSpPr>
-        <p:cNvPr id="1" name=""/>
-        <p:cNvGrpSpPr/>
-        <p:nvPr/>
-      </p:nvGrpSpPr>
-      <p:grpSpPr>
-        <a:xfrm>
-          <a:off x="0" y="0"/>
-          <a:ext cx="0" cy="0"/>
-          <a:chOff x="0" y="0"/>
-          <a:chExt cx="0" cy="0"/>
-        </a:xfrm>
-      </p:grpSpPr>
-      <p:sp>
-        <p:nvSpPr>
-          <p:cNvPr id="2" name="Title 1"/>
-          <p:cNvSpPr>
-            <a:spLocks noGrp="1"/>
-          </p:cNvSpPr>
-          <p:nvPr>
-            <p:ph type="title"/>
-          </p:nvPr>
-        </p:nvSpPr>
-        <p:spPr>
-          <a:xfrm>
-            <a:off x="0" y="0"/>
-            <a:ext cx="9144000" cy="582780"/>
-          </a:xfrm>
-        </p:spPr>
-        <p:txBody>
-          <a:bodyPr/>
-          <a:lstStyle/>
-          <a:p>
-            <a:pPr lvl="0" indent="0" marL="0">
-              <a:buNone/>
-            </a:pPr>
-            <a:r>
-              <a:rPr/>
-              <a:t>Getting unstuck</a:t>
-            </a:r>
-          </a:p>
-        </p:txBody>
-      </p:sp>
-      <p:sp>
-        <p:nvSpPr>
-          <p:cNvPr id="3" name="Content Placeholder 2"/>
-          <p:cNvSpPr>
-            <a:spLocks noGrp="1"/>
-          </p:cNvSpPr>
-          <p:nvPr>
-            <p:ph idx="1"/>
-          </p:nvPr>
-        </p:nvSpPr>
-        <p:spPr/>
-        <p:txBody>
-          <a:bodyPr/>
-          <a:lstStyle/>
-          <a:p>
-            <a:pPr lvl="0" indent="0" marL="0">
-              <a:buNone/>
-            </a:pPr>
-            <a:r>
-              <a:rPr/>
-              <a:t>When code breaks — and it will, that is normal:</a:t>
-            </a:r>
-          </a:p>
-          <a:p>
-            <a:pPr lvl="0" indent="-342900" marL="342900">
-              <a:buAutoNum type="arabicPeriod"/>
-            </a:pPr>
-            <a:r>
-              <a:rPr/>
-              <a:t>Read the </a:t>
-            </a:r>
-            <a:r>
-              <a:rPr b="1"/>
-              <a:t>error message</a:t>
-            </a:r>
-            <a:r>
-              <a:rPr/>
-              <a:t> out loud; it usually names the line</a:t>
-            </a:r>
-          </a:p>
-          <a:p>
-            <a:pPr lvl="0" indent="-342900" marL="342900">
-              <a:buAutoNum type="arabicPeriod"/>
-            </a:pPr>
-            <a:r>
-              <a:rPr/>
-              <a:t>Check the usual suspects: </a:t>
-            </a:r>
-            <a:r>
-              <a:rPr>
-                <a:latin typeface="Courier"/>
-              </a:rPr>
-              <a:t>library(tidyverse)</a:t>
-            </a:r>
-            <a:r>
-              <a:rPr/>
-              <a:t> loaded? Spelling? A missing </a:t>
-            </a:r>
-            <a:r>
-              <a:rPr>
-                <a:latin typeface="Courier"/>
-              </a:rPr>
-              <a:t>)</a:t>
-            </a:r>
-            <a:r>
-              <a:rPr/>
-              <a:t> or </a:t>
-            </a:r>
-            <a:r>
-              <a:rPr>
-                <a:latin typeface="Courier"/>
-              </a:rPr>
-              <a:t>+</a:t>
-            </a:r>
-            <a:r>
-              <a:rPr/>
-              <a:t> at the </a:t>
-            </a:r>
-            <a:r>
-              <a:rPr i="1"/>
-              <a:t>start</a:t>
-            </a:r>
-            <a:r>
-              <a:rPr/>
-              <a:t> of a line?</a:t>
-            </a:r>
-          </a:p>
-          <a:p>
-            <a:pPr lvl="0" indent="-342900" marL="342900">
-              <a:buAutoNum type="arabicPeriod"/>
-            </a:pPr>
-            <a:r>
-              <a:rPr>
-                <a:latin typeface="Courier"/>
-              </a:rPr>
-              <a:t>?function_name</a:t>
-            </a:r>
-            <a:r>
-              <a:rPr/>
-              <a:t> opens the help page</a:t>
-            </a:r>
-          </a:p>
-          <a:p>
-            <a:pPr lvl="0" indent="-342900" marL="342900">
-              <a:buAutoNum type="arabicPeriod"/>
-            </a:pPr>
-            <a:r>
-              <a:rPr/>
-              <a:t>Bring the </a:t>
-            </a:r>
-            <a:r>
-              <a:rPr b="1"/>
-              <a:t>exact error</a:t>
-            </a:r>
-            <a:r>
-              <a:rPr/>
-              <a:t> (copy-paste it) to class or office hours</a:t>
-            </a:r>
-          </a:p>
-          <a:p>
-            <a:pPr lvl="0" indent="0" marL="1270000">
-              <a:buNone/>
-            </a:pPr>
-            <a:r>
-              <a:rPr sz="2000" b="1"/>
-              <a:t>Note</a:t>
-            </a:r>
-          </a:p>
-          <a:p>
-            <a:pPr lvl="0" indent="0" marL="1270000">
-              <a:buNone/>
-            </a:pPr>
-            <a:r>
-              <a:rPr sz="2000" b="1"/>
-              <a:t>✅ Key idea</a:t>
-            </a:r>
-          </a:p>
-          <a:p>
-            <a:pPr lvl="0" indent="0" marL="1270000">
-              <a:buNone/>
-            </a:pPr>
-            <a:r>
-              <a:rPr sz="2000"/>
-              <a:t>Every working scientist googles error messages daily. Getting stuck is not failing — it is the job.</a:t>
-            </a:r>
-          </a:p>
-        </p:txBody>
-      </p:sp>
     </p:spTree>
   </p:cSld>
 </p:sld>
@@ -9394,6 +9157,39 @@
       </p:grpSpPr>
       <p:sp>
         <p:nvSpPr>
+          <p:cNvPr id="2" name="Title 1"/>
+          <p:cNvSpPr>
+            <a:spLocks noGrp="1"/>
+          </p:cNvSpPr>
+          <p:nvPr>
+            <p:ph type="title"/>
+          </p:nvPr>
+        </p:nvSpPr>
+        <p:spPr>
+          <a:xfrm>
+            <a:off x="0" y="0"/>
+            <a:ext cx="9144000" cy="602780"/>
+          </a:xfrm>
+          <a:solidFill>
+            <a:srgbClr val="70121D"/>
+          </a:solidFill>
+        </p:spPr>
+        <p:txBody>
+          <a:bodyPr/>
+          <a:lstStyle/>
+          <a:p>
+            <a:pPr lvl="0" indent="0" marL="0">
+              <a:buNone/>
+            </a:pPr>
+            <a:r>
+              <a:rPr/>
+              <a:t>What makes something science?</a:t>
+            </a:r>
+          </a:p>
+        </p:txBody>
+      </p:sp>
+      <p:sp>
+        <p:nvSpPr>
           <p:cNvPr id="3" name="Content Placeholder 2"/>
           <p:cNvSpPr>
             <a:spLocks noGrp="1"/>
@@ -9540,54 +9336,34 @@
       </p:grpSpPr>
       <p:sp>
         <p:nvSpPr>
-          <p:cNvPr id="3" name="Content Placeholder 2"/>
-          <p:cNvSpPr>
-            <a:spLocks noGrp="1"/>
-          </p:cNvSpPr>
-          <p:nvPr>
-            <p:ph idx="1"/>
-          </p:nvPr>
-        </p:nvSpPr>
-        <p:spPr/>
+          <p:cNvPr id="2" name="Title 1"/>
+          <p:cNvSpPr>
+            <a:spLocks noGrp="1"/>
+          </p:cNvSpPr>
+          <p:nvPr>
+            <p:ph type="title"/>
+          </p:nvPr>
+        </p:nvSpPr>
+        <p:spPr>
+          <a:xfrm>
+            <a:off x="139485" y="78119"/>
+            <a:ext cx="8229600" cy="607682"/>
+          </a:xfrm>
+        </p:spPr>
         <p:txBody>
           <a:bodyPr/>
           <a:lstStyle/>
           <a:p>
             <a:pPr lvl="0" indent="0" marL="0">
-              <a:spcBef>
-                <a:spcPts val="3000"/>
-              </a:spcBef>
-              <a:buNone/>
-            </a:pPr>
-            <a:r>
-              <a:rPr b="1"/>
+              <a:buNone/>
+            </a:pPr>
+            <a:r>
+              <a:rPr/>
               <a:t>Two ways of reasoning toward that question</a:t>
             </a:r>
           </a:p>
         </p:txBody>
       </p:sp>
-    </p:spTree>
-  </p:cSld>
-</p:sld>
-</file>
-
-<file path=ppt/slides/slide6.xml><?xml version="1.0" encoding="utf-8"?>
-<p:sld xmlns:a="http://schemas.openxmlformats.org/drawingml/2006/main" xmlns:r="http://schemas.openxmlformats.org/officeDocument/2006/relationships" xmlns:p="http://schemas.openxmlformats.org/presentationml/2006/main">
-  <p:cSld>
-    <p:spTree>
-      <p:nvGrpSpPr>
-        <p:cNvPr id="1" name=""/>
-        <p:cNvGrpSpPr/>
-        <p:nvPr/>
-      </p:nvGrpSpPr>
-      <p:grpSpPr>
-        <a:xfrm>
-          <a:off x="0" y="0"/>
-          <a:ext cx="0" cy="0"/>
-          <a:chOff x="0" y="0"/>
-          <a:chExt cx="0" cy="0"/>
-        </a:xfrm>
-      </p:grpSpPr>
       <p:sp>
         <p:nvSpPr>
           <p:cNvPr id="3" name="Text Placeholder 2"/>
@@ -9809,7 +9585,7 @@
 </p:sld>
 </file>
 
-<file path=ppt/slides/slide7.xml><?xml version="1.0" encoding="utf-8"?>
+<file path=ppt/slides/slide6.xml><?xml version="1.0" encoding="utf-8"?>
 <p:sld xmlns:a="http://schemas.openxmlformats.org/drawingml/2006/main" xmlns:r="http://schemas.openxmlformats.org/officeDocument/2006/relationships" xmlns:p="http://schemas.openxmlformats.org/presentationml/2006/main">
   <p:cSld>
     <p:spTree>
@@ -9869,7 +9645,7 @@
 </p:sld>
 </file>
 
-<file path=ppt/slides/slide8.xml><?xml version="1.0" encoding="utf-8"?>
+<file path=ppt/slides/slide7.xml><?xml version="1.0" encoding="utf-8"?>
 <p:sld xmlns:a="http://schemas.openxmlformats.org/drawingml/2006/main" xmlns:r="http://schemas.openxmlformats.org/officeDocument/2006/relationships" xmlns:p="http://schemas.openxmlformats.org/presentationml/2006/main">
   <p:cSld>
     <p:spTree>
@@ -10088,6 +9864,225 @@
 </p:sld>
 </file>
 
+<file path=ppt/slides/slide8.xml><?xml version="1.0" encoding="utf-8"?>
+<p:sld xmlns:a="http://schemas.openxmlformats.org/drawingml/2006/main" xmlns:r="http://schemas.openxmlformats.org/officeDocument/2006/relationships" xmlns:p="http://schemas.openxmlformats.org/presentationml/2006/main">
+  <p:cSld>
+    <p:spTree>
+      <p:nvGrpSpPr>
+        <p:cNvPr id="1" name=""/>
+        <p:cNvGrpSpPr/>
+        <p:nvPr/>
+      </p:nvGrpSpPr>
+      <p:grpSpPr>
+        <a:xfrm>
+          <a:off x="0" y="0"/>
+          <a:ext cx="0" cy="0"/>
+          <a:chOff x="0" y="0"/>
+          <a:chExt cx="0" cy="0"/>
+        </a:xfrm>
+      </p:grpSpPr>
+      <p:sp>
+        <p:nvSpPr>
+          <p:cNvPr id="2" name="Title 1"/>
+          <p:cNvSpPr>
+            <a:spLocks noGrp="1"/>
+          </p:cNvSpPr>
+          <p:nvPr>
+            <p:ph type="title"/>
+          </p:nvPr>
+        </p:nvSpPr>
+        <p:spPr>
+          <a:xfrm>
+            <a:off x="0" y="0"/>
+            <a:ext cx="9144000" cy="602780"/>
+          </a:xfrm>
+          <a:solidFill>
+            <a:srgbClr val="70121D"/>
+          </a:solidFill>
+        </p:spPr>
+        <p:txBody>
+          <a:bodyPr/>
+          <a:lstStyle/>
+          <a:p>
+            <a:pPr lvl="0" indent="0" marL="0">
+              <a:buNone/>
+            </a:pPr>
+            <a:r>
+              <a:rPr/>
+              <a:t>Designing a defensible sample</a:t>
+            </a:r>
+          </a:p>
+        </p:txBody>
+      </p:sp>
+      <p:sp>
+        <p:nvSpPr>
+          <p:cNvPr id="3" name="Content Placeholder 2"/>
+          <p:cNvSpPr>
+            <a:spLocks noGrp="1"/>
+          </p:cNvSpPr>
+          <p:nvPr>
+            <p:ph idx="1" sz="half"/>
+          </p:nvPr>
+        </p:nvSpPr>
+        <p:spPr/>
+        <p:txBody>
+          <a:bodyPr/>
+          <a:lstStyle/>
+          <a:p>
+            <a:pPr lvl="0"/>
+            <a:r>
+              <a:rPr b="1"/>
+              <a:t>Can we test this with needles from one tree?</a:t>
+            </a:r>
+            <a:r>
+              <a:rPr/>
+              <a:t> No — that tree could just happen to have short needles. Treating many needles from </a:t>
+            </a:r>
+            <a:r>
+              <a:rPr i="1"/>
+              <a:t>one</a:t>
+            </a:r>
+            <a:r>
+              <a:rPr/>
+              <a:t> tree as if they were independent replicates is called </a:t>
+            </a:r>
+            <a:r>
+              <a:rPr b="1"/>
+              <a:t>pseudoreplication</a:t>
+            </a:r>
+            <a:r>
+              <a:rPr/>
+              <a:t> (Hurlbert 1984).</a:t>
+            </a:r>
+          </a:p>
+          <a:p>
+            <a:pPr lvl="0"/>
+            <a:r>
+              <a:rPr b="1"/>
+              <a:t>The tree — not the needle — is the unit of replication.</a:t>
+            </a:r>
+            <a:r>
+              <a:rPr/>
+              <a:t> We need needles from </a:t>
+            </a:r>
+            <a:r>
+              <a:rPr i="1"/>
+              <a:t>many</a:t>
+            </a:r>
+            <a:r>
+              <a:rPr/>
+              <a:t> trees, sampled the same way each time.</a:t>
+            </a:r>
+          </a:p>
+          <a:p>
+            <a:pPr lvl="0"/>
+            <a:r>
+              <a:rPr b="1"/>
+              <a:t>Randomize</a:t>
+            </a:r>
+            <a:r>
+              <a:rPr/>
+              <a:t> which trees and branches you sample, so your own bias doesn’t sneak into the data.</a:t>
+            </a:r>
+          </a:p>
+          <a:p>
+            <a:pPr lvl="0" indent="0" marL="1270000">
+              <a:buNone/>
+            </a:pPr>
+            <a:r>
+              <a:rPr sz="2000" b="1"/>
+              <a:t>Important</a:t>
+            </a:r>
+          </a:p>
+          <a:p>
+            <a:pPr lvl="0" indent="0" marL="1270000">
+              <a:buNone/>
+            </a:pPr>
+            <a:r>
+              <a:rPr sz="2000" b="1"/>
+              <a:t>Dependent vs. independent variable</a:t>
+            </a:r>
+          </a:p>
+          <a:p>
+            <a:pPr lvl="0"/>
+            <a:r>
+              <a:rPr sz="2000" b="1"/>
+              <a:t>Independent (X):</a:t>
+            </a:r>
+            <a:r>
+              <a:rPr sz="2000"/>
+              <a:t> side of tree — what we group by</a:t>
+            </a:r>
+          </a:p>
+          <a:p>
+            <a:pPr lvl="0"/>
+            <a:r>
+              <a:rPr sz="2000" b="1"/>
+              <a:t>Dependent (Y):</a:t>
+            </a:r>
+            <a:r>
+              <a:rPr sz="2000"/>
+              <a:t> needle length — what we measure</a:t>
+            </a:r>
+          </a:p>
+        </p:txBody>
+      </p:sp>
+      <p:sp>
+        <p:nvSpPr>
+          <p:cNvPr id="4" name="Content Placeholder 3"/>
+          <p:cNvSpPr>
+            <a:spLocks noGrp="1"/>
+          </p:cNvSpPr>
+          <p:nvPr>
+            <p:ph idx="2" sz="half"/>
+          </p:nvPr>
+        </p:nvSpPr>
+        <p:spPr/>
+        <p:txBody>
+          <a:bodyPr/>
+          <a:lstStyle/>
+          <a:p>
+            <a:pPr lvl="0" indent="0" marL="1270000">
+              <a:buNone/>
+            </a:pPr>
+            <a:r>
+              <a:rPr sz="2000" b="1"/>
+              <a:t>Tip</a:t>
+            </a:r>
+          </a:p>
+          <a:p>
+            <a:pPr lvl="0" indent="0" marL="1270000">
+              <a:buNone/>
+            </a:pPr>
+            <a:r>
+              <a:rPr sz="2000" b="1"/>
+              <a:t>🖐 Today in the field</a:t>
+            </a:r>
+          </a:p>
+          <a:p>
+            <a:pPr lvl="0" indent="0" marL="1270000">
+              <a:buNone/>
+            </a:pPr>
+            <a:r>
+              <a:rPr sz="2000"/>
+              <a:t>Each group collects needles from the lee side </a:t>
+            </a:r>
+            <a:r>
+              <a:rPr sz="2000" b="1"/>
+              <a:t>and</a:t>
+            </a:r>
+            <a:r>
+              <a:rPr sz="2000"/>
+              <a:t> the windward side of the same trees, using one agreed-on method — same height, same “mature needle” definition, same spot on the branch.</a:t>
+            </a:r>
+          </a:p>
+        </p:txBody>
+      </p:sp>
+    </p:spTree>
+  </p:cSld>
+</p:sld>
+</file>
+
 <file path=ppt/slides/slide9.xml><?xml version="1.0" encoding="utf-8"?>
 <p:sld xmlns:a="http://schemas.openxmlformats.org/drawingml/2006/main" xmlns:r="http://schemas.openxmlformats.org/officeDocument/2006/relationships" xmlns:p="http://schemas.openxmlformats.org/presentationml/2006/main">
   <p:cSld>
@@ -10118,11 +10113,8 @@
         <p:spPr>
           <a:xfrm>
             <a:off x="0" y="0"/>
-            <a:ext cx="9144000" cy="602780"/>
+            <a:ext cx="9144000" cy="582780"/>
           </a:xfrm>
-          <a:solidFill>
-            <a:srgbClr val="70121D"/>
-          </a:solidFill>
         </p:spPr>
         <p:txBody>
           <a:bodyPr/>
@@ -10133,171 +10125,7 @@
             </a:pPr>
             <a:r>
               <a:rPr/>
-              <a:t>Designing a defensible sample</a:t>
-            </a:r>
-          </a:p>
-        </p:txBody>
-      </p:sp>
-      <p:sp>
-        <p:nvSpPr>
-          <p:cNvPr id="3" name="Content Placeholder 2"/>
-          <p:cNvSpPr>
-            <a:spLocks noGrp="1"/>
-          </p:cNvSpPr>
-          <p:nvPr>
-            <p:ph idx="1" sz="half"/>
-          </p:nvPr>
-        </p:nvSpPr>
-        <p:spPr/>
-        <p:txBody>
-          <a:bodyPr/>
-          <a:lstStyle/>
-          <a:p>
-            <a:pPr lvl="0"/>
-            <a:r>
-              <a:rPr b="1"/>
-              <a:t>Can we test this with needles from one tree?</a:t>
-            </a:r>
-            <a:r>
-              <a:rPr/>
-              <a:t> No — that tree could just happen to have short needles. Treating many needles from </a:t>
-            </a:r>
-            <a:r>
-              <a:rPr i="1"/>
-              <a:t>one</a:t>
-            </a:r>
-            <a:r>
-              <a:rPr/>
-              <a:t> tree as if they were independent replicates is called </a:t>
-            </a:r>
-            <a:r>
-              <a:rPr b="1"/>
-              <a:t>pseudoreplication</a:t>
-            </a:r>
-            <a:r>
-              <a:rPr/>
-              <a:t> (Hurlbert 1984).</a:t>
-            </a:r>
-          </a:p>
-          <a:p>
-            <a:pPr lvl="0"/>
-            <a:r>
-              <a:rPr b="1"/>
-              <a:t>The tree — not the needle — is the unit of replication.</a:t>
-            </a:r>
-            <a:r>
-              <a:rPr/>
-              <a:t> We need needles from </a:t>
-            </a:r>
-            <a:r>
-              <a:rPr i="1"/>
-              <a:t>many</a:t>
-            </a:r>
-            <a:r>
-              <a:rPr/>
-              <a:t> trees, sampled the same way each time.</a:t>
-            </a:r>
-          </a:p>
-          <a:p>
-            <a:pPr lvl="0"/>
-            <a:r>
-              <a:rPr b="1"/>
-              <a:t>Randomize</a:t>
-            </a:r>
-            <a:r>
-              <a:rPr/>
-              <a:t> which trees and branches you sample, so your own bias doesn’t sneak into the data.</a:t>
-            </a:r>
-          </a:p>
-          <a:p>
-            <a:pPr lvl="0" indent="0" marL="1270000">
-              <a:buNone/>
-            </a:pPr>
-            <a:r>
-              <a:rPr sz="2000" b="1"/>
-              <a:t>Important</a:t>
-            </a:r>
-          </a:p>
-          <a:p>
-            <a:pPr lvl="0" indent="0" marL="1270000">
-              <a:buNone/>
-            </a:pPr>
-            <a:r>
-              <a:rPr sz="2000" b="1"/>
-              <a:t>Dependent vs. independent variable</a:t>
-            </a:r>
-          </a:p>
-          <a:p>
-            <a:pPr lvl="0"/>
-            <a:r>
-              <a:rPr sz="2000" b="1"/>
-              <a:t>Independent (X):</a:t>
-            </a:r>
-            <a:r>
-              <a:rPr sz="2000"/>
-              <a:t> side of tree — what we group by</a:t>
-            </a:r>
-          </a:p>
-          <a:p>
-            <a:pPr lvl="0"/>
-            <a:r>
-              <a:rPr sz="2000" b="1"/>
-              <a:t>Dependent (Y):</a:t>
-            </a:r>
-            <a:r>
-              <a:rPr sz="2000"/>
-              <a:t> needle length — what we measure</a:t>
-            </a:r>
-          </a:p>
-        </p:txBody>
-      </p:sp>
-      <p:sp>
-        <p:nvSpPr>
-          <p:cNvPr id="4" name="Content Placeholder 3"/>
-          <p:cNvSpPr>
-            <a:spLocks noGrp="1"/>
-          </p:cNvSpPr>
-          <p:nvPr>
-            <p:ph idx="2" sz="half"/>
-          </p:nvPr>
-        </p:nvSpPr>
-        <p:spPr/>
-        <p:txBody>
-          <a:bodyPr/>
-          <a:lstStyle/>
-          <a:p>
-            <a:pPr lvl="0" indent="0" marL="1270000">
-              <a:buNone/>
-            </a:pPr>
-            <a:r>
-              <a:rPr sz="2000" b="1"/>
-              <a:t>Tip</a:t>
-            </a:r>
-          </a:p>
-          <a:p>
-            <a:pPr lvl="0" indent="0" marL="1270000">
-              <a:buNone/>
-            </a:pPr>
-            <a:r>
-              <a:rPr sz="2000" b="1"/>
-              <a:t>🖐 Today in the field</a:t>
-            </a:r>
-          </a:p>
-          <a:p>
-            <a:pPr lvl="0" indent="0" marL="1270000">
-              <a:buNone/>
-            </a:pPr>
-            <a:r>
-              <a:rPr sz="2000"/>
-              <a:t>Each group collects needles from the lee side </a:t>
-            </a:r>
-            <a:r>
-              <a:rPr sz="2000" b="1"/>
-              <a:t>and</a:t>
-            </a:r>
-            <a:r>
-              <a:rPr sz="2000"/>
-              <a:t> the windward side of the same trees, using one agreed-on method — same height, same “mature needle” definition, same spot on the branch.</a:t>
+              <a:t>Part 2 · Organizing Your Project</a:t>
             </a:r>
           </a:p>
         </p:txBody>

--- a/docs/content/getting_started/getting_started_lecture.pptx
+++ b/docs/content/getting_started/getting_started_lecture.pptx
@@ -3318,7 +3318,7 @@
             </a:pPr>
             <a:r>
               <a:rPr/>
-              <a:t>Getting Started</a:t>
+              <a:t>Lecture: Getting Started</a:t>
             </a:r>
           </a:p>
         </p:txBody>
@@ -3505,7 +3505,7 @@
             </a:pPr>
             <a:r>
               <a:rPr sz="2000"/>
-              <a:t>A few minutes of naming discipline today saves hours of confusion in Module 2, when we clean messy data.</a:t>
+              <a:t>A few minutes of naming discipline today saves hours of confusion in Wrangling Your Data, when we clean messy data.</a:t>
             </a:r>
           </a:p>
         </p:txBody>
@@ -3815,7 +3815,7 @@
             </a:pPr>
             <a:r>
               <a:rPr sz="2000"/>
-              <a:t>Tidy data — one row per observation, one column per variable — is the target we’re organizing toward. We’ll formalize this in Module 2.</a:t>
+              <a:t>Tidy data — one row per observation, one column per variable — is the target we’re organizing toward. We’ll formalize this in Wrangling Your Data.</a:t>
             </a:r>
           </a:p>
         </p:txBody>
@@ -6711,7 +6711,7 @@
             </a:r>
             <a:r>
               <a:rPr sz="2000"/>
-              <a:t>. Two columns encoding the same grouping. Useful redundancy, or something to simplify? We’ll revisit this in Module 2.</a:t>
+              <a:t>. Two columns encoding the same grouping. Useful redundancy, or something to simplify? We’ll revisit this in Wrangling Your Data.</a:t>
             </a:r>
           </a:p>
         </p:txBody>
@@ -8813,7 +8813,7 @@
             </a:pPr>
             <a:r>
               <a:rPr sz="2000" b="1"/>
-              <a:t>Up next — Module 2</a:t>
+              <a:t>Up next — Wrangling Your Data</a:t>
             </a:r>
           </a:p>
           <a:p>

--- a/docs/content/getting_started/getting_started_lecture.pptx
+++ b/docs/content/getting_started/getting_started_lecture.pptx
@@ -3471,7 +3471,7 @@
             </a:r>
             <a:r>
               <a:rPr/>
-              <a:t> — no spaces, no units hidden in the header text, all lowercase</a:t>
+              <a:t> — no spaces, no units hidden in the header text or variable names, all lowercase</a:t>
             </a:r>
           </a:p>
           <a:p>
@@ -3652,15 +3652,25 @@
               <a:rPr b="1"/>
               <a:t>relative</a:t>
             </a:r>
-            <a:r>
-              <a:rPr/>
-              <a:t> — no more </a:t>
+          </a:p>
+          <a:p>
+            <a:pPr lvl="1"/>
+            <a:r>
+              <a:rPr/>
+              <a:t>no more </a:t>
             </a:r>
             <a:r>
               <a:rPr>
                 <a:latin typeface="Courier"/>
               </a:rPr>
               <a:t>C:/Users/.../Desktop/final_FINAL2.xlsx</a:t>
+            </a:r>
+          </a:p>
+          <a:p>
+            <a:pPr lvl="1"/>
+            <a:r>
+              <a:rPr/>
+              <a:t>now set_wd to set the working directory!!! EVER!!!</a:t>
             </a:r>
           </a:p>
           <a:p>
@@ -3695,7 +3705,12 @@
             </a:r>
             <a:r>
               <a:rPr sz="2000"/>
-              <a:t>. R writes new, processed files — so you can always trace your steps back to the original numbers.</a:t>
+              <a:t>.</a:t>
+            </a:r>
+            <a:br/>
+            <a:r>
+              <a:rPr sz="2000"/>
+              <a:t>R writes new, processed files — so you can always trace your steps back to the original numbers.</a:t>
             </a:r>
           </a:p>
         </p:txBody>
@@ -3750,7 +3765,12 @@
             </a:r>
             <a:r>
               <a:rPr sz="2000"/>
-              <a:t> your data: who collected it, when, how, with what instrument. Without it, data are nearly useless — even to future-you.</a:t>
+              <a:t> your data: who collected it, when, how, with what instrument.</a:t>
+            </a:r>
+            <a:br/>
+            <a:r>
+              <a:rPr sz="2000"/>
+              <a:t>Without it, data are nearly useless — even to future-you.</a:t>
             </a:r>
           </a:p>
         </p:txBody>
@@ -6086,9 +6106,10 @@
               <a:rPr sz="2000" b="1"/>
               <a:t>Getting stuck is not failing — it is the job.</a:t>
             </a:r>
+            <a:br/>
             <a:r>
               <a:rPr sz="2000"/>
-              <a:t> Every working scientist reads error messages and searches for answers every day.</a:t>
+              <a:t>Every working scientist reads error messages and searches for answers every day.</a:t>
             </a:r>
           </a:p>
         </p:txBody>
@@ -6426,7 +6447,7 @@
             </a:r>
             <a:r>
               <a:rPr sz="2000"/>
-              <a:t> (sheltered/lee) or </a:t>
+              <a:t> (north/sheltered) or </a:t>
             </a:r>
             <a:r>
               <a:rPr sz="2000">
@@ -6436,7 +6457,7 @@
             </a:r>
             <a:r>
               <a:rPr sz="2000"/>
-              <a:t> (exposed/windward)</a:t>
+              <a:t> (south/exposed)</a:t>
             </a:r>
           </a:p>
           <a:p>
@@ -6445,7 +6466,7 @@
               <a:rPr sz="2000">
                 <a:latin typeface="Courier"/>
               </a:rPr>
-              <a:t>wind</a:t>
+              <a:t>sun</a:t>
             </a:r>
             <a:r>
               <a:rPr sz="2000"/>
@@ -6455,7 +6476,7 @@
               <a:rPr sz="2000">
                 <a:latin typeface="Courier"/>
               </a:rPr>
-              <a:t>"lee"</a:t>
+              <a:t>"shady"</a:t>
             </a:r>
             <a:r>
               <a:rPr sz="2000"/>
@@ -6465,7 +6486,7 @@
               <a:rPr sz="2000">
                 <a:latin typeface="Courier"/>
               </a:rPr>
-              <a:t>"wind"</a:t>
+              <a:t>"sunny"</a:t>
             </a:r>
             <a:r>
               <a:rPr sz="2000"/>
@@ -6592,7 +6613,7 @@
 $ date      &lt;chr&gt; "3/20/25", "3/20/25", "3/20/25", "3/20/25", "3/20/25", "3/20…
 $ group     &lt;chr&gt; "cephalopods", "cephalopods", "cephalopods", "cephalopods", …
 $ n_s       &lt;chr&gt; "n", "n", "n", "n", "n", "n", "s", "s", "s", "s", "s", "s", …
-$ wind      &lt;chr&gt; "lee", "lee", "lee", "lee", "lee", "lee", "wind", "wind", "w…
+$ sun       &lt;chr&gt; "shady", "shady", "shady", "shady", "shady", "shady", "sunny…
 $ tree_no   &lt;dbl&gt; 1, 1, 1, 1, 1, 1, 1, 1, 1, 1, 1, 1, 2, 2, 2, 2, 2, 2, 2, 2, …
 $ length_mm &lt;dbl&gt; 20, 21, 23, 25, 21, 16, 15, 16, 14, 17, 13, 15, 19, 18, 20, …</a:t>
             </a:r>
@@ -6667,7 +6688,7 @@
               <a:rPr sz="2000">
                 <a:latin typeface="Courier"/>
               </a:rPr>
-              <a:t>wind</a:t>
+              <a:t>sun</a:t>
             </a:r>
             <a:r>
               <a:rPr sz="2000"/>
@@ -6687,7 +6708,7 @@
               <a:rPr sz="2000">
                 <a:latin typeface="Courier"/>
               </a:rPr>
-              <a:t>lee</a:t>
+              <a:t>shady</a:t>
             </a:r>
             <a:r>
               <a:rPr sz="2000"/>
@@ -6707,7 +6728,7 @@
               <a:rPr sz="2000">
                 <a:latin typeface="Courier"/>
               </a:rPr>
-              <a:t>wind</a:t>
+              <a:t>sunny</a:t>
             </a:r>
             <a:r>
               <a:rPr sz="2000"/>
@@ -6979,7 +7000,7 @@
                 </a:solidFill>
                 <a:latin typeface="Courier"/>
               </a:rPr>
-              <a:t> wind, </a:t>
+              <a:t> n_s, </a:t>
             </a:r>
             <a:r>
               <a:rPr>
@@ -7055,8 +7076,8 @@
         </p:blipFill>
         <p:spPr bwMode="auto">
           <a:xfrm>
-            <a:off x="127000" y="1485900"/>
-            <a:ext cx="4432300" cy="2882900"/>
+            <a:off x="127000" y="1397000"/>
+            <a:ext cx="4432300" cy="3048000"/>
           </a:xfrm>
           <a:prstGeom prst="rect">
             <a:avLst/>
@@ -7295,7 +7316,7 @@
                 </a:solidFill>
                 <a:latin typeface="Courier"/>
               </a:rPr>
-              <a:t> wind, </a:t>
+              <a:t> sun, </a:t>
             </a:r>
             <a:r>
               <a:rPr>
@@ -7559,7 +7580,7 @@
                 </a:solidFill>
                 <a:latin typeface="Courier"/>
               </a:rPr>
-              <a:t>"Side of tree"</a:t>
+              <a:t>"Sun exposure"</a:t>
             </a:r>
             <a:r>
               <a:rPr>
@@ -7651,7 +7672,7 @@
                 </a:solidFill>
                 <a:latin typeface="Courier"/>
               </a:rPr>
-              <a:t>"Needle length by wind exposure"</a:t>
+              <a:t>"Needle length by sun exposure"</a:t>
             </a:r>
             <a:r>
               <a:rPr>
@@ -7681,8 +7702,8 @@
         </p:blipFill>
         <p:spPr bwMode="auto">
           <a:xfrm>
-            <a:off x="127000" y="1485900"/>
-            <a:ext cx="4432300" cy="2882900"/>
+            <a:off x="127000" y="1397000"/>
+            <a:ext cx="4432300" cy="3048000"/>
           </a:xfrm>
           <a:prstGeom prst="rect">
             <a:avLst/>
@@ -7739,7 +7760,7 @@
               <a:rPr sz="2000">
                 <a:latin typeface="Courier"/>
               </a:rPr>
-              <a:t>wind</a:t>
+              <a:t>sun</a:t>
             </a:r>
             <a:r>
               <a:rPr sz="2000"/>
@@ -7935,7 +7956,7 @@
                 </a:solidFill>
                 <a:latin typeface="Courier"/>
               </a:rPr>
-              <a:t> wind, </a:t>
+              <a:t> sun, </a:t>
             </a:r>
             <a:r>
               <a:rPr>
@@ -8199,7 +8220,7 @@
                 </a:solidFill>
                 <a:latin typeface="Courier"/>
               </a:rPr>
-              <a:t>"Side of tree"</a:t>
+              <a:t>"Sun exposure"</a:t>
             </a:r>
             <a:r>
               <a:rPr>
@@ -9719,7 +9740,7 @@
             </a:r>
             <a:r>
               <a:rPr b="1"/>
-              <a:t>north/sheltered (lee)</a:t>
+              <a:t>north/shady</a:t>
             </a:r>
             <a:r>
               <a:rPr/>
@@ -9727,11 +9748,25 @@
             </a:r>
             <a:r>
               <a:rPr b="1"/>
-              <a:t>south/exposed (windward)</a:t>
+              <a:t>south/sunny</a:t>
             </a:r>
             <a:r>
               <a:rPr/>
               <a:t> side:</a:t>
+            </a:r>
+          </a:p>
+          <a:p>
+            <a:pPr lvl="0"/>
+            <a:r>
+              <a:rPr b="1"/>
+              <a:t>Question:</a:t>
+            </a:r>
+          </a:p>
+          <a:p>
+            <a:pPr lvl="0"/>
+            <a:r>
+              <a:rPr b="1"/>
+              <a:t>Prediction:</a:t>
             </a:r>
           </a:p>
           <a:p>
@@ -9740,10 +9775,6 @@
               <a:rPr b="1"/>
               <a:t>H₀ (null):</a:t>
             </a:r>
-            <a:r>
-              <a:rPr/>
-              <a:t> No difference in needle length between the two sides.</a:t>
-            </a:r>
           </a:p>
           <a:p>
             <a:pPr lvl="0"/>
@@ -9751,10 +9782,6 @@
               <a:rPr b="1"/>
               <a:t>Hₐ (alternate):</a:t>
             </a:r>
-            <a:r>
-              <a:rPr/>
-              <a:t> Needle length differs between the two sides.</a:t>
-            </a:r>
           </a:p>
           <a:p>
             <a:pPr lvl="0" indent="0" marL="1270000">
@@ -9778,6 +9805,28 @@
             <a:pPr lvl="0"/>
             <a:r>
               <a:rPr sz="2000" b="1"/>
+              <a:t>Question</a:t>
+            </a:r>
+            <a:r>
+              <a:rPr sz="2000"/>
+              <a:t>: what is your question</a:t>
+            </a:r>
+          </a:p>
+          <a:p>
+            <a:pPr lvl="0"/>
+            <a:r>
+              <a:rPr sz="2000" b="1"/>
+              <a:t>Precition</a:t>
+            </a:r>
+            <a:r>
+              <a:rPr sz="2000"/>
+              <a:t>: what do you think will happen</a:t>
+            </a:r>
+          </a:p>
+          <a:p>
+            <a:pPr lvl="0"/>
+            <a:r>
+              <a:rPr sz="2000" b="1"/>
               <a:t>H₀</a:t>
             </a:r>
             <a:r>
@@ -9804,7 +9853,7 @@
             </a:r>
             <a:r>
               <a:rPr sz="2000" b="1"/>
-              <a:t>not</a:t>
+              <a:t>NOE</a:t>
             </a:r>
             <a:r>
               <a:rPr sz="2000"/>
@@ -9934,9 +9983,19 @@
               <a:rPr b="1"/>
               <a:t>Can we test this with needles from one tree?</a:t>
             </a:r>
-            <a:r>
-              <a:rPr/>
-              <a:t> No — that tree could just happen to have short needles. Treating many needles from </a:t>
+          </a:p>
+          <a:p>
+            <a:pPr lvl="1"/>
+            <a:r>
+              <a:rPr/>
+              <a:t>No — that tree could just happen to have short needles.</a:t>
+            </a:r>
+          </a:p>
+          <a:p>
+            <a:pPr lvl="1"/>
+            <a:r>
+              <a:rPr/>
+              <a:t>Treating many needles from </a:t>
             </a:r>
             <a:r>
               <a:rPr i="1"/>
@@ -9961,9 +10020,12 @@
               <a:rPr b="1"/>
               <a:t>The tree — not the needle — is the unit of replication.</a:t>
             </a:r>
-            <a:r>
-              <a:rPr/>
-              <a:t> We need needles from </a:t>
+          </a:p>
+          <a:p>
+            <a:pPr lvl="1"/>
+            <a:r>
+              <a:rPr/>
+              <a:t>We need needles from </a:t>
             </a:r>
             <a:r>
               <a:rPr i="1"/>
@@ -10000,7 +10062,7 @@
             </a:pPr>
             <a:r>
               <a:rPr sz="2000" b="1"/>
-              <a:t>Dependent vs. independent variable</a:t>
+              <a:t>Dependent vs. independent variables</a:t>
             </a:r>
           </a:p>
           <a:p>
@@ -10065,7 +10127,7 @@
             </a:pPr>
             <a:r>
               <a:rPr sz="2000"/>
-              <a:t>Each group collects needles from the lee side </a:t>
+              <a:t>Each group collects needles from the shady side </a:t>
             </a:r>
             <a:r>
               <a:rPr sz="2000" b="1"/>
@@ -10073,7 +10135,16 @@
             </a:r>
             <a:r>
               <a:rPr sz="2000"/>
-              <a:t> the windward side of the same trees, using one agreed-on method — same height, same “mature needle” definition, same spot on the branch.</a:t>
+              <a:t> the sunny side of the same trees, using one agreed-on method — same height, same “mature needle” definition, same spot on the branch.</a:t>
+            </a:r>
+          </a:p>
+          <a:p>
+            <a:pPr lvl="0" indent="0" marL="1270000">
+              <a:buNone/>
+            </a:pPr>
+            <a:r>
+              <a:rPr sz="2000"/>
+              <a:t>We are going to the field to collect pine needles - easy but yes… and then come back, decide how to measure, measure them, enter data in excel</a:t>
             </a:r>
           </a:p>
         </p:txBody>

--- a/docs/content/getting_started/getting_started_lecture.pptx
+++ b/docs/content/getting_started/getting_started_lecture.pptx
@@ -9426,8 +9426,8 @@
         </p:blipFill>
         <p:spPr bwMode="auto">
           <a:xfrm>
-            <a:off x="1295400" y="1270000"/>
-            <a:ext cx="2108200" cy="3302000"/>
+            <a:off x="1447800" y="1270000"/>
+            <a:ext cx="1778000" cy="2794000"/>
           </a:xfrm>
           <a:prstGeom prst="rect">
             <a:avLst/>
@@ -9440,6 +9440,38 @@
           </a:ln>
         </p:spPr>
       </p:pic>
+      <p:sp>
+        <p:nvSpPr>
+          <p:cNvPr id="1" name="TextBox 3"/>
+          <p:cNvSpPr txBox="1"/>
+          <p:nvPr>
+            <p:ph idx="1"/>
+          </p:nvPr>
+        </p:nvSpPr>
+        <p:spPr>
+          <a:xfrm>
+            <a:off x="127000" y="4064000"/>
+            <a:ext cx="4432300" cy="508000"/>
+          </a:xfrm>
+          <a:prstGeom prst="rect">
+            <a:avLst/>
+          </a:prstGeom>
+          <a:noFill/>
+        </p:spPr>
+        <p:txBody>
+          <a:bodyPr/>
+          <a:lstStyle/>
+          <a:p>
+            <a:pPr lvl="0" indent="0" marL="0" algn="ctr">
+              <a:buNone/>
+            </a:pPr>
+            <a:r>
+              <a:rPr/>
+              <a:t>Flowchart of the inductive reasoning phase, highlighted at the top: Information (observation, experiment, literature) leads to a Model, which leads to Hypothesis, then a testable Prediction, then a Test of Hypothesis that loops back via Yes/No decision points.</a:t>
+            </a:r>
+          </a:p>
+        </p:txBody>
+      </p:sp>
       <p:sp>
         <p:nvSpPr>
           <p:cNvPr id="4" name="Content Placeholder 3"/>
@@ -9532,8 +9564,8 @@
         </p:blipFill>
         <p:spPr bwMode="auto">
           <a:xfrm>
-            <a:off x="5689600" y="1295400"/>
-            <a:ext cx="2159000" cy="3276600"/>
+            <a:off x="5854700" y="1295400"/>
+            <a:ext cx="1828800" cy="2768600"/>
           </a:xfrm>
           <a:prstGeom prst="rect">
             <a:avLst/>
@@ -9546,6 +9578,38 @@
           </a:ln>
         </p:spPr>
       </p:pic>
+      <p:sp>
+        <p:nvSpPr>
+          <p:cNvPr id="1" name="TextBox 3"/>
+          <p:cNvSpPr txBox="1"/>
+          <p:nvPr>
+            <p:ph idx="1"/>
+          </p:nvPr>
+        </p:nvSpPr>
+        <p:spPr>
+          <a:xfrm>
+            <a:off x="4749800" y="4064000"/>
+            <a:ext cx="4038600" cy="508000"/>
+          </a:xfrm>
+          <a:prstGeom prst="rect">
+            <a:avLst/>
+          </a:prstGeom>
+          <a:noFill/>
+        </p:spPr>
+        <p:txBody>
+          <a:bodyPr/>
+          <a:lstStyle/>
+          <a:p>
+            <a:pPr lvl="0" indent="0" marL="0" algn="ctr">
+              <a:buNone/>
+            </a:pPr>
+            <a:r>
+              <a:rPr/>
+              <a:t>The same scientific-reasoning flowchart as the inductive diagram, but with the deductive phase highlighted instead: starting from Hypothesis, moving to a testable Prediction and Test of Hypothesis, showing deduction as reasoning from a general rule down to a specific testable case.</a:t>
+            </a:r>
+          </a:p>
+        </p:txBody>
+      </p:sp>
       <p:sp>
         <p:nvSpPr>
           <p:cNvPr id="6" name="Content Placeholder 5"/>
@@ -9894,7 +9958,7 @@
         </p:blipFill>
         <p:spPr bwMode="auto">
           <a:xfrm>
-            <a:off x="6121400" y="1041400"/>
+            <a:off x="6121400" y="787400"/>
             <a:ext cx="2781300" cy="3708400"/>
           </a:xfrm>
           <a:prstGeom prst="rect">
@@ -9908,6 +9972,38 @@
           </a:ln>
         </p:spPr>
       </p:pic>
+      <p:sp>
+        <p:nvSpPr>
+          <p:cNvPr id="1" name="TextBox 3"/>
+          <p:cNvSpPr txBox="1"/>
+          <p:nvPr>
+            <p:ph idx="1"/>
+          </p:nvPr>
+        </p:nvSpPr>
+        <p:spPr>
+          <a:xfrm>
+            <a:off x="6121400" y="4622800"/>
+            <a:ext cx="2781300" cy="508000"/>
+          </a:xfrm>
+          <a:prstGeom prst="rect">
+            <a:avLst/>
+          </a:prstGeom>
+          <a:noFill/>
+        </p:spPr>
+        <p:txBody>
+          <a:bodyPr/>
+          <a:lstStyle/>
+          <a:p>
+            <a:pPr lvl="0" indent="0" marL="0" algn="ctr">
+              <a:buNone/>
+            </a:pPr>
+            <a:r>
+              <a:rPr/>
+              <a:t>Photo comparing needle length and bundle count across six pine species (Pinus ponderosa, nigra, resinosa, strobus, sylvestris, banksiana), showing needles ranging from long single pairs to short clusters of five, illustrating the kind of length measurement the class’s own pine-needle sampling will use.</a:t>
+            </a:r>
+          </a:p>
+        </p:txBody>
+      </p:sp>
     </p:spTree>
   </p:cSld>
 </p:sld>

--- a/docs/content/getting_started/getting_started_lecture.pptx
+++ b/docs/content/getting_started/getting_started_lecture.pptx
@@ -3624,7 +3624,8 @@
               <a:t>pine_project/
 ├── data/       ← raw files, never overwritten
 ├── scripts/    ← your .R code
-└── figures/    ← plots you save</a:t>
+├── figures/    ← plots you save
+└── output/    ← place to save modified data</a:t>
             </a:r>
           </a:p>
           <a:p>
@@ -3670,7 +3671,7 @@
             <a:pPr lvl="1"/>
             <a:r>
               <a:rPr/>
-              <a:t>now set_wd to set the working directory!!! EVER!!!</a:t>
+              <a:t>no using set_wd to set the working directory!!! EVER!!!</a:t>
             </a:r>
           </a:p>
           <a:p>
@@ -5180,6 +5181,11 @@
               <a:rPr sz="2000"/>
               <a:t> returns before you run it.</a:t>
             </a:r>
+            <a:br/>
+            <a:r>
+              <a:rPr sz="2000"/>
+              <a:t>Note round in R works odd and you should use round_half_up from janitor</a:t>
+            </a:r>
           </a:p>
         </p:txBody>
       </p:sp>
@@ -5612,7 +5618,12 @@
             </a:r>
             <a:r>
               <a:rPr sz="2000"/>
-              <a:t> means “find an object called s,” not the text “s.” R will error if no such object exists.</a:t>
+              <a:t> means “find an object called s,” not the text “s.”</a:t>
+            </a:r>
+            <a:br/>
+            <a:r>
+              <a:rPr sz="2000"/>
+              <a:t>R will error if no such object exists.</a:t>
             </a:r>
           </a:p>
         </p:txBody>
@@ -5654,8 +5665,21 @@
               <a:buNone/>
             </a:pPr>
             <a:r>
+              <a:rPr sz="2000" b="1"/>
+              <a:t>Console</a:t>
+            </a:r>
+            <a:r>
               <a:rPr sz="2000"/>
-              <a:t>Console = scratch paper. Script = the lab notebook you keep and rerun.</a:t>
+              <a:t> = scratch paper.</a:t>
+            </a:r>
+            <a:br/>
+            <a:r>
+              <a:rPr sz="2000" b="1"/>
+              <a:t>Script</a:t>
+            </a:r>
+            <a:r>
+              <a:rPr sz="2000"/>
+              <a:t> = the lab notebook you keep and rerun.</a:t>
             </a:r>
           </a:p>
         </p:txBody>
@@ -7076,8 +7100,8 @@
         </p:blipFill>
         <p:spPr bwMode="auto">
           <a:xfrm>
-            <a:off x="127000" y="1397000"/>
-            <a:ext cx="4432300" cy="3048000"/>
+            <a:off x="685800" y="1270000"/>
+            <a:ext cx="3302000" cy="3302000"/>
           </a:xfrm>
           <a:prstGeom prst="rect">
             <a:avLst/>
@@ -7143,6 +7167,11 @@
             <a:r>
               <a:rPr sz="2000"/>
               <a:t> of a line, never the start.</a:t>
+            </a:r>
+            <a:br/>
+            <a:r>
+              <a:rPr sz="2000"/>
+              <a:t>this is what adds layers to the plot and order matters</a:t>
             </a:r>
           </a:p>
         </p:txBody>
@@ -10084,7 +10113,7 @@
             <a:pPr lvl="1"/>
             <a:r>
               <a:rPr/>
-              <a:t>No — that tree could just happen to have short needles.</a:t>
+              <a:t>No — that tree could just happen to have short needles on one side due to other drivers.</a:t>
             </a:r>
           </a:p>
           <a:p>

--- a/docs/content/getting_started/getting_started_lecture.pptx
+++ b/docs/content/getting_started/getting_started_lecture.pptx
@@ -9946,7 +9946,7 @@
             </a:r>
             <a:r>
               <a:rPr sz="2000" b="1"/>
-              <a:t>NOE</a:t>
+              <a:t>NOT</a:t>
             </a:r>
             <a:r>
               <a:rPr sz="2000"/>
